--- a/public/presentations/CS211_Recitation_6.pptx
+++ b/public/presentations/CS211_Recitation_6.pptx
@@ -2,39 +2,39 @@
 <file path=ppt/presentation.xml><?xml version="1.0" encoding="utf-8"?>
 <p:presentation xmlns:p="http://schemas.openxmlformats.org/presentationml/2006/main" embedTrueTypeFonts="1" saveSubsetFonts="0">
   <p:sldMasterIdLst>
-    <p:sldMasterId xmlns:r="http://schemas.openxmlformats.org/officeDocument/2006/relationships" id="2147483648" r:id="Rce37a3c3114c4fbb"/>
+    <p:sldMasterId xmlns:r="http://schemas.openxmlformats.org/officeDocument/2006/relationships" id="2147483648" r:id="Rc546562754c84fab"/>
   </p:sldMasterIdLst>
   <p:notesMasterIdLst>
-    <p:notesMasterId xmlns:r="http://schemas.openxmlformats.org/officeDocument/2006/relationships" r:id="R5c35e858747f439c"/>
+    <p:notesMasterId xmlns:r="http://schemas.openxmlformats.org/officeDocument/2006/relationships" r:id="R18c94962a3424da1"/>
   </p:notesMasterIdLst>
   <p:sldIdLst>
-    <p:sldId xmlns:r="http://schemas.openxmlformats.org/officeDocument/2006/relationships" id="256" r:id="Rc0b04962c1d14109"/>
-    <p:sldId xmlns:r="http://schemas.openxmlformats.org/officeDocument/2006/relationships" id="257" r:id="Rd5598d8b35224914"/>
-    <p:sldId xmlns:r="http://schemas.openxmlformats.org/officeDocument/2006/relationships" id="258" r:id="R0001a3d091b941ea"/>
-    <p:sldId xmlns:r="http://schemas.openxmlformats.org/officeDocument/2006/relationships" id="259" r:id="R061d007f5163488a"/>
-    <p:sldId xmlns:r="http://schemas.openxmlformats.org/officeDocument/2006/relationships" id="260" r:id="R093fe9de0fa04d5b"/>
-    <p:sldId xmlns:r="http://schemas.openxmlformats.org/officeDocument/2006/relationships" id="261" r:id="R4405dd60f6e64fe1"/>
-    <p:sldId xmlns:r="http://schemas.openxmlformats.org/officeDocument/2006/relationships" id="262" r:id="R2d46f393895b47f7"/>
-    <p:sldId xmlns:r="http://schemas.openxmlformats.org/officeDocument/2006/relationships" id="263" r:id="Rb45b38a895b34685"/>
-    <p:sldId xmlns:r="http://schemas.openxmlformats.org/officeDocument/2006/relationships" id="264" r:id="Rc26d04a3c4134368"/>
-    <p:sldId xmlns:r="http://schemas.openxmlformats.org/officeDocument/2006/relationships" id="265" r:id="R527aeb9a87c044dd"/>
-    <p:sldId xmlns:r="http://schemas.openxmlformats.org/officeDocument/2006/relationships" id="266" r:id="Ra5959446f9ae4689"/>
-    <p:sldId xmlns:r="http://schemas.openxmlformats.org/officeDocument/2006/relationships" id="267" r:id="R6fd01f14fd4d48e0"/>
-    <p:sldId xmlns:r="http://schemas.openxmlformats.org/officeDocument/2006/relationships" id="268" r:id="R02183aec252d477a"/>
-    <p:sldId xmlns:r="http://schemas.openxmlformats.org/officeDocument/2006/relationships" id="269" r:id="R54be0667eeb44c19"/>
-    <p:sldId xmlns:r="http://schemas.openxmlformats.org/officeDocument/2006/relationships" id="270" r:id="R27efccb5765d4072"/>
-    <p:sldId xmlns:r="http://schemas.openxmlformats.org/officeDocument/2006/relationships" id="271" r:id="R760e4731d18341b3"/>
-    <p:sldId xmlns:r="http://schemas.openxmlformats.org/officeDocument/2006/relationships" id="272" r:id="Reeac349dda054a70"/>
+    <p:sldId xmlns:r="http://schemas.openxmlformats.org/officeDocument/2006/relationships" id="256" r:id="R110869d41b21419b"/>
+    <p:sldId xmlns:r="http://schemas.openxmlformats.org/officeDocument/2006/relationships" id="257" r:id="R3d01d33dd3914642"/>
+    <p:sldId xmlns:r="http://schemas.openxmlformats.org/officeDocument/2006/relationships" id="258" r:id="R6869c86500834ebe"/>
+    <p:sldId xmlns:r="http://schemas.openxmlformats.org/officeDocument/2006/relationships" id="259" r:id="Rbe860b6dc89845a2"/>
+    <p:sldId xmlns:r="http://schemas.openxmlformats.org/officeDocument/2006/relationships" id="260" r:id="Rf11b65376f174638"/>
+    <p:sldId xmlns:r="http://schemas.openxmlformats.org/officeDocument/2006/relationships" id="261" r:id="R5a954e3fa19b4a74"/>
+    <p:sldId xmlns:r="http://schemas.openxmlformats.org/officeDocument/2006/relationships" id="262" r:id="R9b659ccf9ed94c1c"/>
+    <p:sldId xmlns:r="http://schemas.openxmlformats.org/officeDocument/2006/relationships" id="263" r:id="Rb76f5cce82184a70"/>
+    <p:sldId xmlns:r="http://schemas.openxmlformats.org/officeDocument/2006/relationships" id="264" r:id="R3297c3245b304110"/>
+    <p:sldId xmlns:r="http://schemas.openxmlformats.org/officeDocument/2006/relationships" id="265" r:id="R13f28eab663e499a"/>
+    <p:sldId xmlns:r="http://schemas.openxmlformats.org/officeDocument/2006/relationships" id="266" r:id="R6f50a71239d341cf"/>
+    <p:sldId xmlns:r="http://schemas.openxmlformats.org/officeDocument/2006/relationships" id="267" r:id="Reefa3f5b44cb4239"/>
+    <p:sldId xmlns:r="http://schemas.openxmlformats.org/officeDocument/2006/relationships" id="268" r:id="Rd37e706a9aec496d"/>
+    <p:sldId xmlns:r="http://schemas.openxmlformats.org/officeDocument/2006/relationships" id="269" r:id="Rfaa40ca614cd44ef"/>
+    <p:sldId xmlns:r="http://schemas.openxmlformats.org/officeDocument/2006/relationships" id="270" r:id="R471baf6deba64591"/>
+    <p:sldId xmlns:r="http://schemas.openxmlformats.org/officeDocument/2006/relationships" id="271" r:id="Rc7e3907cafd54fce"/>
+    <p:sldId xmlns:r="http://schemas.openxmlformats.org/officeDocument/2006/relationships" id="272" r:id="R4a5f4798a59f4262"/>
   </p:sldIdLst>
   <p:sldSz cx="12192000" cy="6858000"/>
   <p:notesSz cx="6858000" cy="9144000"/>
   <p:embeddedFontLst>
     <p:embeddedFont>
       <p:font typeface="OpenAI Sans"/>
-      <p:regular xmlns:r="http://schemas.openxmlformats.org/officeDocument/2006/relationships" r:id="Ref6c7c355c124c65"/>
-      <p:bold xmlns:r="http://schemas.openxmlformats.org/officeDocument/2006/relationships" r:id="R159c817443a34e57"/>
-      <p:italic xmlns:r="http://schemas.openxmlformats.org/officeDocument/2006/relationships" r:id="R0c15ccd6159846fe"/>
-      <p:boldItalic xmlns:r="http://schemas.openxmlformats.org/officeDocument/2006/relationships" r:id="R35b3b56cd8184365"/>
+      <p:regular xmlns:r="http://schemas.openxmlformats.org/officeDocument/2006/relationships" r:id="R417b4eba6db447c3"/>
+      <p:bold xmlns:r="http://schemas.openxmlformats.org/officeDocument/2006/relationships" r:id="Re4d1668761e9423e"/>
+      <p:italic xmlns:r="http://schemas.openxmlformats.org/officeDocument/2006/relationships" r:id="R3dee533c0dc64ec6"/>
+      <p:boldItalic xmlns:r="http://schemas.openxmlformats.org/officeDocument/2006/relationships" r:id="R28372c5e0a8949ec"/>
     </p:embeddedFont>
   </p:embeddedFontLst>
   <p:defaultTextStyle>
@@ -636,7 +636,67 @@
               <a:buNone/>
             </a:pPr>
             <a:r>
-              <a:t>Answer: E = 126, so the actual exponent is −1. The set fraction bits contribute 1/2 + 1/8 = 0.625. The complete significand is 1.625, giving 2^(−1) × 1.625 = 0.8125. The final bit pattern is 0x3F500000.</a:t>
+              <a:t>Answer: 1. Stored exponent E = 126, so the actual exponent is 126 − 127 = −1.</a:t>
+            </a:r>
+            <a:endParaRPr/>
+          </a:p>
+          <a:p xmlns:a="http://schemas.openxmlformats.org/drawingml/2006/main">
+            <a:pPr marL="0" lvl="0" indent="0" algn="l">
+              <a:spcBef>
+                <a:spcPts val="0"/>
+              </a:spcBef>
+              <a:spcAft>
+                <a:spcPts val="0"/>
+              </a:spcAft>
+              <a:buNone/>
+            </a:pPr>
+            <a:r>
+              <a:t/>
+            </a:r>
+            <a:endParaRPr/>
+          </a:p>
+          <a:p xmlns:a="http://schemas.openxmlformats.org/drawingml/2006/main">
+            <a:pPr marL="0" lvl="0" indent="0" algn="l">
+              <a:spcBef>
+                <a:spcPts val="0"/>
+              </a:spcBef>
+              <a:spcAft>
+                <a:spcPts val="0"/>
+              </a:spcAft>
+              <a:buNone/>
+            </a:pPr>
+            <a:r>
+              <a:t>2. Fraction weights: bits 22 and 20 contribute 1/2 + 1/8 = 0.625. Restore the implied 1 to get a significand of 1.625.</a:t>
+            </a:r>
+            <a:endParaRPr/>
+          </a:p>
+          <a:p xmlns:a="http://schemas.openxmlformats.org/drawingml/2006/main">
+            <a:pPr marL="0" lvl="0" indent="0" algn="l">
+              <a:spcBef>
+                <a:spcPts val="0"/>
+              </a:spcBef>
+              <a:spcAft>
+                <a:spcPts val="0"/>
+              </a:spcAft>
+              <a:buNone/>
+            </a:pPr>
+            <a:r>
+              <a:t/>
+            </a:r>
+            <a:endParaRPr/>
+          </a:p>
+          <a:p xmlns:a="http://schemas.openxmlformats.org/drawingml/2006/main">
+            <a:pPr marL="0" lvl="0" indent="0" algn="l">
+              <a:spcBef>
+                <a:spcPts val="0"/>
+              </a:spcBef>
+              <a:spcAft>
+                <a:spcPts val="0"/>
+              </a:spcAft>
+              <a:buNone/>
+            </a:pPr>
+            <a:r>
+              <a:t>3. Decimal value = 2^(−1) × 1.625 = 0.8125. The final bit pattern is 0x3F500000.</a:t>
             </a:r>
             <a:endParaRPr/>
           </a:p>
@@ -746,7 +806,127 @@
               <a:buNone/>
             </a:pPr>
             <a:r>
-              <a:t>Answer: 6.5 = 110.1₂ = 1.101₂ × 2². For −6.5, sign = 1; stored exponent = 2 + 127 = 129 = 10000001₂; fraction = 101 followed by 20 zeros. The FP32 bit pattern is 0xC0D00000.</a:t>
+              <a:t>Answer: 1. Binary magnitude: 6.5 = 110.1₂.</a:t>
+            </a:r>
+            <a:endParaRPr/>
+          </a:p>
+          <a:p xmlns:a="http://schemas.openxmlformats.org/drawingml/2006/main">
+            <a:pPr marL="0" lvl="0" indent="0" algn="l">
+              <a:spcBef>
+                <a:spcPts val="0"/>
+              </a:spcBef>
+              <a:spcAft>
+                <a:spcPts val="0"/>
+              </a:spcAft>
+              <a:buNone/>
+            </a:pPr>
+            <a:r>
+              <a:t/>
+            </a:r>
+            <a:endParaRPr/>
+          </a:p>
+          <a:p xmlns:a="http://schemas.openxmlformats.org/drawingml/2006/main">
+            <a:pPr marL="0" lvl="0" indent="0" algn="l">
+              <a:spcBef>
+                <a:spcPts val="0"/>
+              </a:spcBef>
+              <a:spcAft>
+                <a:spcPts val="0"/>
+              </a:spcAft>
+              <a:buNone/>
+            </a:pPr>
+            <a:r>
+              <a:t>2. Normalized magnitude: 1.101₂ × 2².</a:t>
+            </a:r>
+            <a:endParaRPr/>
+          </a:p>
+          <a:p xmlns:a="http://schemas.openxmlformats.org/drawingml/2006/main">
+            <a:pPr marL="0" lvl="0" indent="0" algn="l">
+              <a:spcBef>
+                <a:spcPts val="0"/>
+              </a:spcBef>
+              <a:spcAft>
+                <a:spcPts val="0"/>
+              </a:spcAft>
+              <a:buNone/>
+            </a:pPr>
+            <a:r>
+              <a:t/>
+            </a:r>
+            <a:endParaRPr/>
+          </a:p>
+          <a:p xmlns:a="http://schemas.openxmlformats.org/drawingml/2006/main">
+            <a:pPr marL="0" lvl="0" indent="0" algn="l">
+              <a:spcBef>
+                <a:spcPts val="0"/>
+              </a:spcBef>
+              <a:spcAft>
+                <a:spcPts val="0"/>
+              </a:spcAft>
+              <a:buNone/>
+            </a:pPr>
+            <a:r>
+              <a:t>3. Sign bit = 1 because the requested value is negative.</a:t>
+            </a:r>
+            <a:endParaRPr/>
+          </a:p>
+          <a:p xmlns:a="http://schemas.openxmlformats.org/drawingml/2006/main">
+            <a:pPr marL="0" lvl="0" indent="0" algn="l">
+              <a:spcBef>
+                <a:spcPts val="0"/>
+              </a:spcBef>
+              <a:spcAft>
+                <a:spcPts val="0"/>
+              </a:spcAft>
+              <a:buNone/>
+            </a:pPr>
+            <a:r>
+              <a:t/>
+            </a:r>
+            <a:endParaRPr/>
+          </a:p>
+          <a:p xmlns:a="http://schemas.openxmlformats.org/drawingml/2006/main">
+            <a:pPr marL="0" lvl="0" indent="0" algn="l">
+              <a:spcBef>
+                <a:spcPts val="0"/>
+              </a:spcBef>
+              <a:spcAft>
+                <a:spcPts val="0"/>
+              </a:spcAft>
+              <a:buNone/>
+            </a:pPr>
+            <a:r>
+              <a:t>4. Stored exponent = 2 + 127 = 129 = 10000001₂.</a:t>
+            </a:r>
+            <a:endParaRPr/>
+          </a:p>
+          <a:p xmlns:a="http://schemas.openxmlformats.org/drawingml/2006/main">
+            <a:pPr marL="0" lvl="0" indent="0" algn="l">
+              <a:spcBef>
+                <a:spcPts val="0"/>
+              </a:spcBef>
+              <a:spcAft>
+                <a:spcPts val="0"/>
+              </a:spcAft>
+              <a:buNone/>
+            </a:pPr>
+            <a:r>
+              <a:t/>
+            </a:r>
+            <a:endParaRPr/>
+          </a:p>
+          <a:p xmlns:a="http://schemas.openxmlformats.org/drawingml/2006/main">
+            <a:pPr marL="0" lvl="0" indent="0" algn="l">
+              <a:spcBef>
+                <a:spcPts val="0"/>
+              </a:spcBef>
+              <a:spcAft>
+                <a:spcPts val="0"/>
+              </a:spcAft>
+              <a:buNone/>
+            </a:pPr>
+            <a:r>
+              <a:t>5. Fraction = 101 followed by 20 zeros. The complete FP32 bit pattern is 0xC0D00000.</a:t>
             </a:r>
             <a:endParaRPr/>
           </a:p>
@@ -1016,7 +1196,37 @@
               <a:buNone/>
             </a:pPr>
             <a:r>
-              <a:t>Answer: mulss produces 2.5 × 4.0 = 10.0. addss produces 10.0 + 4.0 = 14.0. cvtss2sd converts the low scalar value to a double, still 14.0. C promotes float arguments to double for variadic functions such as printf; %f expects that promoted value.</a:t>
+              <a:t>Answer: 1. Values after each instruction: mulss gives 10.0; addss gives 14.0; cvtss2sd converts that low scalar value to a double, still 14.0.</a:t>
+            </a:r>
+            <a:endParaRPr/>
+          </a:p>
+          <a:p xmlns:a="http://schemas.openxmlformats.org/drawingml/2006/main">
+            <a:pPr marL="0" lvl="0" indent="0" algn="l">
+              <a:spcBef>
+                <a:spcPts val="0"/>
+              </a:spcBef>
+              <a:spcAft>
+                <a:spcPts val="0"/>
+              </a:spcAft>
+              <a:buNone/>
+            </a:pPr>
+            <a:r>
+              <a:t/>
+            </a:r>
+            <a:endParaRPr/>
+          </a:p>
+          <a:p xmlns:a="http://schemas.openxmlformats.org/drawingml/2006/main">
+            <a:pPr marL="0" lvl="0" indent="0" algn="l">
+              <a:spcBef>
+                <a:spcPts val="0"/>
+              </a:spcBef>
+              <a:spcAft>
+                <a:spcPts val="0"/>
+              </a:spcAft>
+              <a:buNone/>
+            </a:pPr>
+            <a:r>
+              <a:t>2. Why convert before printf? C promotes float arguments to double for variadic functions such as printf; %f expects that promoted value.</a:t>
             </a:r>
             <a:endParaRPr/>
           </a:p>
@@ -1126,7 +1336,37 @@
               <a:buNone/>
             </a:pPr>
             <a:r>
-              <a:t>Answer: No. 40 × 2 KiB = 80 KiB, which exceeds 64 KiB. At most 32 frames fit in this simplified model. Real frames have other costs, and stack limits depend on the environment. The stack need not literally collide with the heap to overflow.</a:t>
+              <a:t>Answer: 1. Required space: 40 × 2 KiB = 80 KiB.</a:t>
+            </a:r>
+            <a:endParaRPr/>
+          </a:p>
+          <a:p xmlns:a="http://schemas.openxmlformats.org/drawingml/2006/main">
+            <a:pPr marL="0" lvl="0" indent="0" algn="l">
+              <a:spcBef>
+                <a:spcPts val="0"/>
+              </a:spcBef>
+              <a:spcAft>
+                <a:spcPts val="0"/>
+              </a:spcAft>
+              <a:buNone/>
+            </a:pPr>
+            <a:r>
+              <a:t/>
+            </a:r>
+            <a:endParaRPr/>
+          </a:p>
+          <a:p xmlns:a="http://schemas.openxmlformats.org/drawingml/2006/main">
+            <a:pPr marL="0" lvl="0" indent="0" algn="l">
+              <a:spcBef>
+                <a:spcPts val="0"/>
+              </a:spcBef>
+              <a:spcAft>
+                <a:spcPts val="0"/>
+              </a:spcAft>
+              <a:buNone/>
+            </a:pPr>
+            <a:r>
+              <a:t>2. Can 40 active calls fit? No. 80 KiB exceeds the 64 KiB budget; at most 32 frames fit in this simplified model. Real frames have other costs, and stack limits depend on the environment. The stack need not literally collide with the heap to overflow.</a:t>
             </a:r>
             <a:endParaRPr/>
           </a:p>
@@ -1236,7 +1476,97 @@
               <a:buNone/>
             </a:pPr>
             <a:r>
-              <a:t>Answer: name has 4 bytes, with valid indices 0–3. The terminator at name[4] is out of bounds. A 4-byte buffer holds at most 3 ordinary string characters plus a null terminator. A write past a stack buffer can corrupt adjacent data or saved call state, but the exact effect and whether it crashes are not guaranteed.</a:t>
+              <a:t>Answer: 1. Capacity: name has 4 bytes, so it holds at most 3 ordinary string characters plus a null terminator.</a:t>
+            </a:r>
+            <a:endParaRPr/>
+          </a:p>
+          <a:p xmlns:a="http://schemas.openxmlformats.org/drawingml/2006/main">
+            <a:pPr marL="0" lvl="0" indent="0" algn="l">
+              <a:spcBef>
+                <a:spcPts val="0"/>
+              </a:spcBef>
+              <a:spcAft>
+                <a:spcPts val="0"/>
+              </a:spcAft>
+              <a:buNone/>
+            </a:pPr>
+            <a:r>
+              <a:t/>
+            </a:r>
+            <a:endParaRPr/>
+          </a:p>
+          <a:p xmlns:a="http://schemas.openxmlformats.org/drawingml/2006/main">
+            <a:pPr marL="0" lvl="0" indent="0" algn="l">
+              <a:spcBef>
+                <a:spcPts val="0"/>
+              </a:spcBef>
+              <a:spcAft>
+                <a:spcPts val="0"/>
+              </a:spcAft>
+              <a:buNone/>
+            </a:pPr>
+            <a:r>
+              <a:t>2. Invalid write: name[4] is out of bounds; valid indices are 0–3.</a:t>
+            </a:r>
+            <a:endParaRPr/>
+          </a:p>
+          <a:p xmlns:a="http://schemas.openxmlformats.org/drawingml/2006/main">
+            <a:pPr marL="0" lvl="0" indent="0" algn="l">
+              <a:spcBef>
+                <a:spcPts val="0"/>
+              </a:spcBef>
+              <a:spcAft>
+                <a:spcPts val="0"/>
+              </a:spcAft>
+              <a:buNone/>
+            </a:pPr>
+            <a:r>
+              <a:t/>
+            </a:r>
+            <a:endParaRPr/>
+          </a:p>
+          <a:p xmlns:a="http://schemas.openxmlformats.org/drawingml/2006/main">
+            <a:pPr marL="0" lvl="0" indent="0" algn="l">
+              <a:spcBef>
+                <a:spcPts val="0"/>
+              </a:spcBef>
+              <a:spcAft>
+                <a:spcPts val="0"/>
+              </a:spcAft>
+              <a:buNone/>
+            </a:pPr>
+            <a:r>
+              <a:t>3. Could it affect nearby stack data? Yes. A write past a stack buffer can corrupt adjacent data or saved call state.</a:t>
+            </a:r>
+            <a:endParaRPr/>
+          </a:p>
+          <a:p xmlns:a="http://schemas.openxmlformats.org/drawingml/2006/main">
+            <a:pPr marL="0" lvl="0" indent="0" algn="l">
+              <a:spcBef>
+                <a:spcPts val="0"/>
+              </a:spcBef>
+              <a:spcAft>
+                <a:spcPts val="0"/>
+              </a:spcAft>
+              <a:buNone/>
+            </a:pPr>
+            <a:r>
+              <a:t/>
+            </a:r>
+            <a:endParaRPr/>
+          </a:p>
+          <a:p xmlns:a="http://schemas.openxmlformats.org/drawingml/2006/main">
+            <a:pPr marL="0" lvl="0" indent="0" algn="l">
+              <a:spcBef>
+                <a:spcPts val="0"/>
+              </a:spcBef>
+              <a:spcAft>
+                <a:spcPts val="0"/>
+              </a:spcAft>
+              <a:buNone/>
+            </a:pPr>
+            <a:r>
+              <a:t>4. Is a crash guaranteed? No. The write is undefined behavior; the exact effect is not guaranteed.</a:t>
             </a:r>
             <a:endParaRPr/>
           </a:p>
@@ -1346,7 +1676,97 @@
               <a:buNone/>
             </a:pPr>
             <a:r>
-              <a:t>Answer: A: a canary is checked for unexpected modification and can detect some stack overwrites. B: ASLR randomizes relevant address-space locations. C: NX prevents instruction execution from pages marked non-executable. None makes an invalid write valid, and none guarantees protection from every memory error or attack.</a:t>
+              <a:t>Answer: 1. Detects some stack corruption: A, the stack canary. It is checked for unexpected modification.</a:t>
+            </a:r>
+            <a:endParaRPr/>
+          </a:p>
+          <a:p xmlns:a="http://schemas.openxmlformats.org/drawingml/2006/main">
+            <a:pPr marL="0" lvl="0" indent="0" algn="l">
+              <a:spcBef>
+                <a:spcPts val="0"/>
+              </a:spcBef>
+              <a:spcAft>
+                <a:spcPts val="0"/>
+              </a:spcAft>
+              <a:buNone/>
+            </a:pPr>
+            <a:r>
+              <a:t/>
+            </a:r>
+            <a:endParaRPr/>
+          </a:p>
+          <a:p xmlns:a="http://schemas.openxmlformats.org/drawingml/2006/main">
+            <a:pPr marL="0" lvl="0" indent="0" algn="l">
+              <a:spcBef>
+                <a:spcPts val="0"/>
+              </a:spcBef>
+              <a:spcAft>
+                <a:spcPts val="0"/>
+              </a:spcAft>
+              <a:buNone/>
+            </a:pPr>
+            <a:r>
+              <a:t>2. Makes addresses less predictable: B, ASLR. It randomizes relevant address-space locations.</a:t>
+            </a:r>
+            <a:endParaRPr/>
+          </a:p>
+          <a:p xmlns:a="http://schemas.openxmlformats.org/drawingml/2006/main">
+            <a:pPr marL="0" lvl="0" indent="0" algn="l">
+              <a:spcBef>
+                <a:spcPts val="0"/>
+              </a:spcBef>
+              <a:spcAft>
+                <a:spcPts val="0"/>
+              </a:spcAft>
+              <a:buNone/>
+            </a:pPr>
+            <a:r>
+              <a:t/>
+            </a:r>
+            <a:endParaRPr/>
+          </a:p>
+          <a:p xmlns:a="http://schemas.openxmlformats.org/drawingml/2006/main">
+            <a:pPr marL="0" lvl="0" indent="0" algn="l">
+              <a:spcBef>
+                <a:spcPts val="0"/>
+              </a:spcBef>
+              <a:spcAft>
+                <a:spcPts val="0"/>
+              </a:spcAft>
+              <a:buNone/>
+            </a:pPr>
+            <a:r>
+              <a:t>3. Prevents execution from data pages: C, NX. It blocks instruction execution from pages marked non-executable.</a:t>
+            </a:r>
+            <a:endParaRPr/>
+          </a:p>
+          <a:p xmlns:a="http://schemas.openxmlformats.org/drawingml/2006/main">
+            <a:pPr marL="0" lvl="0" indent="0" algn="l">
+              <a:spcBef>
+                <a:spcPts val="0"/>
+              </a:spcBef>
+              <a:spcAft>
+                <a:spcPts val="0"/>
+              </a:spcAft>
+              <a:buNone/>
+            </a:pPr>
+            <a:r>
+              <a:t/>
+            </a:r>
+            <a:endParaRPr/>
+          </a:p>
+          <a:p xmlns:a="http://schemas.openxmlformats.org/drawingml/2006/main">
+            <a:pPr marL="0" lvl="0" indent="0" algn="l">
+              <a:spcBef>
+                <a:spcPts val="0"/>
+              </a:spcBef>
+              <a:spcAft>
+                <a:spcPts val="0"/>
+              </a:spcAft>
+              <a:buNone/>
+            </a:pPr>
+            <a:r>
+              <a:t>4. Does any mechanism make an out-of-bounds write valid? No. None fixes the invalid write or guarantees protection from every memory error or attack.</a:t>
             </a:r>
             <a:endParaRPr/>
           </a:p>
@@ -1536,7 +1956,67 @@
               <a:buNone/>
             </a:pPr>
             <a:r>
-              <a:t>Answer: No. scores has automatic storage duration; its lifetime ends when the function returns. Reading p[0] afterward is invalid. A successful malloc allocation remains alive until it is freed, so its pointer can be returned. The caller must take responsibility for freeing it.</a:t>
+              <a:t>Answer: 1. What is wrong with the function? It returns a pointer to the local array scores, whose lifetime ends when make_scores returns. Returning its address does not keep the array alive.</a:t>
+            </a:r>
+            <a:endParaRPr/>
+          </a:p>
+          <a:p xmlns:a="http://schemas.openxmlformats.org/drawingml/2006/main">
+            <a:pPr marL="0" lvl="0" indent="0" algn="l">
+              <a:spcBef>
+                <a:spcPts val="0"/>
+              </a:spcBef>
+              <a:spcAft>
+                <a:spcPts val="0"/>
+              </a:spcAft>
+              <a:buNone/>
+            </a:pPr>
+            <a:r>
+              <a:t/>
+            </a:r>
+            <a:endParaRPr/>
+          </a:p>
+          <a:p xmlns:a="http://schemas.openxmlformats.org/drawingml/2006/main">
+            <a:pPr marL="0" lvl="0" indent="0" algn="l">
+              <a:spcBef>
+                <a:spcPts val="0"/>
+              </a:spcBef>
+              <a:spcAft>
+                <a:spcPts val="0"/>
+              </a:spcAft>
+              <a:buNone/>
+            </a:pPr>
+            <a:r>
+              <a:t>2. Would malloc have the same lifetime problem? No. A successful malloc allocation remains alive until it is freed, so its pointer can be returned. The caller must take responsibility for freeing it.</a:t>
+            </a:r>
+            <a:endParaRPr/>
+          </a:p>
+          <a:p xmlns:a="http://schemas.openxmlformats.org/drawingml/2006/main">
+            <a:pPr marL="0" lvl="0" indent="0" algn="l">
+              <a:spcBef>
+                <a:spcPts val="0"/>
+              </a:spcBef>
+              <a:spcAft>
+                <a:spcPts val="0"/>
+              </a:spcAft>
+              <a:buNone/>
+            </a:pPr>
+            <a:r>
+              <a:t/>
+            </a:r>
+            <a:endParaRPr/>
+          </a:p>
+          <a:p xmlns:a="http://schemas.openxmlformats.org/drawingml/2006/main">
+            <a:pPr marL="0" lvl="0" indent="0" algn="l">
+              <a:spcBef>
+                <a:spcPts val="0"/>
+              </a:spcBef>
+              <a:spcAft>
+                <a:spcPts val="0"/>
+              </a:spcAft>
+              <a:buNone/>
+            </a:pPr>
+            <a:r>
+              <a:t>3. Can we safely read p[0] in the shown code? No. The local scores array no longer exists after the function returns.</a:t>
             </a:r>
             <a:endParaRPr/>
           </a:p>
@@ -1726,7 +2206,97 @@
               <a:buNone/>
             </a:pPr>
             <a:r>
-              <a:t>Answer: sizeof p = 8 bytes. sizeof *p = 8 bytes because *p has type double. The allocation requests 6 × 8 = 48 bytes, excluding allocator overhead. free(p) releases the allocated block; p itself remains in scope and must not be used to access the freed memory.</a:t>
+              <a:t>Answer: 1. sizeof p = 8 bytes: the size of the pointer.</a:t>
+            </a:r>
+            <a:endParaRPr/>
+          </a:p>
+          <a:p xmlns:a="http://schemas.openxmlformats.org/drawingml/2006/main">
+            <a:pPr marL="0" lvl="0" indent="0" algn="l">
+              <a:spcBef>
+                <a:spcPts val="0"/>
+              </a:spcBef>
+              <a:spcAft>
+                <a:spcPts val="0"/>
+              </a:spcAft>
+              <a:buNone/>
+            </a:pPr>
+            <a:r>
+              <a:t/>
+            </a:r>
+            <a:endParaRPr/>
+          </a:p>
+          <a:p xmlns:a="http://schemas.openxmlformats.org/drawingml/2006/main">
+            <a:pPr marL="0" lvl="0" indent="0" algn="l">
+              <a:spcBef>
+                <a:spcPts val="0"/>
+              </a:spcBef>
+              <a:spcAft>
+                <a:spcPts val="0"/>
+              </a:spcAft>
+              <a:buNone/>
+            </a:pPr>
+            <a:r>
+              <a:t>2. sizeof *p = 8 bytes: the size of a double.</a:t>
+            </a:r>
+            <a:endParaRPr/>
+          </a:p>
+          <a:p xmlns:a="http://schemas.openxmlformats.org/drawingml/2006/main">
+            <a:pPr marL="0" lvl="0" indent="0" algn="l">
+              <a:spcBef>
+                <a:spcPts val="0"/>
+              </a:spcBef>
+              <a:spcAft>
+                <a:spcPts val="0"/>
+              </a:spcAft>
+              <a:buNone/>
+            </a:pPr>
+            <a:r>
+              <a:t/>
+            </a:r>
+            <a:endParaRPr/>
+          </a:p>
+          <a:p xmlns:a="http://schemas.openxmlformats.org/drawingml/2006/main">
+            <a:pPr marL="0" lvl="0" indent="0" algn="l">
+              <a:spcBef>
+                <a:spcPts val="0"/>
+              </a:spcBef>
+              <a:spcAft>
+                <a:spcPts val="0"/>
+              </a:spcAft>
+              <a:buNone/>
+            </a:pPr>
+            <a:r>
+              <a:t>3. Requested allocation size = 6 × 8 = 48 bytes, excluding allocator overhead.</a:t>
+            </a:r>
+            <a:endParaRPr/>
+          </a:p>
+          <a:p xmlns:a="http://schemas.openxmlformats.org/drawingml/2006/main">
+            <a:pPr marL="0" lvl="0" indent="0" algn="l">
+              <a:spcBef>
+                <a:spcPts val="0"/>
+              </a:spcBef>
+              <a:spcAft>
+                <a:spcPts val="0"/>
+              </a:spcAft>
+              <a:buNone/>
+            </a:pPr>
+            <a:r>
+              <a:t/>
+            </a:r>
+            <a:endParaRPr/>
+          </a:p>
+          <a:p xmlns:a="http://schemas.openxmlformats.org/drawingml/2006/main">
+            <a:pPr marL="0" lvl="0" indent="0" algn="l">
+              <a:spcBef>
+                <a:spcPts val="0"/>
+              </a:spcBef>
+              <a:spcAft>
+                <a:spcPts val="0"/>
+              </a:spcAft>
+              <a:buNone/>
+            </a:pPr>
+            <a:r>
+              <a:t>4. Does free(p) remove p? No. It releases the allocated block; the local pointer variable remains in scope and must not be used to access the freed memory.</a:t>
             </a:r>
             <a:endParaRPr/>
           </a:p>
@@ -1916,7 +2486,67 @@
               <a:buNone/>
             </a:pPr>
             <a:r>
-              <a:t>Answer: tag starts at byte 0; count at byte 4; ready at byte 8. Bytes 1–3 are internal padding and bytes 9–11 are tail padding, so the struct is 12 bytes with alignment 4. As a union, every member starts at byte 0 and the size is 4 bytes under these assumptions.</a:t>
+              <a:t>Answer: 1. Member offsets: tag starts at byte 0, count at byte 4, and ready at byte 8.</a:t>
+            </a:r>
+            <a:endParaRPr/>
+          </a:p>
+          <a:p xmlns:a="http://schemas.openxmlformats.org/drawingml/2006/main">
+            <a:pPr marL="0" lvl="0" indent="0" algn="l">
+              <a:spcBef>
+                <a:spcPts val="0"/>
+              </a:spcBef>
+              <a:spcAft>
+                <a:spcPts val="0"/>
+              </a:spcAft>
+              <a:buNone/>
+            </a:pPr>
+            <a:r>
+              <a:t/>
+            </a:r>
+            <a:endParaRPr/>
+          </a:p>
+          <a:p xmlns:a="http://schemas.openxmlformats.org/drawingml/2006/main">
+            <a:pPr marL="0" lvl="0" indent="0" algn="l">
+              <a:spcBef>
+                <a:spcPts val="0"/>
+              </a:spcBef>
+              <a:spcAft>
+                <a:spcPts val="0"/>
+              </a:spcAft>
+              <a:buNone/>
+            </a:pPr>
+            <a:r>
+              <a:t>2. sizeof(struct Record) = 12 bytes, with alignment 4. Bytes 1–3 are internal padding; bytes 9–11 are tail padding.</a:t>
+            </a:r>
+            <a:endParaRPr/>
+          </a:p>
+          <a:p xmlns:a="http://schemas.openxmlformats.org/drawingml/2006/main">
+            <a:pPr marL="0" lvl="0" indent="0" algn="l">
+              <a:spcBef>
+                <a:spcPts val="0"/>
+              </a:spcBef>
+              <a:spcAft>
+                <a:spcPts val="0"/>
+              </a:spcAft>
+              <a:buNone/>
+            </a:pPr>
+            <a:r>
+              <a:t/>
+            </a:r>
+            <a:endParaRPr/>
+          </a:p>
+          <a:p xmlns:a="http://schemas.openxmlformats.org/drawingml/2006/main">
+            <a:pPr marL="0" lvl="0" indent="0" algn="l">
+              <a:spcBef>
+                <a:spcPts val="0"/>
+              </a:spcBef>
+              <a:spcAft>
+                <a:spcPts val="0"/>
+              </a:spcAft>
+              <a:buNone/>
+            </a:pPr>
+            <a:r>
+              <a:t>3. If it becomes a union, every member starts at byte 0 and the size is 4 bytes under these assumptions.</a:t>
             </a:r>
             <a:endParaRPr/>
           </a:p>
@@ -2106,7 +2736,97 @@
               <a:buNone/>
             </a:pPr>
             <a:r>
-              <a:t>Answer: Sign = −1. Actual exponent = 129 − 127 = 2. Significand = 1.0101₂ = 1 + 1/4 + 1/16 = 1.3125. Value = −1 × 4 × 1.3125 = −5.25.</a:t>
+              <a:t>Answer: 1. Sign = −1 because the sign bit is 1.</a:t>
+            </a:r>
+            <a:endParaRPr/>
+          </a:p>
+          <a:p xmlns:a="http://schemas.openxmlformats.org/drawingml/2006/main">
+            <a:pPr marL="0" lvl="0" indent="0" algn="l">
+              <a:spcBef>
+                <a:spcPts val="0"/>
+              </a:spcBef>
+              <a:spcAft>
+                <a:spcPts val="0"/>
+              </a:spcAft>
+              <a:buNone/>
+            </a:pPr>
+            <a:r>
+              <a:t/>
+            </a:r>
+            <a:endParaRPr/>
+          </a:p>
+          <a:p xmlns:a="http://schemas.openxmlformats.org/drawingml/2006/main">
+            <a:pPr marL="0" lvl="0" indent="0" algn="l">
+              <a:spcBef>
+                <a:spcPts val="0"/>
+              </a:spcBef>
+              <a:spcAft>
+                <a:spcPts val="0"/>
+              </a:spcAft>
+              <a:buNone/>
+            </a:pPr>
+            <a:r>
+              <a:t>2. Actual exponent = 129 − 127 = 2.</a:t>
+            </a:r>
+            <a:endParaRPr/>
+          </a:p>
+          <a:p xmlns:a="http://schemas.openxmlformats.org/drawingml/2006/main">
+            <a:pPr marL="0" lvl="0" indent="0" algn="l">
+              <a:spcBef>
+                <a:spcPts val="0"/>
+              </a:spcBef>
+              <a:spcAft>
+                <a:spcPts val="0"/>
+              </a:spcAft>
+              <a:buNone/>
+            </a:pPr>
+            <a:r>
+              <a:t/>
+            </a:r>
+            <a:endParaRPr/>
+          </a:p>
+          <a:p xmlns:a="http://schemas.openxmlformats.org/drawingml/2006/main">
+            <a:pPr marL="0" lvl="0" indent="0" algn="l">
+              <a:spcBef>
+                <a:spcPts val="0"/>
+              </a:spcBef>
+              <a:spcAft>
+                <a:spcPts val="0"/>
+              </a:spcAft>
+              <a:buNone/>
+            </a:pPr>
+            <a:r>
+              <a:t>3. Significand = 1.0101₂ = 1 + 1/4 + 1/16 = 1.3125.</a:t>
+            </a:r>
+            <a:endParaRPr/>
+          </a:p>
+          <a:p xmlns:a="http://schemas.openxmlformats.org/drawingml/2006/main">
+            <a:pPr marL="0" lvl="0" indent="0" algn="l">
+              <a:spcBef>
+                <a:spcPts val="0"/>
+              </a:spcBef>
+              <a:spcAft>
+                <a:spcPts val="0"/>
+              </a:spcAft>
+              <a:buNone/>
+            </a:pPr>
+            <a:r>
+              <a:t/>
+            </a:r>
+            <a:endParaRPr/>
+          </a:p>
+          <a:p xmlns:a="http://schemas.openxmlformats.org/drawingml/2006/main">
+            <a:pPr marL="0" lvl="0" indent="0" algn="l">
+              <a:spcBef>
+                <a:spcPts val="0"/>
+              </a:spcBef>
+              <a:spcAft>
+                <a:spcPts val="0"/>
+              </a:spcAft>
+              <a:buNone/>
+            </a:pPr>
+            <a:r>
+              <a:t>4. Decimal value = −1 × 4 × 1.3125 = −5.25.</a:t>
             </a:r>
             <a:endParaRPr/>
           </a:p>
@@ -3990,14 +4710,14 @@
   </p:cSld>
   <p:clrMap bg1="dk1" tx1="lt1" bg2="dk2" tx2="lt2" accent1="accent1" accent2="accent2" accent3="accent3" accent4="accent4" accent5="accent5" accent6="accent6" hlink="hlink" folHlink="folHlink"/>
   <p:sldLayoutIdLst>
-    <p:sldLayoutId xmlns:r="http://schemas.openxmlformats.org/officeDocument/2006/relationships" id="2147483649" r:id="R3ea5262b201a40d3"/>
-    <p:sldLayoutId xmlns:r="http://schemas.openxmlformats.org/officeDocument/2006/relationships" id="2147483650" r:id="R820490739c8d474a"/>
-    <p:sldLayoutId xmlns:r="http://schemas.openxmlformats.org/officeDocument/2006/relationships" id="2147483651" r:id="Rcc0bde5d44a049ef"/>
-    <p:sldLayoutId xmlns:r="http://schemas.openxmlformats.org/officeDocument/2006/relationships" id="2147483652" r:id="R5501ecb2c7b44cc8"/>
-    <p:sldLayoutId xmlns:r="http://schemas.openxmlformats.org/officeDocument/2006/relationships" id="2147483653" r:id="Ra1c1a70821ac4be2"/>
-    <p:sldLayoutId xmlns:r="http://schemas.openxmlformats.org/officeDocument/2006/relationships" id="2147483654" r:id="R90c4f9151f0042ec"/>
-    <p:sldLayoutId xmlns:r="http://schemas.openxmlformats.org/officeDocument/2006/relationships" id="2147483655" r:id="Reb368d11bec74db7"/>
-    <p:sldLayoutId xmlns:r="http://schemas.openxmlformats.org/officeDocument/2006/relationships" id="2147483656" r:id="Rcfabe995655f4406"/>
+    <p:sldLayoutId xmlns:r="http://schemas.openxmlformats.org/officeDocument/2006/relationships" id="2147483649" r:id="Rf53338cf733a490a"/>
+    <p:sldLayoutId xmlns:r="http://schemas.openxmlformats.org/officeDocument/2006/relationships" id="2147483650" r:id="Rcfb49e40bd424e01"/>
+    <p:sldLayoutId xmlns:r="http://schemas.openxmlformats.org/officeDocument/2006/relationships" id="2147483651" r:id="R206094983cc14b3e"/>
+    <p:sldLayoutId xmlns:r="http://schemas.openxmlformats.org/officeDocument/2006/relationships" id="2147483652" r:id="Rbc8be456406049f9"/>
+    <p:sldLayoutId xmlns:r="http://schemas.openxmlformats.org/officeDocument/2006/relationships" id="2147483653" r:id="R88f16ed997764707"/>
+    <p:sldLayoutId xmlns:r="http://schemas.openxmlformats.org/officeDocument/2006/relationships" id="2147483654" r:id="Ra023ef25661a4388"/>
+    <p:sldLayoutId xmlns:r="http://schemas.openxmlformats.org/officeDocument/2006/relationships" id="2147483655" r:id="Re20ed1d658194596"/>
+    <p:sldLayoutId xmlns:r="http://schemas.openxmlformats.org/officeDocument/2006/relationships" id="2147483656" r:id="Rc337f623259748ee"/>
   </p:sldLayoutIdLst>
   <p:hf hdr="0" dt="0"/>
   <p:txStyles>
@@ -6461,7 +7181,7 @@
           <p:cNvPr id="534" name="Takeaway">
             <a:extLst xmlns:a="http://schemas.openxmlformats.org/drawingml/2006/main">
               <a:ext uri="{FF2B5EF4-FFF2-40B4-BE49-F238E27FC236}">
-                <a16:creationId xmlns:a16="http://schemas.microsoft.com/office/drawing/2014/main" id="{7693FAC2-1839-430A-943B-04EEBDFB204B}"/>
+                <a16:creationId xmlns:a16="http://schemas.microsoft.com/office/drawing/2014/main" id="{AEAEA662-56BE-4933-B402-338E393AF37B}"/>
               </a:ext>
             </a:extLst>
           </p:cNvPr>
@@ -7551,7 +8271,7 @@
           <p:cNvPr id="534" name="Takeaway">
             <a:extLst xmlns:a="http://schemas.openxmlformats.org/drawingml/2006/main">
               <a:ext uri="{FF2B5EF4-FFF2-40B4-BE49-F238E27FC236}">
-                <a16:creationId xmlns:a16="http://schemas.microsoft.com/office/drawing/2014/main" id="{5A2441C9-DFC6-4435-8994-9849435ED009}"/>
+                <a16:creationId xmlns:a16="http://schemas.microsoft.com/office/drawing/2014/main" id="{E8C8B9A6-9A97-4EFC-9157-5E7B65239F6F}"/>
               </a:ext>
             </a:extLst>
           </p:cNvPr>
@@ -8690,7 +9410,7 @@
           <p:cNvPr id="534" name="Takeaway">
             <a:extLst xmlns:a="http://schemas.openxmlformats.org/drawingml/2006/main">
               <a:ext uri="{FF2B5EF4-FFF2-40B4-BE49-F238E27FC236}">
-                <a16:creationId xmlns:a16="http://schemas.microsoft.com/office/drawing/2014/main" id="{F4D93A4A-CDB2-496F-A8E5-37D5162F5531}"/>
+                <a16:creationId xmlns:a16="http://schemas.microsoft.com/office/drawing/2014/main" id="{012F7FD1-B715-4B7F-994F-C339EE2677A8}"/>
               </a:ext>
             </a:extLst>
           </p:cNvPr>
@@ -9796,7 +10516,7 @@
           <p:cNvPr id="534" name="Takeaway">
             <a:extLst xmlns:a="http://schemas.openxmlformats.org/drawingml/2006/main">
               <a:ext uri="{FF2B5EF4-FFF2-40B4-BE49-F238E27FC236}">
-                <a16:creationId xmlns:a16="http://schemas.microsoft.com/office/drawing/2014/main" id="{5E2AF9FC-C910-48F9-B1EB-4B01C3498123}"/>
+                <a16:creationId xmlns:a16="http://schemas.microsoft.com/office/drawing/2014/main" id="{69C5629F-9CEC-4E04-A62F-A90FAB491945}"/>
               </a:ext>
             </a:extLst>
           </p:cNvPr>
@@ -10869,7 +11589,7 @@
           <p:cNvPr id="534" name="Takeaway">
             <a:extLst xmlns:a="http://schemas.openxmlformats.org/drawingml/2006/main">
               <a:ext uri="{FF2B5EF4-FFF2-40B4-BE49-F238E27FC236}">
-                <a16:creationId xmlns:a16="http://schemas.microsoft.com/office/drawing/2014/main" id="{59A79DE3-4F7C-4576-9CD3-7BD0D1E42D13}"/>
+                <a16:creationId xmlns:a16="http://schemas.microsoft.com/office/drawing/2014/main" id="{712A850F-E2D7-4EA8-AD7E-970A047A6A31}"/>
               </a:ext>
             </a:extLst>
           </p:cNvPr>
@@ -11926,7 +12646,7 @@
           <p:cNvPr id="534" name="Takeaway">
             <a:extLst xmlns:a="http://schemas.openxmlformats.org/drawingml/2006/main">
               <a:ext uri="{FF2B5EF4-FFF2-40B4-BE49-F238E27FC236}">
-                <a16:creationId xmlns:a16="http://schemas.microsoft.com/office/drawing/2014/main" id="{B9BF8A70-AFA0-43D3-8C22-3B75F53BA2F0}"/>
+                <a16:creationId xmlns:a16="http://schemas.microsoft.com/office/drawing/2014/main" id="{B53D8CB3-427F-46CD-ADBD-59287A96FF28}"/>
               </a:ext>
             </a:extLst>
           </p:cNvPr>
@@ -13048,7 +13768,7 @@
           <p:cNvPr id="534" name="Takeaway">
             <a:extLst xmlns:a="http://schemas.openxmlformats.org/drawingml/2006/main">
               <a:ext uri="{FF2B5EF4-FFF2-40B4-BE49-F238E27FC236}">
-                <a16:creationId xmlns:a16="http://schemas.microsoft.com/office/drawing/2014/main" id="{DA15B0E1-54A2-4897-9536-91DC99766AF6}"/>
+                <a16:creationId xmlns:a16="http://schemas.microsoft.com/office/drawing/2014/main" id="{FB79E5B0-37D0-4DEB-A781-A77B02ECCAB6}"/>
               </a:ext>
             </a:extLst>
           </p:cNvPr>
@@ -14089,7 +14809,7 @@
           <p:cNvPr id="534" name="Takeaway">
             <a:extLst xmlns:a="http://schemas.openxmlformats.org/drawingml/2006/main">
               <a:ext uri="{FF2B5EF4-FFF2-40B4-BE49-F238E27FC236}">
-                <a16:creationId xmlns:a16="http://schemas.microsoft.com/office/drawing/2014/main" id="{D7C2DE69-4932-42C5-91C7-751C639ED8F4}"/>
+                <a16:creationId xmlns:a16="http://schemas.microsoft.com/office/drawing/2014/main" id="{B215726E-FBDF-40CA-A84F-BA69C39E1E5A}"/>
               </a:ext>
             </a:extLst>
           </p:cNvPr>
@@ -15130,7 +15850,7 @@
           <p:cNvPr id="534" name="Takeaway">
             <a:extLst xmlns:a="http://schemas.openxmlformats.org/drawingml/2006/main">
               <a:ext uri="{FF2B5EF4-FFF2-40B4-BE49-F238E27FC236}">
-                <a16:creationId xmlns:a16="http://schemas.microsoft.com/office/drawing/2014/main" id="{8E3E9056-1F73-484F-ABD8-BF85C973F717}"/>
+                <a16:creationId xmlns:a16="http://schemas.microsoft.com/office/drawing/2014/main" id="{DA833D5B-D4E5-40BA-9784-E5FCE6663962}"/>
               </a:ext>
             </a:extLst>
           </p:cNvPr>
@@ -16203,7 +16923,7 @@
           <p:cNvPr id="534" name="Takeaway">
             <a:extLst xmlns:a="http://schemas.openxmlformats.org/drawingml/2006/main">
               <a:ext uri="{FF2B5EF4-FFF2-40B4-BE49-F238E27FC236}">
-                <a16:creationId xmlns:a16="http://schemas.microsoft.com/office/drawing/2014/main" id="{4B9F37F3-21E5-4626-BE1A-BF6CC9E9967C}"/>
+                <a16:creationId xmlns:a16="http://schemas.microsoft.com/office/drawing/2014/main" id="{02C498B6-842B-40BA-8AA0-35EFF8740749}"/>
               </a:ext>
             </a:extLst>
           </p:cNvPr>
@@ -17375,7 +18095,7 @@
           <p:cNvPr id="534" name="Takeaway">
             <a:extLst xmlns:a="http://schemas.openxmlformats.org/drawingml/2006/main">
               <a:ext uri="{FF2B5EF4-FFF2-40B4-BE49-F238E27FC236}">
-                <a16:creationId xmlns:a16="http://schemas.microsoft.com/office/drawing/2014/main" id="{9C9936D5-9ACB-4BE4-806F-42513E25DD25}"/>
+                <a16:creationId xmlns:a16="http://schemas.microsoft.com/office/drawing/2014/main" id="{68E20030-1846-4ED5-B9C0-B90690864AF8}"/>
               </a:ext>
             </a:extLst>
           </p:cNvPr>
@@ -18432,7 +19152,7 @@
           <p:cNvPr id="534" name="Takeaway">
             <a:extLst xmlns:a="http://schemas.openxmlformats.org/drawingml/2006/main">
               <a:ext uri="{FF2B5EF4-FFF2-40B4-BE49-F238E27FC236}">
-                <a16:creationId xmlns:a16="http://schemas.microsoft.com/office/drawing/2014/main" id="{53DF57CF-9F9F-4CCA-9C91-107DDE6F6BB5}"/>
+                <a16:creationId xmlns:a16="http://schemas.microsoft.com/office/drawing/2014/main" id="{5DA747E1-1BE7-4BC2-9547-9A3DA7C84826}"/>
               </a:ext>
             </a:extLst>
           </p:cNvPr>
@@ -19654,7 +20374,7 @@
           <p:cNvPr id="534" name="Takeaway">
             <a:extLst xmlns:a="http://schemas.openxmlformats.org/drawingml/2006/main">
               <a:ext uri="{FF2B5EF4-FFF2-40B4-BE49-F238E27FC236}">
-                <a16:creationId xmlns:a16="http://schemas.microsoft.com/office/drawing/2014/main" id="{439C6092-D029-4C32-B071-3C7811883F7A}"/>
+                <a16:creationId xmlns:a16="http://schemas.microsoft.com/office/drawing/2014/main" id="{AB2EC032-742F-4FF6-BA79-A483D3CB49F8}"/>
               </a:ext>
             </a:extLst>
           </p:cNvPr>
@@ -20826,7 +21546,7 @@
           <p:cNvPr id="534" name="Takeaway">
             <a:extLst xmlns:a="http://schemas.openxmlformats.org/drawingml/2006/main">
               <a:ext uri="{FF2B5EF4-FFF2-40B4-BE49-F238E27FC236}">
-                <a16:creationId xmlns:a16="http://schemas.microsoft.com/office/drawing/2014/main" id="{15E44B3F-CCB6-40F6-900F-846619C4DA4C}"/>
+                <a16:creationId xmlns:a16="http://schemas.microsoft.com/office/drawing/2014/main" id="{7477D5A0-C27B-4A09-8565-AE4BE857AA09}"/>
               </a:ext>
             </a:extLst>
           </p:cNvPr>
@@ -21933,7 +22653,7 @@
           <p:cNvPr id="534" name="Takeaway">
             <a:extLst xmlns:a="http://schemas.openxmlformats.org/drawingml/2006/main">
               <a:ext uri="{FF2B5EF4-FFF2-40B4-BE49-F238E27FC236}">
-                <a16:creationId xmlns:a16="http://schemas.microsoft.com/office/drawing/2014/main" id="{F2F70765-EDF8-43D5-A41C-E276583BE2AD}"/>
+                <a16:creationId xmlns:a16="http://schemas.microsoft.com/office/drawing/2014/main" id="{715619E1-0271-46A4-A0B6-E88BF43EEA72}"/>
               </a:ext>
             </a:extLst>
           </p:cNvPr>
@@ -23039,7 +23759,7 @@
           <p:cNvPr id="534" name="Takeaway">
             <a:extLst xmlns:a="http://schemas.openxmlformats.org/drawingml/2006/main">
               <a:ext uri="{FF2B5EF4-FFF2-40B4-BE49-F238E27FC236}">
-                <a16:creationId xmlns:a16="http://schemas.microsoft.com/office/drawing/2014/main" id="{17A9F809-9A02-44B6-9949-30872F025B35}"/>
+                <a16:creationId xmlns:a16="http://schemas.microsoft.com/office/drawing/2014/main" id="{032C0083-D447-4B58-A063-E59717330DEC}"/>
               </a:ext>
             </a:extLst>
           </p:cNvPr>

--- a/public/presentations/CS211_Recitation_6.pptx
+++ b/public/presentations/CS211_Recitation_6.pptx
@@ -17,14 +17,8 @@
     <p:sldId xmlns:r="http://schemas.openxmlformats.org/officeDocument/2006/relationships" id="262" r:id="R9b659ccf9ed94c1c"/>
     <p:sldId xmlns:r="http://schemas.openxmlformats.org/officeDocument/2006/relationships" id="263" r:id="Rb76f5cce82184a70"/>
     <p:sldId xmlns:r="http://schemas.openxmlformats.org/officeDocument/2006/relationships" id="264" r:id="R3297c3245b304110"/>
-    <p:sldId xmlns:r="http://schemas.openxmlformats.org/officeDocument/2006/relationships" id="265" r:id="R13f28eab663e499a"/>
     <p:sldId xmlns:r="http://schemas.openxmlformats.org/officeDocument/2006/relationships" id="266" r:id="R6f50a71239d341cf"/>
-    <p:sldId xmlns:r="http://schemas.openxmlformats.org/officeDocument/2006/relationships" id="267" r:id="Reefa3f5b44cb4239"/>
-    <p:sldId xmlns:r="http://schemas.openxmlformats.org/officeDocument/2006/relationships" id="268" r:id="Rd37e706a9aec496d"/>
-    <p:sldId xmlns:r="http://schemas.openxmlformats.org/officeDocument/2006/relationships" id="269" r:id="Rfaa40ca614cd44ef"/>
     <p:sldId xmlns:r="http://schemas.openxmlformats.org/officeDocument/2006/relationships" id="270" r:id="R471baf6deba64591"/>
-    <p:sldId xmlns:r="http://schemas.openxmlformats.org/officeDocument/2006/relationships" id="271" r:id="Rc7e3907cafd54fce"/>
-    <p:sldId xmlns:r="http://schemas.openxmlformats.org/officeDocument/2006/relationships" id="272" r:id="R4a5f4798a59f4262"/>
   </p:sldIdLst>
   <p:sldSz cx="12192000" cy="6858000"/>
   <p:notesSz cx="6858000" cy="9144000"/>
@@ -557,176 +551,6 @@
 </p:notes>
 </file>
 
-<file path=ppt/notesSlides/notesSlide10.xml><?xml version="1.0" encoding="utf-8"?>
-<p:notes xmlns:p="http://schemas.openxmlformats.org/presentationml/2006/main">
-  <p:cSld>
-    <p:spTree>
-      <p:nvGrpSpPr>
-        <p:cNvPr id="1" name=""/>
-        <p:cNvGrpSpPr/>
-        <p:nvPr/>
-      </p:nvGrpSpPr>
-      <p:grpSpPr>
-        <a:xfrm xmlns:a="http://schemas.openxmlformats.org/drawingml/2006/main"/>
-      </p:grpSpPr>
-      <p:sp>
-        <p:nvSpPr>
-          <p:cNvPr id="2" name="Slide Image Placeholder 1"/>
-          <p:cNvSpPr>
-            <a:spLocks xmlns:a="http://schemas.openxmlformats.org/drawingml/2006/main" noGrp="1"/>
-          </p:cNvSpPr>
-          <p:nvPr>
-            <p:ph type="sldImg" idx="0"/>
-          </p:nvPr>
-        </p:nvSpPr>
-        <p:spPr/>
-      </p:sp>
-      <p:sp>
-        <p:nvSpPr>
-          <p:cNvPr id="3" name="Notes Placeholder 2"/>
-          <p:cNvSpPr>
-            <a:spLocks xmlns:a="http://schemas.openxmlformats.org/drawingml/2006/main" noGrp="1"/>
-          </p:cNvSpPr>
-          <p:nvPr>
-            <p:ph type="body" idx="1"/>
-          </p:nvPr>
-        </p:nvSpPr>
-        <p:spPr/>
-        <p:txBody>
-          <a:bodyPr xmlns:a="http://schemas.openxmlformats.org/drawingml/2006/main"/>
-          <a:lstStyle xmlns:a="http://schemas.openxmlformats.org/drawingml/2006/main"/>
-          <a:p xmlns:a="http://schemas.openxmlformats.org/drawingml/2006/main">
-            <a:pPr marL="0" lvl="0" indent="0" algn="l">
-              <a:spcBef>
-                <a:spcPts val="0"/>
-              </a:spcBef>
-              <a:spcAft>
-                <a:spcPts val="0"/>
-              </a:spcAft>
-              <a:buNone/>
-            </a:pPr>
-            <a:r>
-              <a:t>Source: https://firner.com/presentations/cs211/2026-Fall/cs211_05/ (Implementation Details, Now with Significand) and https://firner.com/presentations/cs211/2026-Fall/cs211_10/ (Reinterpreting Data). Include stdint.h for uint32_t. Answer: 0.8125. To inspect the representation in ordinary C on the stated FP32 system, use float f; memcpy(&amp;f, &amp;bits, sizeof f); with string.h, avoiding pointer-aliasing casts. A numeric conversion (float)bits would produce a different result.</a:t>
-            </a:r>
-            <a:endParaRPr/>
-          </a:p>
-          <a:p xmlns:a="http://schemas.openxmlformats.org/drawingml/2006/main">
-            <a:pPr marL="0" lvl="0" indent="0" algn="l">
-              <a:spcBef>
-                <a:spcPts val="0"/>
-              </a:spcBef>
-              <a:spcAft>
-                <a:spcPts val="0"/>
-              </a:spcAft>
-              <a:buNone/>
-            </a:pPr>
-            <a:r>
-              <a:t/>
-            </a:r>
-            <a:endParaRPr/>
-          </a:p>
-          <a:p xmlns:a="http://schemas.openxmlformats.org/drawingml/2006/main">
-            <a:pPr marL="0" lvl="0" indent="0" algn="l">
-              <a:spcBef>
-                <a:spcPts val="0"/>
-              </a:spcBef>
-              <a:spcAft>
-                <a:spcPts val="0"/>
-              </a:spcAft>
-              <a:buNone/>
-            </a:pPr>
-            <a:r>
-              <a:t>Answer: 1. Stored exponent E = 126, so the actual exponent is 126 − 127 = −1.</a:t>
-            </a:r>
-            <a:endParaRPr/>
-          </a:p>
-          <a:p xmlns:a="http://schemas.openxmlformats.org/drawingml/2006/main">
-            <a:pPr marL="0" lvl="0" indent="0" algn="l">
-              <a:spcBef>
-                <a:spcPts val="0"/>
-              </a:spcBef>
-              <a:spcAft>
-                <a:spcPts val="0"/>
-              </a:spcAft>
-              <a:buNone/>
-            </a:pPr>
-            <a:r>
-              <a:t/>
-            </a:r>
-            <a:endParaRPr/>
-          </a:p>
-          <a:p xmlns:a="http://schemas.openxmlformats.org/drawingml/2006/main">
-            <a:pPr marL="0" lvl="0" indent="0" algn="l">
-              <a:spcBef>
-                <a:spcPts val="0"/>
-              </a:spcBef>
-              <a:spcAft>
-                <a:spcPts val="0"/>
-              </a:spcAft>
-              <a:buNone/>
-            </a:pPr>
-            <a:r>
-              <a:t>2. Fraction weights: bits 22 and 20 contribute 1/2 + 1/8 = 0.625. Restore the implied 1 to get a significand of 1.625.</a:t>
-            </a:r>
-            <a:endParaRPr/>
-          </a:p>
-          <a:p xmlns:a="http://schemas.openxmlformats.org/drawingml/2006/main">
-            <a:pPr marL="0" lvl="0" indent="0" algn="l">
-              <a:spcBef>
-                <a:spcPts val="0"/>
-              </a:spcBef>
-              <a:spcAft>
-                <a:spcPts val="0"/>
-              </a:spcAft>
-              <a:buNone/>
-            </a:pPr>
-            <a:r>
-              <a:t/>
-            </a:r>
-            <a:endParaRPr/>
-          </a:p>
-          <a:p xmlns:a="http://schemas.openxmlformats.org/drawingml/2006/main">
-            <a:pPr marL="0" lvl="0" indent="0" algn="l">
-              <a:spcBef>
-                <a:spcPts val="0"/>
-              </a:spcBef>
-              <a:spcAft>
-                <a:spcPts val="0"/>
-              </a:spcAft>
-              <a:buNone/>
-            </a:pPr>
-            <a:r>
-              <a:t>3. Decimal value = 2^(−1) × 1.625 = 0.8125. The final bit pattern is 0x3F500000.</a:t>
-            </a:r>
-            <a:endParaRPr/>
-          </a:p>
-        </p:txBody>
-      </p:sp>
-      <p:sp>
-        <p:nvSpPr>
-          <p:cNvPr id="4" name="Slide Number Placeholder 3"/>
-          <p:cNvSpPr>
-            <a:spLocks xmlns:a="http://schemas.openxmlformats.org/drawingml/2006/main" noGrp="1"/>
-          </p:cNvSpPr>
-          <p:nvPr>
-            <p:ph type="sldNum" idx="5"/>
-          </p:nvPr>
-        </p:nvSpPr>
-        <p:spPr/>
-        <p:txBody>
-          <a:bodyPr xmlns:a="http://schemas.openxmlformats.org/drawingml/2006/main"/>
-          <a:lstStyle xmlns:a="http://schemas.openxmlformats.org/drawingml/2006/main"/>
-          <a:p xmlns:a="http://schemas.openxmlformats.org/drawingml/2006/main"/>
-        </p:txBody>
-      </p:sp>
-    </p:spTree>
-  </p:cSld>
-  <p:clrMapOvr>
-    <a:masterClrMapping xmlns:a="http://schemas.openxmlformats.org/drawingml/2006/main"/>
-  </p:clrMapOvr>
-</p:notes>
-</file>
-
 <file path=ppt/notesSlides/notesSlide11.xml><?xml version="1.0" encoding="utf-8"?>
 <p:notes xmlns:p="http://schemas.openxmlformats.org/presentationml/2006/main">
   <p:cSld>
@@ -927,306 +751,6 @@
             </a:pPr>
             <a:r>
               <a:t>5. Fraction = 101 followed by 20 zeros. The complete FP32 bit pattern is 0xC0D00000.</a:t>
-            </a:r>
-            <a:endParaRPr/>
-          </a:p>
-        </p:txBody>
-      </p:sp>
-      <p:sp>
-        <p:nvSpPr>
-          <p:cNvPr id="4" name="Slide Number Placeholder 3"/>
-          <p:cNvSpPr>
-            <a:spLocks xmlns:a="http://schemas.openxmlformats.org/drawingml/2006/main" noGrp="1"/>
-          </p:cNvSpPr>
-          <p:nvPr>
-            <p:ph type="sldNum" idx="5"/>
-          </p:nvPr>
-        </p:nvSpPr>
-        <p:spPr/>
-        <p:txBody>
-          <a:bodyPr xmlns:a="http://schemas.openxmlformats.org/drawingml/2006/main"/>
-          <a:lstStyle xmlns:a="http://schemas.openxmlformats.org/drawingml/2006/main"/>
-          <a:p xmlns:a="http://schemas.openxmlformats.org/drawingml/2006/main"/>
-        </p:txBody>
-      </p:sp>
-    </p:spTree>
-  </p:cSld>
-  <p:clrMapOvr>
-    <a:masterClrMapping xmlns:a="http://schemas.openxmlformats.org/drawingml/2006/main"/>
-  </p:clrMapOvr>
-</p:notes>
-</file>
-
-<file path=ppt/notesSlides/notesSlide12.xml><?xml version="1.0" encoding="utf-8"?>
-<p:notes xmlns:p="http://schemas.openxmlformats.org/presentationml/2006/main">
-  <p:cSld>
-    <p:spTree>
-      <p:nvGrpSpPr>
-        <p:cNvPr id="1" name=""/>
-        <p:cNvGrpSpPr/>
-        <p:nvPr/>
-      </p:nvGrpSpPr>
-      <p:grpSpPr>
-        <a:xfrm xmlns:a="http://schemas.openxmlformats.org/drawingml/2006/main"/>
-      </p:grpSpPr>
-      <p:sp>
-        <p:nvSpPr>
-          <p:cNvPr id="2" name="Slide Image Placeholder 1"/>
-          <p:cNvSpPr>
-            <a:spLocks xmlns:a="http://schemas.openxmlformats.org/drawingml/2006/main" noGrp="1"/>
-          </p:cNvSpPr>
-          <p:nvPr>
-            <p:ph type="sldImg" idx="0"/>
-          </p:nvPr>
-        </p:nvSpPr>
-        <p:spPr/>
-      </p:sp>
-      <p:sp>
-        <p:nvSpPr>
-          <p:cNvPr id="3" name="Notes Placeholder 2"/>
-          <p:cNvSpPr>
-            <a:spLocks xmlns:a="http://schemas.openxmlformats.org/drawingml/2006/main" noGrp="1"/>
-          </p:cNvSpPr>
-          <p:nvPr>
-            <p:ph type="body" idx="1"/>
-          </p:nvPr>
-        </p:nvSpPr>
-        <p:spPr/>
-        <p:txBody>
-          <a:bodyPr xmlns:a="http://schemas.openxmlformats.org/drawingml/2006/main"/>
-          <a:lstStyle xmlns:a="http://schemas.openxmlformats.org/drawingml/2006/main"/>
-          <a:p xmlns:a="http://schemas.openxmlformats.org/drawingml/2006/main">
-            <a:pPr marL="0" lvl="0" indent="0" algn="l">
-              <a:spcBef>
-                <a:spcPts val="0"/>
-              </a:spcBef>
-              <a:spcAft>
-                <a:spcPts val="0"/>
-              </a:spcAft>
-              <a:buNone/>
-            </a:pPr>
-            <a:r>
-              <a:t>Source: https://firner.com/presentations/cs211/2026-Fall/cs211_05/ (NaN and Infinity, Subnormal Numbers, Equations). The subnormal magnitude expression omits sign deliberately; multiply by (-1)^s for the signed value. For normal values the complete significand is 1.f; for subnormal values it is 0.f. Ask whether E=0,F=1 is zero: it is the smallest positive subnormal when sign=0.</a:t>
-            </a:r>
-            <a:endParaRPr/>
-          </a:p>
-        </p:txBody>
-      </p:sp>
-      <p:sp>
-        <p:nvSpPr>
-          <p:cNvPr id="4" name="Slide Number Placeholder 3"/>
-          <p:cNvSpPr>
-            <a:spLocks xmlns:a="http://schemas.openxmlformats.org/drawingml/2006/main" noGrp="1"/>
-          </p:cNvSpPr>
-          <p:nvPr>
-            <p:ph type="sldNum" idx="5"/>
-          </p:nvPr>
-        </p:nvSpPr>
-        <p:spPr/>
-        <p:txBody>
-          <a:bodyPr xmlns:a="http://schemas.openxmlformats.org/drawingml/2006/main"/>
-          <a:lstStyle xmlns:a="http://schemas.openxmlformats.org/drawingml/2006/main"/>
-          <a:p xmlns:a="http://schemas.openxmlformats.org/drawingml/2006/main"/>
-        </p:txBody>
-      </p:sp>
-    </p:spTree>
-  </p:cSld>
-  <p:clrMapOvr>
-    <a:masterClrMapping xmlns:a="http://schemas.openxmlformats.org/drawingml/2006/main"/>
-  </p:clrMapOvr>
-</p:notes>
-</file>
-
-<file path=ppt/notesSlides/notesSlide13.xml><?xml version="1.0" encoding="utf-8"?>
-<p:notes xmlns:p="http://schemas.openxmlformats.org/presentationml/2006/main">
-  <p:cSld>
-    <p:spTree>
-      <p:nvGrpSpPr>
-        <p:cNvPr id="1" name=""/>
-        <p:cNvGrpSpPr/>
-        <p:nvPr/>
-      </p:nvGrpSpPr>
-      <p:grpSpPr>
-        <a:xfrm xmlns:a="http://schemas.openxmlformats.org/drawingml/2006/main"/>
-      </p:grpSpPr>
-      <p:sp>
-        <p:nvSpPr>
-          <p:cNvPr id="2" name="Slide Image Placeholder 1"/>
-          <p:cNvSpPr>
-            <a:spLocks xmlns:a="http://schemas.openxmlformats.org/drawingml/2006/main" noGrp="1"/>
-          </p:cNvSpPr>
-          <p:nvPr>
-            <p:ph type="sldImg" idx="0"/>
-          </p:nvPr>
-        </p:nvSpPr>
-        <p:spPr/>
-      </p:sp>
-      <p:sp>
-        <p:nvSpPr>
-          <p:cNvPr id="3" name="Notes Placeholder 2"/>
-          <p:cNvSpPr>
-            <a:spLocks xmlns:a="http://schemas.openxmlformats.org/drawingml/2006/main" noGrp="1"/>
-          </p:cNvSpPr>
-          <p:nvPr>
-            <p:ph type="body" idx="1"/>
-          </p:nvPr>
-        </p:nvSpPr>
-        <p:spPr/>
-        <p:txBody>
-          <a:bodyPr xmlns:a="http://schemas.openxmlformats.org/drawingml/2006/main"/>
-          <a:lstStyle xmlns:a="http://schemas.openxmlformats.org/drawingml/2006/main"/>
-          <a:p xmlns:a="http://schemas.openxmlformats.org/drawingml/2006/main">
-            <a:pPr marL="0" lvl="0" indent="0" algn="l">
-              <a:spcBef>
-                <a:spcPts val="0"/>
-              </a:spcBef>
-              <a:spcAft>
-                <a:spcPts val="0"/>
-              </a:spcAft>
-              <a:buNone/>
-            </a:pPr>
-            <a:r>
-              <a:t>Source: https://firner.com/presentations/cs211/2026-Fall/cs211_11/ (Different Hardware, Space, FPU, Register Features, Moving floats). Additional reference: https://cdrdv2-public.intel.com/843820/325462-sdm-vol-1-2abcd-3abcd-4-1.pdf (basic execution environment and SSE/AVX register organization). Technical clarification: MMX mm registers are distinct from SSE xmm names; MMX is for packed integers and aliases the x87 register storage. XMM is 16 bytes, YMM is 32 bytes. Legacy scalar ss operations use the low 32-bit floating-point element; sd uses the low 64-bit element. Newer extensions may provide additional registers. Do not confuse the x87 register stack with RAM addressed by rsp.</a:t>
-            </a:r>
-            <a:endParaRPr/>
-          </a:p>
-        </p:txBody>
-      </p:sp>
-      <p:sp>
-        <p:nvSpPr>
-          <p:cNvPr id="4" name="Slide Number Placeholder 3"/>
-          <p:cNvSpPr>
-            <a:spLocks xmlns:a="http://schemas.openxmlformats.org/drawingml/2006/main" noGrp="1"/>
-          </p:cNvSpPr>
-          <p:nvPr>
-            <p:ph type="sldNum" idx="5"/>
-          </p:nvPr>
-        </p:nvSpPr>
-        <p:spPr/>
-        <p:txBody>
-          <a:bodyPr xmlns:a="http://schemas.openxmlformats.org/drawingml/2006/main"/>
-          <a:lstStyle xmlns:a="http://schemas.openxmlformats.org/drawingml/2006/main"/>
-          <a:p xmlns:a="http://schemas.openxmlformats.org/drawingml/2006/main"/>
-        </p:txBody>
-      </p:sp>
-    </p:spTree>
-  </p:cSld>
-  <p:clrMapOvr>
-    <a:masterClrMapping xmlns:a="http://schemas.openxmlformats.org/drawingml/2006/main"/>
-  </p:clrMapOvr>
-</p:notes>
-</file>
-
-<file path=ppt/notesSlides/notesSlide14.xml><?xml version="1.0" encoding="utf-8"?>
-<p:notes xmlns:p="http://schemas.openxmlformats.org/presentationml/2006/main">
-  <p:cSld>
-    <p:spTree>
-      <p:nvGrpSpPr>
-        <p:cNvPr id="1" name=""/>
-        <p:cNvGrpSpPr/>
-        <p:nvPr/>
-      </p:nvGrpSpPr>
-      <p:grpSpPr>
-        <a:xfrm xmlns:a="http://schemas.openxmlformats.org/drawingml/2006/main"/>
-      </p:grpSpPr>
-      <p:sp>
-        <p:nvSpPr>
-          <p:cNvPr id="2" name="Slide Image Placeholder 1"/>
-          <p:cNvSpPr>
-            <a:spLocks xmlns:a="http://schemas.openxmlformats.org/drawingml/2006/main" noGrp="1"/>
-          </p:cNvSpPr>
-          <p:nvPr>
-            <p:ph type="sldImg" idx="0"/>
-          </p:nvPr>
-        </p:nvSpPr>
-        <p:spPr/>
-      </p:sp>
-      <p:sp>
-        <p:nvSpPr>
-          <p:cNvPr id="3" name="Notes Placeholder 2"/>
-          <p:cNvSpPr>
-            <a:spLocks xmlns:a="http://schemas.openxmlformats.org/drawingml/2006/main" noGrp="1"/>
-          </p:cNvSpPr>
-          <p:nvPr>
-            <p:ph type="body" idx="1"/>
-          </p:nvPr>
-        </p:nvSpPr>
-        <p:spPr/>
-        <p:txBody>
-          <a:bodyPr xmlns:a="http://schemas.openxmlformats.org/drawingml/2006/main"/>
-          <a:lstStyle xmlns:a="http://schemas.openxmlformats.org/drawingml/2006/main"/>
-          <a:p xmlns:a="http://schemas.openxmlformats.org/drawingml/2006/main">
-            <a:pPr marL="0" lvl="0" indent="0" algn="l">
-              <a:spcBef>
-                <a:spcPts val="0"/>
-              </a:spcBef>
-              <a:spcAft>
-                <a:spcPts val="0"/>
-              </a:spcAft>
-              <a:buNone/>
-            </a:pPr>
-            <a:r>
-              <a:t>Source: https://firner.com/presentations/cs211/2026-Fall/cs211_11/ (Moving floats, Operations, Other Operations, Passing a Float). These small values are represented exactly. Under the System V AMD64 convention, scalar float/double arguments normally use XMM registers, not the x87 stack; first such argument is normally xmm0. SS is 32-bit scalar, SD is 64-bit scalar. Avoid describing this as a conversion of the entire 128-bit register.</a:t>
-            </a:r>
-            <a:endParaRPr/>
-          </a:p>
-          <a:p xmlns:a="http://schemas.openxmlformats.org/drawingml/2006/main">
-            <a:pPr marL="0" lvl="0" indent="0" algn="l">
-              <a:spcBef>
-                <a:spcPts val="0"/>
-              </a:spcBef>
-              <a:spcAft>
-                <a:spcPts val="0"/>
-              </a:spcAft>
-              <a:buNone/>
-            </a:pPr>
-            <a:r>
-              <a:t/>
-            </a:r>
-            <a:endParaRPr/>
-          </a:p>
-          <a:p xmlns:a="http://schemas.openxmlformats.org/drawingml/2006/main">
-            <a:pPr marL="0" lvl="0" indent="0" algn="l">
-              <a:spcBef>
-                <a:spcPts val="0"/>
-              </a:spcBef>
-              <a:spcAft>
-                <a:spcPts val="0"/>
-              </a:spcAft>
-              <a:buNone/>
-            </a:pPr>
-            <a:r>
-              <a:t>Answer: 1. Values after each instruction: mulss gives 10.0; addss gives 14.0; cvtss2sd converts that low scalar value to a double, still 14.0.</a:t>
-            </a:r>
-            <a:endParaRPr/>
-          </a:p>
-          <a:p xmlns:a="http://schemas.openxmlformats.org/drawingml/2006/main">
-            <a:pPr marL="0" lvl="0" indent="0" algn="l">
-              <a:spcBef>
-                <a:spcPts val="0"/>
-              </a:spcBef>
-              <a:spcAft>
-                <a:spcPts val="0"/>
-              </a:spcAft>
-              <a:buNone/>
-            </a:pPr>
-            <a:r>
-              <a:t/>
-            </a:r>
-            <a:endParaRPr/>
-          </a:p>
-          <a:p xmlns:a="http://schemas.openxmlformats.org/drawingml/2006/main">
-            <a:pPr marL="0" lvl="0" indent="0" algn="l">
-              <a:spcBef>
-                <a:spcPts val="0"/>
-              </a:spcBef>
-              <a:spcAft>
-                <a:spcPts val="0"/>
-              </a:spcAft>
-              <a:buNone/>
-            </a:pPr>
-            <a:r>
-              <a:t>2. Why convert before printf? C promotes float arguments to double for variadic functions such as printf; %f expects that promoted value.</a:t>
             </a:r>
             <a:endParaRPr/>
           </a:p>
@@ -1367,406 +891,6 @@
             </a:pPr>
             <a:r>
               <a:t>2. Can 40 active calls fit? No. 80 KiB exceeds the 64 KiB budget; at most 32 frames fit in this simplified model. Real frames have other costs, and stack limits depend on the environment. The stack need not literally collide with the heap to overflow.</a:t>
-            </a:r>
-            <a:endParaRPr/>
-          </a:p>
-        </p:txBody>
-      </p:sp>
-      <p:sp>
-        <p:nvSpPr>
-          <p:cNvPr id="4" name="Slide Number Placeholder 3"/>
-          <p:cNvSpPr>
-            <a:spLocks xmlns:a="http://schemas.openxmlformats.org/drawingml/2006/main" noGrp="1"/>
-          </p:cNvSpPr>
-          <p:nvPr>
-            <p:ph type="sldNum" idx="5"/>
-          </p:nvPr>
-        </p:nvSpPr>
-        <p:spPr/>
-        <p:txBody>
-          <a:bodyPr xmlns:a="http://schemas.openxmlformats.org/drawingml/2006/main"/>
-          <a:lstStyle xmlns:a="http://schemas.openxmlformats.org/drawingml/2006/main"/>
-          <a:p xmlns:a="http://schemas.openxmlformats.org/drawingml/2006/main"/>
-        </p:txBody>
-      </p:sp>
-    </p:spTree>
-  </p:cSld>
-  <p:clrMapOvr>
-    <a:masterClrMapping xmlns:a="http://schemas.openxmlformats.org/drawingml/2006/main"/>
-  </p:clrMapOvr>
-</p:notes>
-</file>
-
-<file path=ppt/notesSlides/notesSlide16.xml><?xml version="1.0" encoding="utf-8"?>
-<p:notes xmlns:p="http://schemas.openxmlformats.org/presentationml/2006/main">
-  <p:cSld>
-    <p:spTree>
-      <p:nvGrpSpPr>
-        <p:cNvPr id="1" name=""/>
-        <p:cNvGrpSpPr/>
-        <p:nvPr/>
-      </p:nvGrpSpPr>
-      <p:grpSpPr>
-        <a:xfrm xmlns:a="http://schemas.openxmlformats.org/drawingml/2006/main"/>
-      </p:grpSpPr>
-      <p:sp>
-        <p:nvSpPr>
-          <p:cNvPr id="2" name="Slide Image Placeholder 1"/>
-          <p:cNvSpPr>
-            <a:spLocks xmlns:a="http://schemas.openxmlformats.org/drawingml/2006/main" noGrp="1"/>
-          </p:cNvSpPr>
-          <p:nvPr>
-            <p:ph type="sldImg" idx="0"/>
-          </p:nvPr>
-        </p:nvSpPr>
-        <p:spPr/>
-      </p:sp>
-      <p:sp>
-        <p:nvSpPr>
-          <p:cNvPr id="3" name="Notes Placeholder 2"/>
-          <p:cNvSpPr>
-            <a:spLocks xmlns:a="http://schemas.openxmlformats.org/drawingml/2006/main" noGrp="1"/>
-          </p:cNvSpPr>
-          <p:nvPr>
-            <p:ph type="body" idx="1"/>
-          </p:nvPr>
-        </p:nvSpPr>
-        <p:spPr/>
-        <p:txBody>
-          <a:bodyPr xmlns:a="http://schemas.openxmlformats.org/drawingml/2006/main"/>
-          <a:lstStyle xmlns:a="http://schemas.openxmlformats.org/drawingml/2006/main"/>
-          <a:p xmlns:a="http://schemas.openxmlformats.org/drawingml/2006/main">
-            <a:pPr marL="0" lvl="0" indent="0" algn="l">
-              <a:spcBef>
-                <a:spcPts val="0"/>
-              </a:spcBef>
-              <a:spcAft>
-                <a:spcPts val="0"/>
-              </a:spcAft>
-              <a:buNone/>
-            </a:pPr>
-            <a:r>
-              <a:t>Source: https://firner.com/presentations/cs211/2026-Fall/cs211_11/ (Stack Corruption, Buffer Overflows). This is a conceptual C example; an optimizer may remove unused stores. Do not claim a particular stack layout or that this one-byte write always reaches a return address. Correct alternatives include a 5-byte array for this exact string or length-aware operations. Bounds errors and stack exhaustion are separate problems.</a:t>
-            </a:r>
-            <a:endParaRPr/>
-          </a:p>
-          <a:p xmlns:a="http://schemas.openxmlformats.org/drawingml/2006/main">
-            <a:pPr marL="0" lvl="0" indent="0" algn="l">
-              <a:spcBef>
-                <a:spcPts val="0"/>
-              </a:spcBef>
-              <a:spcAft>
-                <a:spcPts val="0"/>
-              </a:spcAft>
-              <a:buNone/>
-            </a:pPr>
-            <a:r>
-              <a:t/>
-            </a:r>
-            <a:endParaRPr/>
-          </a:p>
-          <a:p xmlns:a="http://schemas.openxmlformats.org/drawingml/2006/main">
-            <a:pPr marL="0" lvl="0" indent="0" algn="l">
-              <a:spcBef>
-                <a:spcPts val="0"/>
-              </a:spcBef>
-              <a:spcAft>
-                <a:spcPts val="0"/>
-              </a:spcAft>
-              <a:buNone/>
-            </a:pPr>
-            <a:r>
-              <a:t>Answer: 1. Capacity: name has 4 bytes, so it holds at most 3 ordinary string characters plus a null terminator.</a:t>
-            </a:r>
-            <a:endParaRPr/>
-          </a:p>
-          <a:p xmlns:a="http://schemas.openxmlformats.org/drawingml/2006/main">
-            <a:pPr marL="0" lvl="0" indent="0" algn="l">
-              <a:spcBef>
-                <a:spcPts val="0"/>
-              </a:spcBef>
-              <a:spcAft>
-                <a:spcPts val="0"/>
-              </a:spcAft>
-              <a:buNone/>
-            </a:pPr>
-            <a:r>
-              <a:t/>
-            </a:r>
-            <a:endParaRPr/>
-          </a:p>
-          <a:p xmlns:a="http://schemas.openxmlformats.org/drawingml/2006/main">
-            <a:pPr marL="0" lvl="0" indent="0" algn="l">
-              <a:spcBef>
-                <a:spcPts val="0"/>
-              </a:spcBef>
-              <a:spcAft>
-                <a:spcPts val="0"/>
-              </a:spcAft>
-              <a:buNone/>
-            </a:pPr>
-            <a:r>
-              <a:t>2. Invalid write: name[4] is out of bounds; valid indices are 0–3.</a:t>
-            </a:r>
-            <a:endParaRPr/>
-          </a:p>
-          <a:p xmlns:a="http://schemas.openxmlformats.org/drawingml/2006/main">
-            <a:pPr marL="0" lvl="0" indent="0" algn="l">
-              <a:spcBef>
-                <a:spcPts val="0"/>
-              </a:spcBef>
-              <a:spcAft>
-                <a:spcPts val="0"/>
-              </a:spcAft>
-              <a:buNone/>
-            </a:pPr>
-            <a:r>
-              <a:t/>
-            </a:r>
-            <a:endParaRPr/>
-          </a:p>
-          <a:p xmlns:a="http://schemas.openxmlformats.org/drawingml/2006/main">
-            <a:pPr marL="0" lvl="0" indent="0" algn="l">
-              <a:spcBef>
-                <a:spcPts val="0"/>
-              </a:spcBef>
-              <a:spcAft>
-                <a:spcPts val="0"/>
-              </a:spcAft>
-              <a:buNone/>
-            </a:pPr>
-            <a:r>
-              <a:t>3. Could it affect nearby stack data? Yes. A write past a stack buffer can corrupt adjacent data or saved call state.</a:t>
-            </a:r>
-            <a:endParaRPr/>
-          </a:p>
-          <a:p xmlns:a="http://schemas.openxmlformats.org/drawingml/2006/main">
-            <a:pPr marL="0" lvl="0" indent="0" algn="l">
-              <a:spcBef>
-                <a:spcPts val="0"/>
-              </a:spcBef>
-              <a:spcAft>
-                <a:spcPts val="0"/>
-              </a:spcAft>
-              <a:buNone/>
-            </a:pPr>
-            <a:r>
-              <a:t/>
-            </a:r>
-            <a:endParaRPr/>
-          </a:p>
-          <a:p xmlns:a="http://schemas.openxmlformats.org/drawingml/2006/main">
-            <a:pPr marL="0" lvl="0" indent="0" algn="l">
-              <a:spcBef>
-                <a:spcPts val="0"/>
-              </a:spcBef>
-              <a:spcAft>
-                <a:spcPts val="0"/>
-              </a:spcAft>
-              <a:buNone/>
-            </a:pPr>
-            <a:r>
-              <a:t>4. Is a crash guaranteed? No. The write is undefined behavior; the exact effect is not guaranteed.</a:t>
-            </a:r>
-            <a:endParaRPr/>
-          </a:p>
-        </p:txBody>
-      </p:sp>
-      <p:sp>
-        <p:nvSpPr>
-          <p:cNvPr id="4" name="Slide Number Placeholder 3"/>
-          <p:cNvSpPr>
-            <a:spLocks xmlns:a="http://schemas.openxmlformats.org/drawingml/2006/main" noGrp="1"/>
-          </p:cNvSpPr>
-          <p:nvPr>
-            <p:ph type="sldNum" idx="5"/>
-          </p:nvPr>
-        </p:nvSpPr>
-        <p:spPr/>
-        <p:txBody>
-          <a:bodyPr xmlns:a="http://schemas.openxmlformats.org/drawingml/2006/main"/>
-          <a:lstStyle xmlns:a="http://schemas.openxmlformats.org/drawingml/2006/main"/>
-          <a:p xmlns:a="http://schemas.openxmlformats.org/drawingml/2006/main"/>
-        </p:txBody>
-      </p:sp>
-    </p:spTree>
-  </p:cSld>
-  <p:clrMapOvr>
-    <a:masterClrMapping xmlns:a="http://schemas.openxmlformats.org/drawingml/2006/main"/>
-  </p:clrMapOvr>
-</p:notes>
-</file>
-
-<file path=ppt/notesSlides/notesSlide17.xml><?xml version="1.0" encoding="utf-8"?>
-<p:notes xmlns:p="http://schemas.openxmlformats.org/presentationml/2006/main">
-  <p:cSld>
-    <p:spTree>
-      <p:nvGrpSpPr>
-        <p:cNvPr id="1" name=""/>
-        <p:cNvGrpSpPr/>
-        <p:nvPr/>
-      </p:nvGrpSpPr>
-      <p:grpSpPr>
-        <a:xfrm xmlns:a="http://schemas.openxmlformats.org/drawingml/2006/main"/>
-      </p:grpSpPr>
-      <p:sp>
-        <p:nvSpPr>
-          <p:cNvPr id="2" name="Slide Image Placeholder 1"/>
-          <p:cNvSpPr>
-            <a:spLocks xmlns:a="http://schemas.openxmlformats.org/drawingml/2006/main" noGrp="1"/>
-          </p:cNvSpPr>
-          <p:nvPr>
-            <p:ph type="sldImg" idx="0"/>
-          </p:nvPr>
-        </p:nvSpPr>
-        <p:spPr/>
-      </p:sp>
-      <p:sp>
-        <p:nvSpPr>
-          <p:cNvPr id="3" name="Notes Placeholder 2"/>
-          <p:cNvSpPr>
-            <a:spLocks xmlns:a="http://schemas.openxmlformats.org/drawingml/2006/main" noGrp="1"/>
-          </p:cNvSpPr>
-          <p:nvPr>
-            <p:ph type="body" idx="1"/>
-          </p:nvPr>
-        </p:nvSpPr>
-        <p:spPr/>
-        <p:txBody>
-          <a:bodyPr xmlns:a="http://schemas.openxmlformats.org/drawingml/2006/main"/>
-          <a:lstStyle xmlns:a="http://schemas.openxmlformats.org/drawingml/2006/main"/>
-          <a:p xmlns:a="http://schemas.openxmlformats.org/drawingml/2006/main">
-            <a:pPr marL="0" lvl="0" indent="0" algn="l">
-              <a:spcBef>
-                <a:spcPts val="0"/>
-              </a:spcBef>
-              <a:spcAft>
-                <a:spcPts val="0"/>
-              </a:spcAft>
-              <a:buNone/>
-            </a:pPr>
-            <a:r>
-              <a:t>Source: https://firner.com/presentations/cs211/2026-Fall/cs211_11/ (Protection, Using Canaries as Guards, Solution, Limiting Execution, Safety). Keep this at the conceptual defense level. A canary check detects corruption rather than repairing it or catching every write. ASLR and NX address different risks. Actual enabled protections depend on the compiler, binary, operating system, and configuration.</a:t>
-            </a:r>
-            <a:endParaRPr/>
-          </a:p>
-          <a:p xmlns:a="http://schemas.openxmlformats.org/drawingml/2006/main">
-            <a:pPr marL="0" lvl="0" indent="0" algn="l">
-              <a:spcBef>
-                <a:spcPts val="0"/>
-              </a:spcBef>
-              <a:spcAft>
-                <a:spcPts val="0"/>
-              </a:spcAft>
-              <a:buNone/>
-            </a:pPr>
-            <a:r>
-              <a:t/>
-            </a:r>
-            <a:endParaRPr/>
-          </a:p>
-          <a:p xmlns:a="http://schemas.openxmlformats.org/drawingml/2006/main">
-            <a:pPr marL="0" lvl="0" indent="0" algn="l">
-              <a:spcBef>
-                <a:spcPts val="0"/>
-              </a:spcBef>
-              <a:spcAft>
-                <a:spcPts val="0"/>
-              </a:spcAft>
-              <a:buNone/>
-            </a:pPr>
-            <a:r>
-              <a:t>Answer: 1. Detects some stack corruption: A, the stack canary. It is checked for unexpected modification.</a:t>
-            </a:r>
-            <a:endParaRPr/>
-          </a:p>
-          <a:p xmlns:a="http://schemas.openxmlformats.org/drawingml/2006/main">
-            <a:pPr marL="0" lvl="0" indent="0" algn="l">
-              <a:spcBef>
-                <a:spcPts val="0"/>
-              </a:spcBef>
-              <a:spcAft>
-                <a:spcPts val="0"/>
-              </a:spcAft>
-              <a:buNone/>
-            </a:pPr>
-            <a:r>
-              <a:t/>
-            </a:r>
-            <a:endParaRPr/>
-          </a:p>
-          <a:p xmlns:a="http://schemas.openxmlformats.org/drawingml/2006/main">
-            <a:pPr marL="0" lvl="0" indent="0" algn="l">
-              <a:spcBef>
-                <a:spcPts val="0"/>
-              </a:spcBef>
-              <a:spcAft>
-                <a:spcPts val="0"/>
-              </a:spcAft>
-              <a:buNone/>
-            </a:pPr>
-            <a:r>
-              <a:t>2. Makes addresses less predictable: B, ASLR. It randomizes relevant address-space locations.</a:t>
-            </a:r>
-            <a:endParaRPr/>
-          </a:p>
-          <a:p xmlns:a="http://schemas.openxmlformats.org/drawingml/2006/main">
-            <a:pPr marL="0" lvl="0" indent="0" algn="l">
-              <a:spcBef>
-                <a:spcPts val="0"/>
-              </a:spcBef>
-              <a:spcAft>
-                <a:spcPts val="0"/>
-              </a:spcAft>
-              <a:buNone/>
-            </a:pPr>
-            <a:r>
-              <a:t/>
-            </a:r>
-            <a:endParaRPr/>
-          </a:p>
-          <a:p xmlns:a="http://schemas.openxmlformats.org/drawingml/2006/main">
-            <a:pPr marL="0" lvl="0" indent="0" algn="l">
-              <a:spcBef>
-                <a:spcPts val="0"/>
-              </a:spcBef>
-              <a:spcAft>
-                <a:spcPts val="0"/>
-              </a:spcAft>
-              <a:buNone/>
-            </a:pPr>
-            <a:r>
-              <a:t>3. Prevents execution from data pages: C, NX. It blocks instruction execution from pages marked non-executable.</a:t>
-            </a:r>
-            <a:endParaRPr/>
-          </a:p>
-          <a:p xmlns:a="http://schemas.openxmlformats.org/drawingml/2006/main">
-            <a:pPr marL="0" lvl="0" indent="0" algn="l">
-              <a:spcBef>
-                <a:spcPts val="0"/>
-              </a:spcBef>
-              <a:spcAft>
-                <a:spcPts val="0"/>
-              </a:spcAft>
-              <a:buNone/>
-            </a:pPr>
-            <a:r>
-              <a:t/>
-            </a:r>
-            <a:endParaRPr/>
-          </a:p>
-          <a:p xmlns:a="http://schemas.openxmlformats.org/drawingml/2006/main">
-            <a:pPr marL="0" lvl="0" indent="0" algn="l">
-              <a:spcBef>
-                <a:spcPts val="0"/>
-              </a:spcBef>
-              <a:spcAft>
-                <a:spcPts val="0"/>
-              </a:spcAft>
-              <a:buNone/>
-            </a:pPr>
-            <a:r>
-              <a:t>4. Does any mechanism make an out-of-bounds write valid? No. None fixes the invalid write or guarantees protection from every memory error or attack.</a:t>
             </a:r>
             <a:endParaRPr/>
           </a:p>
@@ -6143,1113 +5267,7 @@
                 <a:ea typeface="Consolas"/>
                 <a:cs typeface="Consolas"/>
               </a:rPr>
-              <a:t>Floating-point values and registers</a:t>
-            </a:r>
-          </a:p>
-        </p:txBody>
-      </p:sp>
-    </p:spTree>
-    <p:extLst>
-      <p:ext uri="{BB962C8B-B14F-4D97-AF65-F5344CB8AC3E}">
-        <p14:creationId xmlns:p14="http://schemas.microsoft.com/office/powerpoint/2010/main" val="3667182145"/>
-      </p:ext>
-    </p:extLst>
-  </p:cSld>
-</p:sld>
-</file>
-
-<file path=ppt/slides/slide10.xml><?xml version="1.0" encoding="utf-8"?>
-<p:sld xmlns:p="http://schemas.openxmlformats.org/presentationml/2006/main">
-  <p:cSld>
-    <p:spTree>
-      <p:nvGrpSpPr>
-        <p:cNvPr id="1" name=""/>
-        <p:cNvGrpSpPr/>
-        <p:nvPr/>
-      </p:nvGrpSpPr>
-      <p:grpSpPr>
-        <a:xfrm xmlns:a="http://schemas.openxmlformats.org/drawingml/2006/main"/>
-      </p:grpSpPr>
-      <p:sp>
-        <p:nvSpPr>
-          <p:cNvPr id="3" name="Footer Placeholder 2">
-            <a:extLst xmlns:a="http://schemas.openxmlformats.org/drawingml/2006/main">
-              <a:ext uri="{FF2B5EF4-FFF2-40B4-BE49-F238E27FC236}">
-                <a16:creationId xmlns:a16="http://schemas.microsoft.com/office/drawing/2014/main" id="{39EA4C82-C623-0196-4A95-876ADF5DEE92}"/>
-              </a:ext>
-            </a:extLst>
-          </p:cNvPr>
-          <p:cNvSpPr>
-            <a:spLocks xmlns:a="http://schemas.openxmlformats.org/drawingml/2006/main" noGrp="1"/>
-          </p:cNvSpPr>
-          <p:nvPr>
-            <p:ph type="ftr" idx="3"/>
-          </p:nvPr>
-        </p:nvSpPr>
-        <p:spPr>
-          <a:xfrm xmlns:a="http://schemas.openxmlformats.org/drawingml/2006/main">
-            <a:off x="393700" y="6279952"/>
-            <a:ext cx="3568700" cy="241240"/>
-          </a:xfrm>
-        </p:spPr>
-        <p:txBody>
-          <a:bodyPr xmlns:a="http://schemas.openxmlformats.org/drawingml/2006/main" lIns="0" tIns="0" rIns="0" bIns="0" anchor="t">
-            <a:noAutofit/>
-          </a:bodyPr>
-          <a:lstStyle xmlns:a="http://schemas.openxmlformats.org/drawingml/2006/main">
-            <a:defPPr>
-              <a:defRPr sz="1125">
-                <a:solidFill>
-                  <a:srgbClr val="FFFFFF"/>
-                </a:solidFill>
-                <a:latin typeface="Arial"/>
-                <a:ea typeface="Arial"/>
-                <a:cs typeface="Arial"/>
-              </a:defRPr>
-            </a:defPPr>
-          </a:lstStyle>
-          <a:p xmlns:a="http://schemas.openxmlformats.org/drawingml/2006/main">
-            <a:pPr marL="0" indent="0">
-              <a:lnSpc>
-                <a:spcPct val="112000"/>
-              </a:lnSpc>
-              <a:spcBef>
-                <a:spcPts val="0"/>
-              </a:spcBef>
-              <a:spcAft>
-                <a:spcPts val="0"/>
-              </a:spcAft>
-              <a:buNone/>
-              <a:defRPr sz="1125">
-                <a:solidFill>
-                  <a:srgbClr val="FFFFFF"/>
-                </a:solidFill>
-                <a:latin typeface="Arial"/>
-                <a:ea typeface="Arial"/>
-                <a:cs typeface="Arial"/>
-              </a:defRPr>
-            </a:pPr>
-            <a:r>
-              <a:rPr sz="1125">
-                <a:solidFill>
-                  <a:srgbClr val="FFFFFF"/>
-                </a:solidFill>
-                <a:latin typeface="Arial"/>
-                <a:ea typeface="Arial"/>
-                <a:cs typeface="Arial"/>
-              </a:rPr>
-              <a:t>CS 211 · Recitation 06</a:t>
-            </a:r>
-          </a:p>
-        </p:txBody>
-      </p:sp>
-      <p:sp>
-        <p:nvSpPr>
-          <p:cNvPr id="532" name="Google Shape;532;p58">
-            <a:extLst xmlns:a="http://schemas.openxmlformats.org/drawingml/2006/main">
-              <a:ext uri="{FF2B5EF4-FFF2-40B4-BE49-F238E27FC236}">
-                <a16:creationId xmlns:a16="http://schemas.microsoft.com/office/drawing/2014/main" id="{1BCBE750-7048-686D-1472-52C53362D6CD}"/>
-              </a:ext>
-            </a:extLst>
-          </p:cNvPr>
-          <p:cNvSpPr>
-            <a:spLocks xmlns:a="http://schemas.openxmlformats.org/drawingml/2006/main" noGrp="1"/>
-          </p:cNvSpPr>
-          <p:nvPr>
-            <p:ph type="sldNum" idx="4"/>
-          </p:nvPr>
-        </p:nvSpPr>
-        <p:spPr>
-          <a:xfrm xmlns:a="http://schemas.openxmlformats.org/drawingml/2006/main">
-            <a:off x="11279332" y="6279294"/>
-            <a:ext cx="518968" cy="241240"/>
-          </a:xfrm>
-        </p:spPr>
-        <p:txBody>
-          <a:bodyPr xmlns:a="http://schemas.openxmlformats.org/drawingml/2006/main" spcFirstLastPara="1" vert="horz" wrap="square" lIns="0" tIns="0" rIns="0" bIns="0" anchor="t">
-            <a:noAutofit/>
-          </a:bodyPr>
-          <a:lstStyle xmlns:a="http://schemas.openxmlformats.org/drawingml/2006/main">
-            <a:defPPr>
-              <a:defRPr sz="1125">
-                <a:solidFill>
-                  <a:srgbClr val="FFFFFF"/>
-                </a:solidFill>
-                <a:latin typeface="Arial"/>
-                <a:ea typeface="Arial"/>
-                <a:cs typeface="Arial"/>
-              </a:defRPr>
-            </a:defPPr>
-          </a:lstStyle>
-          <a:p xmlns:a="http://schemas.openxmlformats.org/drawingml/2006/main">
-            <a:pPr marL="0" indent="0">
-              <a:lnSpc>
-                <a:spcPct val="112000"/>
-              </a:lnSpc>
-              <a:spcBef>
-                <a:spcPts val="0"/>
-              </a:spcBef>
-              <a:spcAft>
-                <a:spcPts val="0"/>
-              </a:spcAft>
-              <a:buNone/>
-              <a:defRPr sz="1125">
-                <a:solidFill>
-                  <a:srgbClr val="FFFFFF"/>
-                </a:solidFill>
-                <a:latin typeface="Arial"/>
-                <a:ea typeface="Arial"/>
-                <a:cs typeface="Arial"/>
-              </a:defRPr>
-            </a:pPr>
-            <a:r>
-              <a:rPr sz="1125">
-                <a:solidFill>
-                  <a:srgbClr val="FFFFFF"/>
-                </a:solidFill>
-                <a:latin typeface="Arial"/>
-                <a:ea typeface="Arial"/>
-                <a:cs typeface="Arial"/>
-              </a:rPr>
-              <a:t>10</a:t>
-            </a:r>
-          </a:p>
-        </p:txBody>
-      </p:sp>
-      <p:sp>
-        <p:nvSpPr>
-          <p:cNvPr id="533" name="Google Shape;533;p58">
-            <a:extLst xmlns:a="http://schemas.openxmlformats.org/drawingml/2006/main">
-              <a:ext uri="{FF2B5EF4-FFF2-40B4-BE49-F238E27FC236}">
-                <a16:creationId xmlns:a16="http://schemas.microsoft.com/office/drawing/2014/main" id="{1B5D55CD-1C17-7CD8-F26A-2DD65B067687}"/>
-              </a:ext>
-            </a:extLst>
-          </p:cNvPr>
-          <p:cNvSpPr>
-            <a:spLocks xmlns:a="http://schemas.openxmlformats.org/drawingml/2006/main" noGrp="1"/>
-          </p:cNvSpPr>
-          <p:nvPr>
-            <p:ph type="title" idx="0"/>
-          </p:nvPr>
-        </p:nvSpPr>
-        <p:spPr>
-          <a:xfrm xmlns:a="http://schemas.openxmlformats.org/drawingml/2006/main">
-            <a:off x="393700" y="344008"/>
-            <a:ext cx="11404600" cy="1047491"/>
-          </a:xfrm>
-        </p:spPr>
-        <p:txBody>
-          <a:bodyPr xmlns:a="http://schemas.openxmlformats.org/drawingml/2006/main" spcFirstLastPara="1" vert="horz" wrap="square" lIns="0" tIns="0" rIns="0" bIns="0" anchor="t">
-            <a:noAutofit/>
-          </a:bodyPr>
-          <a:lstStyle xmlns:a="http://schemas.openxmlformats.org/drawingml/2006/main">
-            <a:defPPr>
-              <a:defRPr sz="3150">
-                <a:solidFill>
-                  <a:srgbClr val="FFFFFF"/>
-                </a:solidFill>
-                <a:latin typeface="Arial"/>
-                <a:ea typeface="Arial"/>
-                <a:cs typeface="Arial"/>
-              </a:defRPr>
-            </a:defPPr>
-          </a:lstStyle>
-          <a:p xmlns:a="http://schemas.openxmlformats.org/drawingml/2006/main">
-            <a:pPr marL="0" indent="0">
-              <a:lnSpc>
-                <a:spcPct val="112000"/>
-              </a:lnSpc>
-              <a:spcBef>
-                <a:spcPts val="0"/>
-              </a:spcBef>
-              <a:spcAft>
-                <a:spcPts val="0"/>
-              </a:spcAft>
-              <a:buNone/>
-              <a:defRPr sz="3150">
-                <a:solidFill>
-                  <a:srgbClr val="FFFFFF"/>
-                </a:solidFill>
-                <a:latin typeface="Arial"/>
-                <a:ea typeface="Arial"/>
-                <a:cs typeface="Arial"/>
-              </a:defRPr>
-            </a:pPr>
-            <a:r>
-              <a:rPr sz="3150">
-                <a:solidFill>
-                  <a:srgbClr val="FFFFFF"/>
-                </a:solidFill>
-                <a:latin typeface="Arial"/>
-                <a:ea typeface="Arial"/>
-                <a:cs typeface="Arial"/>
-              </a:rPr>
-              <a:t>Practice: build the float bits</a:t>
-            </a:r>
-          </a:p>
-        </p:txBody>
-      </p:sp>
-      <p:sp>
-        <p:nvSpPr>
-          <p:cNvPr id="7" name="Google Shape;534;p58">
-            <a:extLst xmlns:a="http://schemas.openxmlformats.org/drawingml/2006/main">
-              <a:ext uri="{FF2B5EF4-FFF2-40B4-BE49-F238E27FC236}">
-                <a16:creationId xmlns:a16="http://schemas.microsoft.com/office/drawing/2014/main" id="{3A923FEE-B8D2-CD3A-ABBD-21770B40AA24}"/>
-              </a:ext>
-            </a:extLst>
-          </p:cNvPr>
-          <p:cNvSpPr>
-            <a:spLocks xmlns:a="http://schemas.openxmlformats.org/drawingml/2006/main" noGrp="1"/>
-          </p:cNvSpPr>
-          <p:nvPr/>
-        </p:nvSpPr>
-        <p:spPr>
-          <a:xfrm xmlns:a="http://schemas.openxmlformats.org/drawingml/2006/main">
-            <a:off x="393700" y="2031999"/>
-            <a:ext cx="5537200" cy="3534787"/>
-          </a:xfrm>
-          <a:prstGeom xmlns:a="http://schemas.openxmlformats.org/drawingml/2006/main" prst="rect">
-            <a:avLst/>
-          </a:prstGeom>
-        </p:spPr>
-        <p:txBody>
-          <a:bodyPr xmlns:a="http://schemas.openxmlformats.org/drawingml/2006/main" spcFirstLastPara="1" vert="horz" wrap="square" lIns="0" tIns="0" rIns="0" bIns="0" anchor="t">
-            <a:noAutofit/>
-          </a:bodyPr>
-          <a:lstStyle xmlns:a="http://schemas.openxmlformats.org/drawingml/2006/main">
-            <a:defPPr>
-              <a:defRPr sz="1875">
-                <a:solidFill>
-                  <a:srgbClr val="FFFFFF"/>
-                </a:solidFill>
-                <a:latin typeface="Arial"/>
-                <a:ea typeface="Arial"/>
-                <a:cs typeface="Arial"/>
-              </a:defRPr>
-            </a:defPPr>
-            <a:lvl1pPr marL="228600" indent="-228600" algn="l" defTabSz="914400">
-              <a:lnSpc>
-                <a:spcPct val="90000"/>
-              </a:lnSpc>
-              <a:spcBef>
-                <a:spcPts val="1000"/>
-              </a:spcBef>
-              <a:buFont typeface="Arial"/>
-              <a:buChar char="•"/>
-              <a:defRPr sz="2400" kern="1200">
-                <a:solidFill>
-                  <a:schemeClr val="tx1"/>
-                </a:solidFill>
-                <a:latin typeface="+mn-lt"/>
-                <a:ea typeface="+mn-lt"/>
-                <a:cs typeface="+mn-lt"/>
-              </a:defRPr>
-            </a:lvl1pPr>
-            <a:lvl2pPr marL="685800" indent="-228600" algn="l" defTabSz="914400">
-              <a:lnSpc>
-                <a:spcPct val="90000"/>
-              </a:lnSpc>
-              <a:spcBef>
-                <a:spcPts val="500"/>
-              </a:spcBef>
-              <a:buFont typeface="Arial"/>
-              <a:buChar char="•"/>
-              <a:defRPr sz="2000" kern="1200">
-                <a:solidFill>
-                  <a:schemeClr val="tx1"/>
-                </a:solidFill>
-                <a:latin typeface="+mn-lt"/>
-                <a:ea typeface="+mn-lt"/>
-                <a:cs typeface="+mn-lt"/>
-              </a:defRPr>
-            </a:lvl2pPr>
-            <a:lvl3pPr marL="1143000" indent="-228600" algn="l" defTabSz="914400">
-              <a:lnSpc>
-                <a:spcPct val="90000"/>
-              </a:lnSpc>
-              <a:spcBef>
-                <a:spcPts val="500"/>
-              </a:spcBef>
-              <a:buFont typeface="Arial"/>
-              <a:buChar char="•"/>
-              <a:defRPr sz="1800" kern="1200">
-                <a:solidFill>
-                  <a:schemeClr val="tx1"/>
-                </a:solidFill>
-                <a:latin typeface="+mn-lt"/>
-                <a:ea typeface="+mn-lt"/>
-                <a:cs typeface="+mn-lt"/>
-              </a:defRPr>
-            </a:lvl3pPr>
-            <a:lvl4pPr marL="1600200" indent="-228600" algn="l" defTabSz="914400">
-              <a:lnSpc>
-                <a:spcPct val="90000"/>
-              </a:lnSpc>
-              <a:spcBef>
-                <a:spcPts val="500"/>
-              </a:spcBef>
-              <a:buFont typeface="Arial"/>
-              <a:buChar char="•"/>
-              <a:defRPr sz="1800" kern="1200">
-                <a:solidFill>
-                  <a:schemeClr val="tx1"/>
-                </a:solidFill>
-                <a:latin typeface="+mn-lt"/>
-                <a:ea typeface="+mn-lt"/>
-                <a:cs typeface="+mn-lt"/>
-              </a:defRPr>
-            </a:lvl4pPr>
-            <a:lvl5pPr marL="2057400" indent="-228600" algn="l" defTabSz="914400">
-              <a:lnSpc>
-                <a:spcPct val="90000"/>
-              </a:lnSpc>
-              <a:spcBef>
-                <a:spcPts val="500"/>
-              </a:spcBef>
-              <a:buFont typeface="Arial"/>
-              <a:buChar char="•"/>
-              <a:defRPr sz="1800" kern="1200">
-                <a:solidFill>
-                  <a:schemeClr val="tx1"/>
-                </a:solidFill>
-                <a:latin typeface="+mn-lt"/>
-                <a:ea typeface="+mn-lt"/>
-                <a:cs typeface="+mn-lt"/>
-              </a:defRPr>
-            </a:lvl5pPr>
-            <a:lvl6pPr marL="2514600" indent="-228600" algn="l" defTabSz="914400">
-              <a:lnSpc>
-                <a:spcPct val="90000"/>
-              </a:lnSpc>
-              <a:spcBef>
-                <a:spcPts val="500"/>
-              </a:spcBef>
-              <a:buFont typeface="Arial"/>
-              <a:buChar char="•"/>
-              <a:defRPr sz="1800" kern="1200">
-                <a:solidFill>
-                  <a:schemeClr val="tx1"/>
-                </a:solidFill>
-                <a:latin typeface="+mn-lt"/>
-                <a:ea typeface="+mn-lt"/>
-                <a:cs typeface="+mn-lt"/>
-              </a:defRPr>
-            </a:lvl6pPr>
-            <a:lvl7pPr marL="2971800" indent="-228600" algn="l" defTabSz="914400">
-              <a:lnSpc>
-                <a:spcPct val="90000"/>
-              </a:lnSpc>
-              <a:spcBef>
-                <a:spcPts val="500"/>
-              </a:spcBef>
-              <a:buFont typeface="Arial"/>
-              <a:buChar char="•"/>
-              <a:defRPr sz="1800" kern="1200">
-                <a:solidFill>
-                  <a:schemeClr val="tx1"/>
-                </a:solidFill>
-                <a:latin typeface="+mn-lt"/>
-                <a:ea typeface="+mn-lt"/>
-                <a:cs typeface="+mn-lt"/>
-              </a:defRPr>
-            </a:lvl7pPr>
-            <a:lvl8pPr marL="3429000" indent="-228600" algn="l" defTabSz="914400">
-              <a:lnSpc>
-                <a:spcPct val="90000"/>
-              </a:lnSpc>
-              <a:spcBef>
-                <a:spcPts val="500"/>
-              </a:spcBef>
-              <a:buFont typeface="Arial"/>
-              <a:buChar char="•"/>
-              <a:defRPr sz="1800" kern="1200">
-                <a:solidFill>
-                  <a:schemeClr val="tx1"/>
-                </a:solidFill>
-                <a:latin typeface="+mn-lt"/>
-                <a:ea typeface="+mn-lt"/>
-                <a:cs typeface="+mn-lt"/>
-              </a:defRPr>
-            </a:lvl8pPr>
-            <a:lvl9pPr marL="3886200" indent="-228600" algn="l" defTabSz="914400">
-              <a:lnSpc>
-                <a:spcPct val="90000"/>
-              </a:lnSpc>
-              <a:spcBef>
-                <a:spcPts val="500"/>
-              </a:spcBef>
-              <a:buFont typeface="Arial"/>
-              <a:buChar char="•"/>
-              <a:defRPr sz="1800" kern="1200">
-                <a:solidFill>
-                  <a:schemeClr val="tx1"/>
-                </a:solidFill>
-                <a:latin typeface="+mn-lt"/>
-                <a:ea typeface="+mn-lt"/>
-                <a:cs typeface="+mn-lt"/>
-              </a:defRPr>
-            </a:lvl9pPr>
-          </a:lstStyle>
-          <a:p xmlns:a="http://schemas.openxmlformats.org/drawingml/2006/main">
-            <a:pPr marL="0" indent="0">
-              <a:lnSpc>
-                <a:spcPct val="112000"/>
-              </a:lnSpc>
-              <a:spcBef>
-                <a:spcPts val="0"/>
-              </a:spcBef>
-              <a:spcAft>
-                <a:spcPts val="0"/>
-              </a:spcAft>
-              <a:buNone/>
-              <a:defRPr sz="1875">
-                <a:solidFill>
-                  <a:srgbClr val="FFFFFF"/>
-                </a:solidFill>
-                <a:latin typeface="Arial"/>
-                <a:ea typeface="Arial"/>
-                <a:cs typeface="Arial"/>
-              </a:defRPr>
-            </a:pPr>
-            <a:r>
-              <a:rPr sz="1875">
-                <a:solidFill>
-                  <a:srgbClr val="FFFFFF"/>
-                </a:solidFill>
-                <a:latin typeface="Arial"/>
-                <a:ea typeface="Arial"/>
-                <a:cs typeface="Arial"/>
-              </a:rPr>
-              <a:t>bits begins as zero. The shifts place values into the FP32 exponent and fraction fields.</a:t>
-            </a:r>
-          </a:p>
-          <a:p xmlns:a="http://schemas.openxmlformats.org/drawingml/2006/main">
-            <a:pPr marL="0" indent="0">
-              <a:lnSpc>
-                <a:spcPct val="112000"/>
-              </a:lnSpc>
-              <a:spcBef>
-                <a:spcPts val="0"/>
-              </a:spcBef>
-              <a:spcAft>
-                <a:spcPts val="0"/>
-              </a:spcAft>
-              <a:buNone/>
-            </a:pPr>
-            <a:r>
-              <a:t/>
-            </a:r>
-          </a:p>
-          <a:p xmlns:a="http://schemas.openxmlformats.org/drawingml/2006/main">
-            <a:pPr marL="0" indent="0">
-              <a:lnSpc>
-                <a:spcPct val="112000"/>
-              </a:lnSpc>
-              <a:spcBef>
-                <a:spcPts val="0"/>
-              </a:spcBef>
-              <a:spcAft>
-                <a:spcPts val="0"/>
-              </a:spcAft>
-              <a:buNone/>
-              <a:defRPr sz="1875">
-                <a:solidFill>
-                  <a:srgbClr val="FFFFFF"/>
-                </a:solidFill>
-                <a:latin typeface="Arial"/>
-                <a:ea typeface="Arial"/>
-                <a:cs typeface="Arial"/>
-              </a:defRPr>
-            </a:pPr>
-            <a:r>
-              <a:rPr sz="1875">
-                <a:solidFill>
-                  <a:srgbClr val="FFFFFF"/>
-                </a:solidFill>
-                <a:latin typeface="Arial"/>
-                <a:ea typeface="Arial"/>
-                <a:cs typeface="Arial"/>
-              </a:rPr>
-              <a:t>Interpret the resulting 32 bits as an FP32 value. What is the decimal value?</a:t>
-            </a:r>
-          </a:p>
-          <a:p xmlns:a="http://schemas.openxmlformats.org/drawingml/2006/main">
-            <a:pPr marL="0" indent="0">
-              <a:lnSpc>
-                <a:spcPct val="112000"/>
-              </a:lnSpc>
-              <a:spcBef>
-                <a:spcPts val="0"/>
-              </a:spcBef>
-              <a:spcAft>
-                <a:spcPts val="0"/>
-              </a:spcAft>
-              <a:buNone/>
-            </a:pPr>
-            <a:r>
-              <a:t/>
-            </a:r>
-          </a:p>
-          <a:p xmlns:a="http://schemas.openxmlformats.org/drawingml/2006/main">
-            <a:pPr marL="0" indent="0">
-              <a:lnSpc>
-                <a:spcPct val="112000"/>
-              </a:lnSpc>
-              <a:spcBef>
-                <a:spcPts val="0"/>
-              </a:spcBef>
-              <a:spcAft>
-                <a:spcPts val="0"/>
-              </a:spcAft>
-              <a:buNone/>
-              <a:defRPr sz="1875">
-                <a:solidFill>
-                  <a:srgbClr val="FFFFFF"/>
-                </a:solidFill>
-                <a:latin typeface="Arial"/>
-                <a:ea typeface="Arial"/>
-                <a:cs typeface="Arial"/>
-              </a:defRPr>
-            </a:pPr>
-            <a:r>
-              <a:rPr sz="1875">
-                <a:solidFill>
-                  <a:srgbClr val="FFFFFF"/>
-                </a:solidFill>
-                <a:latin typeface="Arial"/>
-                <a:ea typeface="Arial"/>
-                <a:cs typeface="Arial"/>
-              </a:rPr>
-              <a:t>This changes a bit pattern; it is not an integer-to-float cast.</a:t>
-            </a:r>
-          </a:p>
-        </p:txBody>
-      </p:sp>
-      <p:sp>
-        <p:nvSpPr>
-          <p:cNvPr id="8" name="Content Placeholder 3">
-            <a:extLst xmlns:a="http://schemas.openxmlformats.org/drawingml/2006/main">
-              <a:ext uri="{FF2B5EF4-FFF2-40B4-BE49-F238E27FC236}">
-                <a16:creationId xmlns:a16="http://schemas.microsoft.com/office/drawing/2014/main" id="{2EE8F343-A95F-2AAA-FE9E-A6C31E298DF7}"/>
-              </a:ext>
-            </a:extLst>
-          </p:cNvPr>
-          <p:cNvSpPr>
-            <a:spLocks xmlns:a="http://schemas.openxmlformats.org/drawingml/2006/main" noGrp="1"/>
-          </p:cNvSpPr>
-          <p:nvPr/>
-        </p:nvSpPr>
-        <p:spPr>
-          <a:xfrm xmlns:a="http://schemas.openxmlformats.org/drawingml/2006/main">
-            <a:off x="6256618" y="2031999"/>
-            <a:ext cx="5537200" cy="3534787"/>
-          </a:xfrm>
-          <a:prstGeom xmlns:a="http://schemas.openxmlformats.org/drawingml/2006/main" prst="rect">
-            <a:avLst/>
-          </a:prstGeom>
-        </p:spPr>
-        <p:txBody>
-          <a:bodyPr xmlns:a="http://schemas.openxmlformats.org/drawingml/2006/main" lIns="0" tIns="0" rIns="0" bIns="0" anchor="t">
-            <a:noAutofit/>
-          </a:bodyPr>
-          <a:lstStyle xmlns:a="http://schemas.openxmlformats.org/drawingml/2006/main">
-            <a:defPPr>
-              <a:defRPr sz="1800">
-                <a:solidFill>
-                  <a:srgbClr val="FFFFFF"/>
-                </a:solidFill>
-                <a:latin typeface="Consolas"/>
-                <a:ea typeface="Consolas"/>
-                <a:cs typeface="Consolas"/>
-              </a:defRPr>
-            </a:defPPr>
-            <a:lvl1pPr marL="228600" indent="-228600" algn="l" defTabSz="914400">
-              <a:lnSpc>
-                <a:spcPct val="90000"/>
-              </a:lnSpc>
-              <a:spcBef>
-                <a:spcPts val="1000"/>
-              </a:spcBef>
-              <a:buFont typeface="Arial"/>
-              <a:buChar char="•"/>
-              <a:defRPr sz="2400" kern="1200">
-                <a:solidFill>
-                  <a:schemeClr val="tx1"/>
-                </a:solidFill>
-                <a:latin typeface="+mn-lt"/>
-                <a:ea typeface="+mn-lt"/>
-                <a:cs typeface="+mn-lt"/>
-              </a:defRPr>
-            </a:lvl1pPr>
-            <a:lvl2pPr marL="685800" indent="-228600" algn="l" defTabSz="914400">
-              <a:lnSpc>
-                <a:spcPct val="90000"/>
-              </a:lnSpc>
-              <a:spcBef>
-                <a:spcPts val="500"/>
-              </a:spcBef>
-              <a:buFont typeface="Arial"/>
-              <a:buChar char="•"/>
-              <a:defRPr sz="2000" kern="1200">
-                <a:solidFill>
-                  <a:schemeClr val="tx1"/>
-                </a:solidFill>
-                <a:latin typeface="+mn-lt"/>
-                <a:ea typeface="+mn-lt"/>
-                <a:cs typeface="+mn-lt"/>
-              </a:defRPr>
-            </a:lvl2pPr>
-            <a:lvl3pPr marL="1143000" indent="-228600" algn="l" defTabSz="914400">
-              <a:lnSpc>
-                <a:spcPct val="90000"/>
-              </a:lnSpc>
-              <a:spcBef>
-                <a:spcPts val="500"/>
-              </a:spcBef>
-              <a:buFont typeface="Arial"/>
-              <a:buChar char="•"/>
-              <a:defRPr sz="1800" kern="1200">
-                <a:solidFill>
-                  <a:schemeClr val="tx1"/>
-                </a:solidFill>
-                <a:latin typeface="+mn-lt"/>
-                <a:ea typeface="+mn-lt"/>
-                <a:cs typeface="+mn-lt"/>
-              </a:defRPr>
-            </a:lvl3pPr>
-            <a:lvl4pPr marL="1600200" indent="-228600" algn="l" defTabSz="914400">
-              <a:lnSpc>
-                <a:spcPct val="90000"/>
-              </a:lnSpc>
-              <a:spcBef>
-                <a:spcPts val="500"/>
-              </a:spcBef>
-              <a:buFont typeface="Arial"/>
-              <a:buChar char="•"/>
-              <a:defRPr sz="1800" kern="1200">
-                <a:solidFill>
-                  <a:schemeClr val="tx1"/>
-                </a:solidFill>
-                <a:latin typeface="+mn-lt"/>
-                <a:ea typeface="+mn-lt"/>
-                <a:cs typeface="+mn-lt"/>
-              </a:defRPr>
-            </a:lvl4pPr>
-            <a:lvl5pPr marL="2057400" indent="-228600" algn="l" defTabSz="914400">
-              <a:lnSpc>
-                <a:spcPct val="90000"/>
-              </a:lnSpc>
-              <a:spcBef>
-                <a:spcPts val="500"/>
-              </a:spcBef>
-              <a:buFont typeface="Arial"/>
-              <a:buChar char="•"/>
-              <a:defRPr sz="1800" kern="1200">
-                <a:solidFill>
-                  <a:schemeClr val="tx1"/>
-                </a:solidFill>
-                <a:latin typeface="+mn-lt"/>
-                <a:ea typeface="+mn-lt"/>
-                <a:cs typeface="+mn-lt"/>
-              </a:defRPr>
-            </a:lvl5pPr>
-            <a:lvl6pPr marL="2514600" indent="-228600" algn="l" defTabSz="914400">
-              <a:lnSpc>
-                <a:spcPct val="90000"/>
-              </a:lnSpc>
-              <a:spcBef>
-                <a:spcPts val="500"/>
-              </a:spcBef>
-              <a:buFont typeface="Arial"/>
-              <a:buChar char="•"/>
-              <a:defRPr sz="1800" kern="1200">
-                <a:solidFill>
-                  <a:schemeClr val="tx1"/>
-                </a:solidFill>
-                <a:latin typeface="+mn-lt"/>
-                <a:ea typeface="+mn-lt"/>
-                <a:cs typeface="+mn-lt"/>
-              </a:defRPr>
-            </a:lvl6pPr>
-            <a:lvl7pPr marL="2971800" indent="-228600" algn="l" defTabSz="914400">
-              <a:lnSpc>
-                <a:spcPct val="90000"/>
-              </a:lnSpc>
-              <a:spcBef>
-                <a:spcPts val="500"/>
-              </a:spcBef>
-              <a:buFont typeface="Arial"/>
-              <a:buChar char="•"/>
-              <a:defRPr sz="1800" kern="1200">
-                <a:solidFill>
-                  <a:schemeClr val="tx1"/>
-                </a:solidFill>
-                <a:latin typeface="+mn-lt"/>
-                <a:ea typeface="+mn-lt"/>
-                <a:cs typeface="+mn-lt"/>
-              </a:defRPr>
-            </a:lvl7pPr>
-            <a:lvl8pPr marL="3429000" indent="-228600" algn="l" defTabSz="914400">
-              <a:lnSpc>
-                <a:spcPct val="90000"/>
-              </a:lnSpc>
-              <a:spcBef>
-                <a:spcPts val="500"/>
-              </a:spcBef>
-              <a:buFont typeface="Arial"/>
-              <a:buChar char="•"/>
-              <a:defRPr sz="1800" kern="1200">
-                <a:solidFill>
-                  <a:schemeClr val="tx1"/>
-                </a:solidFill>
-                <a:latin typeface="+mn-lt"/>
-                <a:ea typeface="+mn-lt"/>
-                <a:cs typeface="+mn-lt"/>
-              </a:defRPr>
-            </a:lvl8pPr>
-            <a:lvl9pPr marL="3886200" indent="-228600" algn="l" defTabSz="914400">
-              <a:lnSpc>
-                <a:spcPct val="90000"/>
-              </a:lnSpc>
-              <a:spcBef>
-                <a:spcPts val="500"/>
-              </a:spcBef>
-              <a:buFont typeface="Arial"/>
-              <a:buChar char="•"/>
-              <a:defRPr sz="1800" kern="1200">
-                <a:solidFill>
-                  <a:schemeClr val="tx1"/>
-                </a:solidFill>
-                <a:latin typeface="+mn-lt"/>
-                <a:ea typeface="+mn-lt"/>
-                <a:cs typeface="+mn-lt"/>
-              </a:defRPr>
-            </a:lvl9pPr>
-          </a:lstStyle>
-          <a:p xmlns:a="http://schemas.openxmlformats.org/drawingml/2006/main">
-            <a:pPr marL="0" indent="0">
-              <a:lnSpc>
-                <a:spcPct val="112000"/>
-              </a:lnSpc>
-              <a:spcBef>
-                <a:spcPts val="0"/>
-              </a:spcBef>
-              <a:spcAft>
-                <a:spcPts val="0"/>
-              </a:spcAft>
-              <a:buNone/>
-              <a:defRPr sz="1800">
-                <a:solidFill>
-                  <a:srgbClr val="FFFFFF"/>
-                </a:solidFill>
-                <a:latin typeface="Consolas"/>
-                <a:ea typeface="Consolas"/>
-                <a:cs typeface="Consolas"/>
-              </a:defRPr>
-            </a:pPr>
-            <a:r>
-              <a:rPr sz="1800">
-                <a:solidFill>
-                  <a:srgbClr val="FFFFFF"/>
-                </a:solidFill>
-                <a:latin typeface="Consolas"/>
-                <a:ea typeface="Consolas"/>
-                <a:cs typeface="Consolas"/>
-              </a:rPr>
-              <a:t>uint32_t bits = 0;</a:t>
-            </a:r>
-          </a:p>
-          <a:p xmlns:a="http://schemas.openxmlformats.org/drawingml/2006/main">
-            <a:pPr marL="0" indent="0">
-              <a:lnSpc>
-                <a:spcPct val="112000"/>
-              </a:lnSpc>
-              <a:spcBef>
-                <a:spcPts val="0"/>
-              </a:spcBef>
-              <a:spcAft>
-                <a:spcPts val="0"/>
-              </a:spcAft>
-              <a:buNone/>
-              <a:defRPr sz="1800">
-                <a:solidFill>
-                  <a:srgbClr val="FFFFFF"/>
-                </a:solidFill>
-                <a:latin typeface="Consolas"/>
-                <a:ea typeface="Consolas"/>
-                <a:cs typeface="Consolas"/>
-              </a:defRPr>
-            </a:pPr>
-            <a:r>
-              <a:rPr sz="1800">
-                <a:solidFill>
-                  <a:srgbClr val="FFFFFF"/>
-                </a:solidFill>
-                <a:latin typeface="Consolas"/>
-                <a:ea typeface="Consolas"/>
-                <a:cs typeface="Consolas"/>
-              </a:rPr>
-              <a:t>bits |= (126u &lt;&lt; 23);</a:t>
-            </a:r>
-          </a:p>
-          <a:p xmlns:a="http://schemas.openxmlformats.org/drawingml/2006/main">
-            <a:pPr marL="0" indent="0">
-              <a:lnSpc>
-                <a:spcPct val="112000"/>
-              </a:lnSpc>
-              <a:spcBef>
-                <a:spcPts val="0"/>
-              </a:spcBef>
-              <a:spcAft>
-                <a:spcPts val="0"/>
-              </a:spcAft>
-              <a:buNone/>
-              <a:defRPr sz="1800">
-                <a:solidFill>
-                  <a:srgbClr val="FFFFFF"/>
-                </a:solidFill>
-                <a:latin typeface="Consolas"/>
-                <a:ea typeface="Consolas"/>
-                <a:cs typeface="Consolas"/>
-              </a:defRPr>
-            </a:pPr>
-            <a:r>
-              <a:rPr sz="1800">
-                <a:solidFill>
-                  <a:srgbClr val="FFFFFF"/>
-                </a:solidFill>
-                <a:latin typeface="Consolas"/>
-                <a:ea typeface="Consolas"/>
-                <a:cs typeface="Consolas"/>
-              </a:rPr>
-              <a:t>bits |= (1u &lt;&lt; 22);</a:t>
-            </a:r>
-          </a:p>
-          <a:p xmlns:a="http://schemas.openxmlformats.org/drawingml/2006/main">
-            <a:pPr marL="0" indent="0">
-              <a:lnSpc>
-                <a:spcPct val="112000"/>
-              </a:lnSpc>
-              <a:spcBef>
-                <a:spcPts val="0"/>
-              </a:spcBef>
-              <a:spcAft>
-                <a:spcPts val="0"/>
-              </a:spcAft>
-              <a:buNone/>
-              <a:defRPr sz="1800">
-                <a:solidFill>
-                  <a:srgbClr val="FFFFFF"/>
-                </a:solidFill>
-                <a:latin typeface="Consolas"/>
-                <a:ea typeface="Consolas"/>
-                <a:cs typeface="Consolas"/>
-              </a:defRPr>
-            </a:pPr>
-            <a:r>
-              <a:rPr sz="1800">
-                <a:solidFill>
-                  <a:srgbClr val="FFFFFF"/>
-                </a:solidFill>
-                <a:latin typeface="Consolas"/>
-                <a:ea typeface="Consolas"/>
-                <a:cs typeface="Consolas"/>
-              </a:rPr>
-              <a:t>bits |= (1u &lt;&lt; 20);</a:t>
-            </a:r>
-          </a:p>
-          <a:p xmlns:a="http://schemas.openxmlformats.org/drawingml/2006/main">
-            <a:pPr marL="0" indent="0">
-              <a:lnSpc>
-                <a:spcPct val="112000"/>
-              </a:lnSpc>
-              <a:spcBef>
-                <a:spcPts val="0"/>
-              </a:spcBef>
-              <a:spcAft>
-                <a:spcPts val="0"/>
-              </a:spcAft>
-              <a:buNone/>
-            </a:pPr>
-            <a:r>
-              <a:t/>
-            </a:r>
-          </a:p>
-          <a:p xmlns:a="http://schemas.openxmlformats.org/drawingml/2006/main">
-            <a:pPr marL="0" indent="0">
-              <a:lnSpc>
-                <a:spcPct val="112000"/>
-              </a:lnSpc>
-              <a:spcBef>
-                <a:spcPts val="0"/>
-              </a:spcBef>
-              <a:spcAft>
-                <a:spcPts val="0"/>
-              </a:spcAft>
-              <a:buNone/>
-              <a:defRPr sz="1800">
-                <a:solidFill>
-                  <a:srgbClr val="FFFFFF"/>
-                </a:solidFill>
-                <a:latin typeface="Consolas"/>
-                <a:ea typeface="Consolas"/>
-                <a:cs typeface="Consolas"/>
-              </a:defRPr>
-            </a:pPr>
-            <a:r>
-              <a:rPr sz="1800">
-                <a:solidFill>
-                  <a:srgbClr val="FFFFFF"/>
-                </a:solidFill>
-                <a:latin typeface="Consolas"/>
-                <a:ea typeface="Consolas"/>
-                <a:cs typeface="Consolas"/>
-              </a:rPr>
-              <a:t>Sign bit = 0</a:t>
-            </a:r>
-          </a:p>
-          <a:p xmlns:a="http://schemas.openxmlformats.org/drawingml/2006/main">
-            <a:pPr marL="0" indent="0">
-              <a:lnSpc>
-                <a:spcPct val="112000"/>
-              </a:lnSpc>
-              <a:spcBef>
-                <a:spcPts val="0"/>
-              </a:spcBef>
-              <a:spcAft>
-                <a:spcPts val="0"/>
-              </a:spcAft>
-              <a:buNone/>
-              <a:defRPr sz="1800">
-                <a:solidFill>
-                  <a:srgbClr val="FFFFFF"/>
-                </a:solidFill>
-                <a:latin typeface="Consolas"/>
-                <a:ea typeface="Consolas"/>
-                <a:cs typeface="Consolas"/>
-              </a:defRPr>
-            </a:pPr>
-            <a:r>
-              <a:rPr sz="1800">
-                <a:solidFill>
-                  <a:srgbClr val="FFFFFF"/>
-                </a:solidFill>
-                <a:latin typeface="Consolas"/>
-                <a:ea typeface="Consolas"/>
-                <a:cs typeface="Consolas"/>
-              </a:rPr>
-              <a:t>Stored exponent = ?</a:t>
-            </a:r>
-          </a:p>
-          <a:p xmlns:a="http://schemas.openxmlformats.org/drawingml/2006/main">
-            <a:pPr marL="0" indent="0">
-              <a:lnSpc>
-                <a:spcPct val="112000"/>
-              </a:lnSpc>
-              <a:spcBef>
-                <a:spcPts val="0"/>
-              </a:spcBef>
-              <a:spcAft>
-                <a:spcPts val="0"/>
-              </a:spcAft>
-              <a:buNone/>
-              <a:defRPr sz="1800">
-                <a:solidFill>
-                  <a:srgbClr val="FFFFFF"/>
-                </a:solidFill>
-                <a:latin typeface="Consolas"/>
-                <a:ea typeface="Consolas"/>
-                <a:cs typeface="Consolas"/>
-              </a:defRPr>
-            </a:pPr>
-            <a:r>
-              <a:rPr sz="1800">
-                <a:solidFill>
-                  <a:srgbClr val="FFFFFF"/>
-                </a:solidFill>
-                <a:latin typeface="Consolas"/>
-                <a:ea typeface="Consolas"/>
-                <a:cs typeface="Consolas"/>
-              </a:rPr>
-              <a:t>Fraction weights = ?</a:t>
-            </a:r>
-          </a:p>
-        </p:txBody>
-      </p:sp>
-      <p:sp>
-        <p:nvSpPr>
-          <p:cNvPr id="534" name="Takeaway">
-            <a:extLst xmlns:a="http://schemas.openxmlformats.org/drawingml/2006/main">
-              <a:ext uri="{FF2B5EF4-FFF2-40B4-BE49-F238E27FC236}">
-                <a16:creationId xmlns:a16="http://schemas.microsoft.com/office/drawing/2014/main" id="{AEAEA662-56BE-4933-B402-338E393AF37B}"/>
-              </a:ext>
-            </a:extLst>
-          </p:cNvPr>
-          <p:cNvSpPr>
-            <a:spLocks xmlns:a="http://schemas.openxmlformats.org/drawingml/2006/main" noGrp="1"/>
-          </p:cNvSpPr>
-          <p:nvPr/>
-        </p:nvSpPr>
-        <p:spPr>
-          <a:xfrm xmlns:a="http://schemas.openxmlformats.org/drawingml/2006/main">
-            <a:off x="393668" y="5715000"/>
-            <a:ext cx="11404283" cy="466725"/>
-          </a:xfrm>
-          <a:prstGeom xmlns:a="http://schemas.openxmlformats.org/drawingml/2006/main" prst="rect">
-            <a:avLst/>
-          </a:prstGeom>
-          <a:noFill xmlns:a="http://schemas.openxmlformats.org/drawingml/2006/main"/>
-          <a:ln xmlns:a="http://schemas.openxmlformats.org/drawingml/2006/main" w="0">
-            <a:noFill/>
-          </a:ln>
-        </p:spPr>
-        <p:txBody>
-          <a:bodyPr xmlns:a="http://schemas.openxmlformats.org/drawingml/2006/main" lIns="0" tIns="0" rIns="0" bIns="0" anchor="t">
-            <a:noAutofit/>
-          </a:bodyPr>
-          <a:lstStyle xmlns:a="http://schemas.openxmlformats.org/drawingml/2006/main">
-            <a:defPPr>
-              <a:defRPr sz="1350">
-                <a:solidFill>
-                  <a:srgbClr val="CCCCCC"/>
-                </a:solidFill>
-                <a:latin typeface="Arial"/>
-                <a:ea typeface="Arial"/>
-                <a:cs typeface="Arial"/>
-              </a:defRPr>
-            </a:defPPr>
-          </a:lstStyle>
-          <a:p xmlns:a="http://schemas.openxmlformats.org/drawingml/2006/main">
-            <a:pPr marL="0" indent="0">
-              <a:lnSpc>
-                <a:spcPct val="112000"/>
-              </a:lnSpc>
-              <a:spcBef>
-                <a:spcPts val="0"/>
-              </a:spcBef>
-              <a:spcAft>
-                <a:spcPts val="0"/>
-              </a:spcAft>
-              <a:buNone/>
-              <a:defRPr sz="1350">
-                <a:solidFill>
-                  <a:srgbClr val="CCCCCC"/>
-                </a:solidFill>
-                <a:latin typeface="Arial"/>
-                <a:ea typeface="Arial"/>
-                <a:cs typeface="Arial"/>
-              </a:defRPr>
-            </a:pPr>
-            <a:r>
-              <a:rPr sz="1350">
-                <a:solidFill>
-                  <a:srgbClr val="CCCCCC"/>
-                </a:solidFill>
-                <a:latin typeface="Arial"/>
-                <a:ea typeface="Arial"/>
-                <a:cs typeface="Arial"/>
-              </a:rPr>
-              <a:t>Fraction bit 22 has weight 1/2; bit 21 has weight 1/4; bit 20 has weight 1/8.</a:t>
+              <a:t>Floating-point values</a:t>
             </a:r>
           </a:p>
         </p:txBody>
@@ -7417,7 +5435,7 @@
                 <a:ea typeface="Arial"/>
                 <a:cs typeface="Arial"/>
               </a:rPr>
-              <a:t>11</a:t>
+              <a:t>10</a:t>
             </a:r>
           </a:p>
         </p:txBody>
@@ -8340,3324 +6358,6 @@
                 <a:cs typeface="Arial"/>
               </a:rPr>
               <a:t>Normalization moves the binary point. It does not discard the fractional part.</a:t>
-            </a:r>
-          </a:p>
-        </p:txBody>
-      </p:sp>
-    </p:spTree>
-    <p:extLst>
-      <p:ext uri="{BB962C8B-B14F-4D97-AF65-F5344CB8AC3E}">
-        <p14:creationId xmlns:p14="http://schemas.microsoft.com/office/powerpoint/2010/main" val="3667182145"/>
-      </p:ext>
-    </p:extLst>
-  </p:cSld>
-</p:sld>
-</file>
-
-<file path=ppt/slides/slide12.xml><?xml version="1.0" encoding="utf-8"?>
-<p:sld xmlns:p="http://schemas.openxmlformats.org/presentationml/2006/main">
-  <p:cSld>
-    <p:spTree>
-      <p:nvGrpSpPr>
-        <p:cNvPr id="1" name=""/>
-        <p:cNvGrpSpPr/>
-        <p:nvPr/>
-      </p:nvGrpSpPr>
-      <p:grpSpPr>
-        <a:xfrm xmlns:a="http://schemas.openxmlformats.org/drawingml/2006/main"/>
-      </p:grpSpPr>
-      <p:sp>
-        <p:nvSpPr>
-          <p:cNvPr id="3" name="Footer Placeholder 2">
-            <a:extLst xmlns:a="http://schemas.openxmlformats.org/drawingml/2006/main">
-              <a:ext uri="{FF2B5EF4-FFF2-40B4-BE49-F238E27FC236}">
-                <a16:creationId xmlns:a16="http://schemas.microsoft.com/office/drawing/2014/main" id="{39EA4C82-C623-0196-4A95-876ADF5DEE92}"/>
-              </a:ext>
-            </a:extLst>
-          </p:cNvPr>
-          <p:cNvSpPr>
-            <a:spLocks xmlns:a="http://schemas.openxmlformats.org/drawingml/2006/main" noGrp="1"/>
-          </p:cNvSpPr>
-          <p:nvPr>
-            <p:ph type="ftr" idx="3"/>
-          </p:nvPr>
-        </p:nvSpPr>
-        <p:spPr>
-          <a:xfrm xmlns:a="http://schemas.openxmlformats.org/drawingml/2006/main">
-            <a:off x="393700" y="6279952"/>
-            <a:ext cx="3568700" cy="241240"/>
-          </a:xfrm>
-        </p:spPr>
-        <p:txBody>
-          <a:bodyPr xmlns:a="http://schemas.openxmlformats.org/drawingml/2006/main" lIns="0" tIns="0" rIns="0" bIns="0" anchor="t">
-            <a:noAutofit/>
-          </a:bodyPr>
-          <a:lstStyle xmlns:a="http://schemas.openxmlformats.org/drawingml/2006/main">
-            <a:defPPr>
-              <a:defRPr sz="1125">
-                <a:solidFill>
-                  <a:srgbClr val="FFFFFF"/>
-                </a:solidFill>
-                <a:latin typeface="Arial"/>
-                <a:ea typeface="Arial"/>
-                <a:cs typeface="Arial"/>
-              </a:defRPr>
-            </a:defPPr>
-          </a:lstStyle>
-          <a:p xmlns:a="http://schemas.openxmlformats.org/drawingml/2006/main">
-            <a:pPr marL="0" indent="0">
-              <a:lnSpc>
-                <a:spcPct val="112000"/>
-              </a:lnSpc>
-              <a:spcBef>
-                <a:spcPts val="0"/>
-              </a:spcBef>
-              <a:spcAft>
-                <a:spcPts val="0"/>
-              </a:spcAft>
-              <a:buNone/>
-              <a:defRPr sz="1125">
-                <a:solidFill>
-                  <a:srgbClr val="FFFFFF"/>
-                </a:solidFill>
-                <a:latin typeface="Arial"/>
-                <a:ea typeface="Arial"/>
-                <a:cs typeface="Arial"/>
-              </a:defRPr>
-            </a:pPr>
-            <a:r>
-              <a:rPr sz="1125">
-                <a:solidFill>
-                  <a:srgbClr val="FFFFFF"/>
-                </a:solidFill>
-                <a:latin typeface="Arial"/>
-                <a:ea typeface="Arial"/>
-                <a:cs typeface="Arial"/>
-              </a:rPr>
-              <a:t>CS 211 · Recitation 06</a:t>
-            </a:r>
-          </a:p>
-        </p:txBody>
-      </p:sp>
-      <p:sp>
-        <p:nvSpPr>
-          <p:cNvPr id="532" name="Google Shape;532;p58">
-            <a:extLst xmlns:a="http://schemas.openxmlformats.org/drawingml/2006/main">
-              <a:ext uri="{FF2B5EF4-FFF2-40B4-BE49-F238E27FC236}">
-                <a16:creationId xmlns:a16="http://schemas.microsoft.com/office/drawing/2014/main" id="{1BCBE750-7048-686D-1472-52C53362D6CD}"/>
-              </a:ext>
-            </a:extLst>
-          </p:cNvPr>
-          <p:cNvSpPr>
-            <a:spLocks xmlns:a="http://schemas.openxmlformats.org/drawingml/2006/main" noGrp="1"/>
-          </p:cNvSpPr>
-          <p:nvPr>
-            <p:ph type="sldNum" idx="4"/>
-          </p:nvPr>
-        </p:nvSpPr>
-        <p:spPr>
-          <a:xfrm xmlns:a="http://schemas.openxmlformats.org/drawingml/2006/main">
-            <a:off x="11279332" y="6279294"/>
-            <a:ext cx="518968" cy="241240"/>
-          </a:xfrm>
-        </p:spPr>
-        <p:txBody>
-          <a:bodyPr xmlns:a="http://schemas.openxmlformats.org/drawingml/2006/main" spcFirstLastPara="1" vert="horz" wrap="square" lIns="0" tIns="0" rIns="0" bIns="0" anchor="t">
-            <a:noAutofit/>
-          </a:bodyPr>
-          <a:lstStyle xmlns:a="http://schemas.openxmlformats.org/drawingml/2006/main">
-            <a:defPPr>
-              <a:defRPr sz="1125">
-                <a:solidFill>
-                  <a:srgbClr val="FFFFFF"/>
-                </a:solidFill>
-                <a:latin typeface="Arial"/>
-                <a:ea typeface="Arial"/>
-                <a:cs typeface="Arial"/>
-              </a:defRPr>
-            </a:defPPr>
-          </a:lstStyle>
-          <a:p xmlns:a="http://schemas.openxmlformats.org/drawingml/2006/main">
-            <a:pPr marL="0" indent="0">
-              <a:lnSpc>
-                <a:spcPct val="112000"/>
-              </a:lnSpc>
-              <a:spcBef>
-                <a:spcPts val="0"/>
-              </a:spcBef>
-              <a:spcAft>
-                <a:spcPts val="0"/>
-              </a:spcAft>
-              <a:buNone/>
-              <a:defRPr sz="1125">
-                <a:solidFill>
-                  <a:srgbClr val="FFFFFF"/>
-                </a:solidFill>
-                <a:latin typeface="Arial"/>
-                <a:ea typeface="Arial"/>
-                <a:cs typeface="Arial"/>
-              </a:defRPr>
-            </a:pPr>
-            <a:r>
-              <a:rPr sz="1125">
-                <a:solidFill>
-                  <a:srgbClr val="FFFFFF"/>
-                </a:solidFill>
-                <a:latin typeface="Arial"/>
-                <a:ea typeface="Arial"/>
-                <a:cs typeface="Arial"/>
-              </a:rPr>
-              <a:t>12</a:t>
-            </a:r>
-          </a:p>
-        </p:txBody>
-      </p:sp>
-      <p:sp>
-        <p:nvSpPr>
-          <p:cNvPr id="533" name="Google Shape;533;p58">
-            <a:extLst xmlns:a="http://schemas.openxmlformats.org/drawingml/2006/main">
-              <a:ext uri="{FF2B5EF4-FFF2-40B4-BE49-F238E27FC236}">
-                <a16:creationId xmlns:a16="http://schemas.microsoft.com/office/drawing/2014/main" id="{1B5D55CD-1C17-7CD8-F26A-2DD65B067687}"/>
-              </a:ext>
-            </a:extLst>
-          </p:cNvPr>
-          <p:cNvSpPr>
-            <a:spLocks xmlns:a="http://schemas.openxmlformats.org/drawingml/2006/main" noGrp="1"/>
-          </p:cNvSpPr>
-          <p:nvPr>
-            <p:ph type="title" idx="0"/>
-          </p:nvPr>
-        </p:nvSpPr>
-        <p:spPr>
-          <a:xfrm xmlns:a="http://schemas.openxmlformats.org/drawingml/2006/main">
-            <a:off x="393700" y="344008"/>
-            <a:ext cx="11404600" cy="1047491"/>
-          </a:xfrm>
-        </p:spPr>
-        <p:txBody>
-          <a:bodyPr xmlns:a="http://schemas.openxmlformats.org/drawingml/2006/main" spcFirstLastPara="1" vert="horz" wrap="square" lIns="0" tIns="0" rIns="0" bIns="0" anchor="t">
-            <a:noAutofit/>
-          </a:bodyPr>
-          <a:lstStyle xmlns:a="http://schemas.openxmlformats.org/drawingml/2006/main">
-            <a:defPPr>
-              <a:defRPr sz="3150">
-                <a:solidFill>
-                  <a:srgbClr val="FFFFFF"/>
-                </a:solidFill>
-                <a:latin typeface="Arial"/>
-                <a:ea typeface="Arial"/>
-                <a:cs typeface="Arial"/>
-              </a:defRPr>
-            </a:defPPr>
-          </a:lstStyle>
-          <a:p xmlns:a="http://schemas.openxmlformats.org/drawingml/2006/main">
-            <a:pPr marL="0" indent="0">
-              <a:lnSpc>
-                <a:spcPct val="112000"/>
-              </a:lnSpc>
-              <a:spcBef>
-                <a:spcPts val="0"/>
-              </a:spcBef>
-              <a:spcAft>
-                <a:spcPts val="0"/>
-              </a:spcAft>
-              <a:buNone/>
-              <a:defRPr sz="3150">
-                <a:solidFill>
-                  <a:srgbClr val="FFFFFF"/>
-                </a:solidFill>
-                <a:latin typeface="Arial"/>
-                <a:ea typeface="Arial"/>
-                <a:cs typeface="Arial"/>
-              </a:defRPr>
-            </a:pPr>
-            <a:r>
-              <a:rPr sz="3150">
-                <a:solidFill>
-                  <a:srgbClr val="FFFFFF"/>
-                </a:solidFill>
-                <a:latin typeface="Arial"/>
-                <a:ea typeface="Arial"/>
-                <a:cs typeface="Arial"/>
-              </a:rPr>
-              <a:t>Zero, subnormals, infinity, and NaN</a:t>
-            </a:r>
-          </a:p>
-        </p:txBody>
-      </p:sp>
-      <p:sp>
-        <p:nvSpPr>
-          <p:cNvPr id="7" name="Google Shape;534;p58">
-            <a:extLst xmlns:a="http://schemas.openxmlformats.org/drawingml/2006/main">
-              <a:ext uri="{FF2B5EF4-FFF2-40B4-BE49-F238E27FC236}">
-                <a16:creationId xmlns:a16="http://schemas.microsoft.com/office/drawing/2014/main" id="{3A923FEE-B8D2-CD3A-ABBD-21770B40AA24}"/>
-              </a:ext>
-            </a:extLst>
-          </p:cNvPr>
-          <p:cNvSpPr>
-            <a:spLocks xmlns:a="http://schemas.openxmlformats.org/drawingml/2006/main" noGrp="1"/>
-          </p:cNvSpPr>
-          <p:nvPr/>
-        </p:nvSpPr>
-        <p:spPr>
-          <a:xfrm xmlns:a="http://schemas.openxmlformats.org/drawingml/2006/main">
-            <a:off x="393700" y="2031999"/>
-            <a:ext cx="5537200" cy="3534787"/>
-          </a:xfrm>
-          <a:prstGeom xmlns:a="http://schemas.openxmlformats.org/drawingml/2006/main" prst="rect">
-            <a:avLst/>
-          </a:prstGeom>
-        </p:spPr>
-        <p:txBody>
-          <a:bodyPr xmlns:a="http://schemas.openxmlformats.org/drawingml/2006/main" spcFirstLastPara="1" vert="horz" wrap="square" lIns="0" tIns="0" rIns="0" bIns="0" anchor="t">
-            <a:noAutofit/>
-          </a:bodyPr>
-          <a:lstStyle xmlns:a="http://schemas.openxmlformats.org/drawingml/2006/main">
-            <a:defPPr>
-              <a:defRPr sz="1875">
-                <a:solidFill>
-                  <a:srgbClr val="FFFFFF"/>
-                </a:solidFill>
-                <a:latin typeface="Arial"/>
-                <a:ea typeface="Arial"/>
-                <a:cs typeface="Arial"/>
-              </a:defRPr>
-            </a:defPPr>
-            <a:lvl1pPr marL="228600" indent="-228600" algn="l" defTabSz="914400">
-              <a:lnSpc>
-                <a:spcPct val="90000"/>
-              </a:lnSpc>
-              <a:spcBef>
-                <a:spcPts val="1000"/>
-              </a:spcBef>
-              <a:buFont typeface="Arial"/>
-              <a:buChar char="•"/>
-              <a:defRPr sz="2400" kern="1200">
-                <a:solidFill>
-                  <a:schemeClr val="tx1"/>
-                </a:solidFill>
-                <a:latin typeface="+mn-lt"/>
-                <a:ea typeface="+mn-lt"/>
-                <a:cs typeface="+mn-lt"/>
-              </a:defRPr>
-            </a:lvl1pPr>
-            <a:lvl2pPr marL="685800" indent="-228600" algn="l" defTabSz="914400">
-              <a:lnSpc>
-                <a:spcPct val="90000"/>
-              </a:lnSpc>
-              <a:spcBef>
-                <a:spcPts val="500"/>
-              </a:spcBef>
-              <a:buFont typeface="Arial"/>
-              <a:buChar char="•"/>
-              <a:defRPr sz="2000" kern="1200">
-                <a:solidFill>
-                  <a:schemeClr val="tx1"/>
-                </a:solidFill>
-                <a:latin typeface="+mn-lt"/>
-                <a:ea typeface="+mn-lt"/>
-                <a:cs typeface="+mn-lt"/>
-              </a:defRPr>
-            </a:lvl2pPr>
-            <a:lvl3pPr marL="1143000" indent="-228600" algn="l" defTabSz="914400">
-              <a:lnSpc>
-                <a:spcPct val="90000"/>
-              </a:lnSpc>
-              <a:spcBef>
-                <a:spcPts val="500"/>
-              </a:spcBef>
-              <a:buFont typeface="Arial"/>
-              <a:buChar char="•"/>
-              <a:defRPr sz="1800" kern="1200">
-                <a:solidFill>
-                  <a:schemeClr val="tx1"/>
-                </a:solidFill>
-                <a:latin typeface="+mn-lt"/>
-                <a:ea typeface="+mn-lt"/>
-                <a:cs typeface="+mn-lt"/>
-              </a:defRPr>
-            </a:lvl3pPr>
-            <a:lvl4pPr marL="1600200" indent="-228600" algn="l" defTabSz="914400">
-              <a:lnSpc>
-                <a:spcPct val="90000"/>
-              </a:lnSpc>
-              <a:spcBef>
-                <a:spcPts val="500"/>
-              </a:spcBef>
-              <a:buFont typeface="Arial"/>
-              <a:buChar char="•"/>
-              <a:defRPr sz="1800" kern="1200">
-                <a:solidFill>
-                  <a:schemeClr val="tx1"/>
-                </a:solidFill>
-                <a:latin typeface="+mn-lt"/>
-                <a:ea typeface="+mn-lt"/>
-                <a:cs typeface="+mn-lt"/>
-              </a:defRPr>
-            </a:lvl4pPr>
-            <a:lvl5pPr marL="2057400" indent="-228600" algn="l" defTabSz="914400">
-              <a:lnSpc>
-                <a:spcPct val="90000"/>
-              </a:lnSpc>
-              <a:spcBef>
-                <a:spcPts val="500"/>
-              </a:spcBef>
-              <a:buFont typeface="Arial"/>
-              <a:buChar char="•"/>
-              <a:defRPr sz="1800" kern="1200">
-                <a:solidFill>
-                  <a:schemeClr val="tx1"/>
-                </a:solidFill>
-                <a:latin typeface="+mn-lt"/>
-                <a:ea typeface="+mn-lt"/>
-                <a:cs typeface="+mn-lt"/>
-              </a:defRPr>
-            </a:lvl5pPr>
-            <a:lvl6pPr marL="2514600" indent="-228600" algn="l" defTabSz="914400">
-              <a:lnSpc>
-                <a:spcPct val="90000"/>
-              </a:lnSpc>
-              <a:spcBef>
-                <a:spcPts val="500"/>
-              </a:spcBef>
-              <a:buFont typeface="Arial"/>
-              <a:buChar char="•"/>
-              <a:defRPr sz="1800" kern="1200">
-                <a:solidFill>
-                  <a:schemeClr val="tx1"/>
-                </a:solidFill>
-                <a:latin typeface="+mn-lt"/>
-                <a:ea typeface="+mn-lt"/>
-                <a:cs typeface="+mn-lt"/>
-              </a:defRPr>
-            </a:lvl6pPr>
-            <a:lvl7pPr marL="2971800" indent="-228600" algn="l" defTabSz="914400">
-              <a:lnSpc>
-                <a:spcPct val="90000"/>
-              </a:lnSpc>
-              <a:spcBef>
-                <a:spcPts val="500"/>
-              </a:spcBef>
-              <a:buFont typeface="Arial"/>
-              <a:buChar char="•"/>
-              <a:defRPr sz="1800" kern="1200">
-                <a:solidFill>
-                  <a:schemeClr val="tx1"/>
-                </a:solidFill>
-                <a:latin typeface="+mn-lt"/>
-                <a:ea typeface="+mn-lt"/>
-                <a:cs typeface="+mn-lt"/>
-              </a:defRPr>
-            </a:lvl7pPr>
-            <a:lvl8pPr marL="3429000" indent="-228600" algn="l" defTabSz="914400">
-              <a:lnSpc>
-                <a:spcPct val="90000"/>
-              </a:lnSpc>
-              <a:spcBef>
-                <a:spcPts val="500"/>
-              </a:spcBef>
-              <a:buFont typeface="Arial"/>
-              <a:buChar char="•"/>
-              <a:defRPr sz="1800" kern="1200">
-                <a:solidFill>
-                  <a:schemeClr val="tx1"/>
-                </a:solidFill>
-                <a:latin typeface="+mn-lt"/>
-                <a:ea typeface="+mn-lt"/>
-                <a:cs typeface="+mn-lt"/>
-              </a:defRPr>
-            </a:lvl8pPr>
-            <a:lvl9pPr marL="3886200" indent="-228600" algn="l" defTabSz="914400">
-              <a:lnSpc>
-                <a:spcPct val="90000"/>
-              </a:lnSpc>
-              <a:spcBef>
-                <a:spcPts val="500"/>
-              </a:spcBef>
-              <a:buFont typeface="Arial"/>
-              <a:buChar char="•"/>
-              <a:defRPr sz="1800" kern="1200">
-                <a:solidFill>
-                  <a:schemeClr val="tx1"/>
-                </a:solidFill>
-                <a:latin typeface="+mn-lt"/>
-                <a:ea typeface="+mn-lt"/>
-                <a:cs typeface="+mn-lt"/>
-              </a:defRPr>
-            </a:lvl9pPr>
-          </a:lstStyle>
-          <a:p xmlns:a="http://schemas.openxmlformats.org/drawingml/2006/main">
-            <a:pPr marL="0" indent="0">
-              <a:lnSpc>
-                <a:spcPct val="112000"/>
-              </a:lnSpc>
-              <a:spcBef>
-                <a:spcPts val="0"/>
-              </a:spcBef>
-              <a:spcAft>
-                <a:spcPts val="0"/>
-              </a:spcAft>
-              <a:buNone/>
-              <a:defRPr sz="1875">
-                <a:solidFill>
-                  <a:srgbClr val="FFFFFF"/>
-                </a:solidFill>
-                <a:latin typeface="Arial"/>
-                <a:ea typeface="Arial"/>
-                <a:cs typeface="Arial"/>
-              </a:defRPr>
-            </a:pPr>
-            <a:r>
-              <a:rPr sz="1875">
-                <a:solidFill>
-                  <a:srgbClr val="FFFFFF"/>
-                </a:solidFill>
-                <a:latin typeface="Arial"/>
-                <a:ea typeface="Arial"/>
-                <a:cs typeface="Arial"/>
-              </a:rPr>
-              <a:t>Check the exponent field before using a formula.</a:t>
-            </a:r>
-          </a:p>
-          <a:p xmlns:a="http://schemas.openxmlformats.org/drawingml/2006/main">
-            <a:pPr marL="0" indent="0">
-              <a:lnSpc>
-                <a:spcPct val="112000"/>
-              </a:lnSpc>
-              <a:spcBef>
-                <a:spcPts val="0"/>
-              </a:spcBef>
-              <a:spcAft>
-                <a:spcPts val="0"/>
-              </a:spcAft>
-              <a:buNone/>
-            </a:pPr>
-            <a:r>
-              <a:t/>
-            </a:r>
-          </a:p>
-          <a:p xmlns:a="http://schemas.openxmlformats.org/drawingml/2006/main">
-            <a:pPr marL="0" indent="0">
-              <a:lnSpc>
-                <a:spcPct val="112000"/>
-              </a:lnSpc>
-              <a:spcBef>
-                <a:spcPts val="0"/>
-              </a:spcBef>
-              <a:spcAft>
-                <a:spcPts val="0"/>
-              </a:spcAft>
-              <a:buNone/>
-              <a:defRPr sz="1875">
-                <a:solidFill>
-                  <a:srgbClr val="FFFFFF"/>
-                </a:solidFill>
-                <a:latin typeface="Arial"/>
-                <a:ea typeface="Arial"/>
-                <a:cs typeface="Arial"/>
-              </a:defRPr>
-            </a:pPr>
-            <a:r>
-              <a:rPr sz="1875">
-                <a:solidFill>
-                  <a:srgbClr val="FFFFFF"/>
-                </a:solidFill>
-                <a:latin typeface="Arial"/>
-                <a:ea typeface="Arial"/>
-                <a:cs typeface="Arial"/>
-              </a:rPr>
-              <a:t>A zero exponent has no implied leading 1. Its scale uses 1 − bias.</a:t>
-            </a:r>
-          </a:p>
-          <a:p xmlns:a="http://schemas.openxmlformats.org/drawingml/2006/main">
-            <a:pPr marL="0" indent="0">
-              <a:lnSpc>
-                <a:spcPct val="112000"/>
-              </a:lnSpc>
-              <a:spcBef>
-                <a:spcPts val="0"/>
-              </a:spcBef>
-              <a:spcAft>
-                <a:spcPts val="0"/>
-              </a:spcAft>
-              <a:buNone/>
-            </a:pPr>
-            <a:r>
-              <a:t/>
-            </a:r>
-          </a:p>
-          <a:p xmlns:a="http://schemas.openxmlformats.org/drawingml/2006/main">
-            <a:pPr marL="0" indent="0">
-              <a:lnSpc>
-                <a:spcPct val="112000"/>
-              </a:lnSpc>
-              <a:spcBef>
-                <a:spcPts val="0"/>
-              </a:spcBef>
-              <a:spcAft>
-                <a:spcPts val="0"/>
-              </a:spcAft>
-              <a:buNone/>
-              <a:defRPr sz="1875">
-                <a:solidFill>
-                  <a:srgbClr val="FFFFFF"/>
-                </a:solidFill>
-                <a:latin typeface="Arial"/>
-                <a:ea typeface="Arial"/>
-                <a:cs typeface="Arial"/>
-              </a:defRPr>
-            </a:pPr>
-            <a:r>
-              <a:rPr sz="1875">
-                <a:solidFill>
-                  <a:srgbClr val="FFFFFF"/>
-                </a:solidFill>
-                <a:latin typeface="Arial"/>
-                <a:ea typeface="Arial"/>
-                <a:cs typeface="Arial"/>
-              </a:rPr>
-              <a:t>An all-ones exponent represents infinity or NaN, depending on the fraction.</a:t>
-            </a:r>
-          </a:p>
-        </p:txBody>
-      </p:sp>
-      <p:sp>
-        <p:nvSpPr>
-          <p:cNvPr id="8" name="Content Placeholder 3">
-            <a:extLst xmlns:a="http://schemas.openxmlformats.org/drawingml/2006/main">
-              <a:ext uri="{FF2B5EF4-FFF2-40B4-BE49-F238E27FC236}">
-                <a16:creationId xmlns:a16="http://schemas.microsoft.com/office/drawing/2014/main" id="{2EE8F343-A95F-2AAA-FE9E-A6C31E298DF7}"/>
-              </a:ext>
-            </a:extLst>
-          </p:cNvPr>
-          <p:cNvSpPr>
-            <a:spLocks xmlns:a="http://schemas.openxmlformats.org/drawingml/2006/main" noGrp="1"/>
-          </p:cNvSpPr>
-          <p:nvPr/>
-        </p:nvSpPr>
-        <p:spPr>
-          <a:xfrm xmlns:a="http://schemas.openxmlformats.org/drawingml/2006/main">
-            <a:off x="6256618" y="2031999"/>
-            <a:ext cx="5537200" cy="3534787"/>
-          </a:xfrm>
-          <a:prstGeom xmlns:a="http://schemas.openxmlformats.org/drawingml/2006/main" prst="rect">
-            <a:avLst/>
-          </a:prstGeom>
-        </p:spPr>
-        <p:txBody>
-          <a:bodyPr xmlns:a="http://schemas.openxmlformats.org/drawingml/2006/main" lIns="0" tIns="0" rIns="0" bIns="0" anchor="t">
-            <a:noAutofit/>
-          </a:bodyPr>
-          <a:lstStyle xmlns:a="http://schemas.openxmlformats.org/drawingml/2006/main">
-            <a:defPPr>
-              <a:defRPr sz="1800">
-                <a:solidFill>
-                  <a:srgbClr val="FFFFFF"/>
-                </a:solidFill>
-                <a:latin typeface="Consolas"/>
-                <a:ea typeface="Consolas"/>
-                <a:cs typeface="Consolas"/>
-              </a:defRPr>
-            </a:defPPr>
-            <a:lvl1pPr marL="228600" indent="-228600" algn="l" defTabSz="914400">
-              <a:lnSpc>
-                <a:spcPct val="90000"/>
-              </a:lnSpc>
-              <a:spcBef>
-                <a:spcPts val="1000"/>
-              </a:spcBef>
-              <a:buFont typeface="Arial"/>
-              <a:buChar char="•"/>
-              <a:defRPr sz="2400" kern="1200">
-                <a:solidFill>
-                  <a:schemeClr val="tx1"/>
-                </a:solidFill>
-                <a:latin typeface="+mn-lt"/>
-                <a:ea typeface="+mn-lt"/>
-                <a:cs typeface="+mn-lt"/>
-              </a:defRPr>
-            </a:lvl1pPr>
-            <a:lvl2pPr marL="685800" indent="-228600" algn="l" defTabSz="914400">
-              <a:lnSpc>
-                <a:spcPct val="90000"/>
-              </a:lnSpc>
-              <a:spcBef>
-                <a:spcPts val="500"/>
-              </a:spcBef>
-              <a:buFont typeface="Arial"/>
-              <a:buChar char="•"/>
-              <a:defRPr sz="2000" kern="1200">
-                <a:solidFill>
-                  <a:schemeClr val="tx1"/>
-                </a:solidFill>
-                <a:latin typeface="+mn-lt"/>
-                <a:ea typeface="+mn-lt"/>
-                <a:cs typeface="+mn-lt"/>
-              </a:defRPr>
-            </a:lvl2pPr>
-            <a:lvl3pPr marL="1143000" indent="-228600" algn="l" defTabSz="914400">
-              <a:lnSpc>
-                <a:spcPct val="90000"/>
-              </a:lnSpc>
-              <a:spcBef>
-                <a:spcPts val="500"/>
-              </a:spcBef>
-              <a:buFont typeface="Arial"/>
-              <a:buChar char="•"/>
-              <a:defRPr sz="1800" kern="1200">
-                <a:solidFill>
-                  <a:schemeClr val="tx1"/>
-                </a:solidFill>
-                <a:latin typeface="+mn-lt"/>
-                <a:ea typeface="+mn-lt"/>
-                <a:cs typeface="+mn-lt"/>
-              </a:defRPr>
-            </a:lvl3pPr>
-            <a:lvl4pPr marL="1600200" indent="-228600" algn="l" defTabSz="914400">
-              <a:lnSpc>
-                <a:spcPct val="90000"/>
-              </a:lnSpc>
-              <a:spcBef>
-                <a:spcPts val="500"/>
-              </a:spcBef>
-              <a:buFont typeface="Arial"/>
-              <a:buChar char="•"/>
-              <a:defRPr sz="1800" kern="1200">
-                <a:solidFill>
-                  <a:schemeClr val="tx1"/>
-                </a:solidFill>
-                <a:latin typeface="+mn-lt"/>
-                <a:ea typeface="+mn-lt"/>
-                <a:cs typeface="+mn-lt"/>
-              </a:defRPr>
-            </a:lvl4pPr>
-            <a:lvl5pPr marL="2057400" indent="-228600" algn="l" defTabSz="914400">
-              <a:lnSpc>
-                <a:spcPct val="90000"/>
-              </a:lnSpc>
-              <a:spcBef>
-                <a:spcPts val="500"/>
-              </a:spcBef>
-              <a:buFont typeface="Arial"/>
-              <a:buChar char="•"/>
-              <a:defRPr sz="1800" kern="1200">
-                <a:solidFill>
-                  <a:schemeClr val="tx1"/>
-                </a:solidFill>
-                <a:latin typeface="+mn-lt"/>
-                <a:ea typeface="+mn-lt"/>
-                <a:cs typeface="+mn-lt"/>
-              </a:defRPr>
-            </a:lvl5pPr>
-            <a:lvl6pPr marL="2514600" indent="-228600" algn="l" defTabSz="914400">
-              <a:lnSpc>
-                <a:spcPct val="90000"/>
-              </a:lnSpc>
-              <a:spcBef>
-                <a:spcPts val="500"/>
-              </a:spcBef>
-              <a:buFont typeface="Arial"/>
-              <a:buChar char="•"/>
-              <a:defRPr sz="1800" kern="1200">
-                <a:solidFill>
-                  <a:schemeClr val="tx1"/>
-                </a:solidFill>
-                <a:latin typeface="+mn-lt"/>
-                <a:ea typeface="+mn-lt"/>
-                <a:cs typeface="+mn-lt"/>
-              </a:defRPr>
-            </a:lvl6pPr>
-            <a:lvl7pPr marL="2971800" indent="-228600" algn="l" defTabSz="914400">
-              <a:lnSpc>
-                <a:spcPct val="90000"/>
-              </a:lnSpc>
-              <a:spcBef>
-                <a:spcPts val="500"/>
-              </a:spcBef>
-              <a:buFont typeface="Arial"/>
-              <a:buChar char="•"/>
-              <a:defRPr sz="1800" kern="1200">
-                <a:solidFill>
-                  <a:schemeClr val="tx1"/>
-                </a:solidFill>
-                <a:latin typeface="+mn-lt"/>
-                <a:ea typeface="+mn-lt"/>
-                <a:cs typeface="+mn-lt"/>
-              </a:defRPr>
-            </a:lvl7pPr>
-            <a:lvl8pPr marL="3429000" indent="-228600" algn="l" defTabSz="914400">
-              <a:lnSpc>
-                <a:spcPct val="90000"/>
-              </a:lnSpc>
-              <a:spcBef>
-                <a:spcPts val="500"/>
-              </a:spcBef>
-              <a:buFont typeface="Arial"/>
-              <a:buChar char="•"/>
-              <a:defRPr sz="1800" kern="1200">
-                <a:solidFill>
-                  <a:schemeClr val="tx1"/>
-                </a:solidFill>
-                <a:latin typeface="+mn-lt"/>
-                <a:ea typeface="+mn-lt"/>
-                <a:cs typeface="+mn-lt"/>
-              </a:defRPr>
-            </a:lvl8pPr>
-            <a:lvl9pPr marL="3886200" indent="-228600" algn="l" defTabSz="914400">
-              <a:lnSpc>
-                <a:spcPct val="90000"/>
-              </a:lnSpc>
-              <a:spcBef>
-                <a:spcPts val="500"/>
-              </a:spcBef>
-              <a:buFont typeface="Arial"/>
-              <a:buChar char="•"/>
-              <a:defRPr sz="1800" kern="1200">
-                <a:solidFill>
-                  <a:schemeClr val="tx1"/>
-                </a:solidFill>
-                <a:latin typeface="+mn-lt"/>
-                <a:ea typeface="+mn-lt"/>
-                <a:cs typeface="+mn-lt"/>
-              </a:defRPr>
-            </a:lvl9pPr>
-          </a:lstStyle>
-          <a:p xmlns:a="http://schemas.openxmlformats.org/drawingml/2006/main">
-            <a:pPr marL="0" indent="0">
-              <a:lnSpc>
-                <a:spcPct val="112000"/>
-              </a:lnSpc>
-              <a:spcBef>
-                <a:spcPts val="0"/>
-              </a:spcBef>
-              <a:spcAft>
-                <a:spcPts val="0"/>
-              </a:spcAft>
-              <a:buNone/>
-              <a:defRPr sz="1800">
-                <a:solidFill>
-                  <a:srgbClr val="FFFFFF"/>
-                </a:solidFill>
-                <a:latin typeface="Consolas"/>
-                <a:ea typeface="Consolas"/>
-                <a:cs typeface="Consolas"/>
-              </a:defRPr>
-            </a:pPr>
-            <a:r>
-              <a:rPr sz="1800">
-                <a:solidFill>
-                  <a:srgbClr val="FFFFFF"/>
-                </a:solidFill>
-                <a:latin typeface="Consolas"/>
-                <a:ea typeface="Consolas"/>
-                <a:cs typeface="Consolas"/>
-              </a:rPr>
-              <a:t>Stored E    Fraction F    Meaning</a:t>
-            </a:r>
-          </a:p>
-          <a:p xmlns:a="http://schemas.openxmlformats.org/drawingml/2006/main">
-            <a:pPr marL="0" indent="0">
-              <a:lnSpc>
-                <a:spcPct val="112000"/>
-              </a:lnSpc>
-              <a:spcBef>
-                <a:spcPts val="0"/>
-              </a:spcBef>
-              <a:spcAft>
-                <a:spcPts val="0"/>
-              </a:spcAft>
-              <a:buNone/>
-              <a:defRPr sz="1800">
-                <a:solidFill>
-                  <a:srgbClr val="FFFFFF"/>
-                </a:solidFill>
-                <a:latin typeface="Consolas"/>
-                <a:ea typeface="Consolas"/>
-                <a:cs typeface="Consolas"/>
-              </a:defRPr>
-            </a:pPr>
-            <a:r>
-              <a:rPr sz="1800">
-                <a:solidFill>
-                  <a:srgbClr val="FFFFFF"/>
-                </a:solidFill>
-                <a:latin typeface="Consolas"/>
-                <a:ea typeface="Consolas"/>
-                <a:cs typeface="Consolas"/>
-              </a:rPr>
-              <a:t>0           0             ±0</a:t>
-            </a:r>
-          </a:p>
-          <a:p xmlns:a="http://schemas.openxmlformats.org/drawingml/2006/main">
-            <a:pPr marL="0" indent="0">
-              <a:lnSpc>
-                <a:spcPct val="112000"/>
-              </a:lnSpc>
-              <a:spcBef>
-                <a:spcPts val="0"/>
-              </a:spcBef>
-              <a:spcAft>
-                <a:spcPts val="0"/>
-              </a:spcAft>
-              <a:buNone/>
-              <a:defRPr sz="1800">
-                <a:solidFill>
-                  <a:srgbClr val="FFFFFF"/>
-                </a:solidFill>
-                <a:latin typeface="Consolas"/>
-                <a:ea typeface="Consolas"/>
-                <a:cs typeface="Consolas"/>
-              </a:defRPr>
-            </a:pPr>
-            <a:r>
-              <a:rPr sz="1800">
-                <a:solidFill>
-                  <a:srgbClr val="FFFFFF"/>
-                </a:solidFill>
-                <a:latin typeface="Consolas"/>
-                <a:ea typeface="Consolas"/>
-                <a:cs typeface="Consolas"/>
-              </a:rPr>
-              <a:t>0           nonzero       subnormal</a:t>
-            </a:r>
-          </a:p>
-          <a:p xmlns:a="http://schemas.openxmlformats.org/drawingml/2006/main">
-            <a:pPr marL="0" indent="0">
-              <a:lnSpc>
-                <a:spcPct val="112000"/>
-              </a:lnSpc>
-              <a:spcBef>
-                <a:spcPts val="0"/>
-              </a:spcBef>
-              <a:spcAft>
-                <a:spcPts val="0"/>
-              </a:spcAft>
-              <a:buNone/>
-              <a:defRPr sz="1800">
-                <a:solidFill>
-                  <a:srgbClr val="FFFFFF"/>
-                </a:solidFill>
-                <a:latin typeface="Consolas"/>
-                <a:ea typeface="Consolas"/>
-                <a:cs typeface="Consolas"/>
-              </a:defRPr>
-            </a:pPr>
-            <a:r>
-              <a:rPr sz="1800">
-                <a:solidFill>
-                  <a:srgbClr val="FFFFFF"/>
-                </a:solidFill>
-                <a:latin typeface="Consolas"/>
-                <a:ea typeface="Consolas"/>
-                <a:cs typeface="Consolas"/>
-              </a:rPr>
-              <a:t>1–254       any           normal</a:t>
-            </a:r>
-          </a:p>
-          <a:p xmlns:a="http://schemas.openxmlformats.org/drawingml/2006/main">
-            <a:pPr marL="0" indent="0">
-              <a:lnSpc>
-                <a:spcPct val="112000"/>
-              </a:lnSpc>
-              <a:spcBef>
-                <a:spcPts val="0"/>
-              </a:spcBef>
-              <a:spcAft>
-                <a:spcPts val="0"/>
-              </a:spcAft>
-              <a:buNone/>
-              <a:defRPr sz="1800">
-                <a:solidFill>
-                  <a:srgbClr val="FFFFFF"/>
-                </a:solidFill>
-                <a:latin typeface="Consolas"/>
-                <a:ea typeface="Consolas"/>
-                <a:cs typeface="Consolas"/>
-              </a:defRPr>
-            </a:pPr>
-            <a:r>
-              <a:rPr sz="1800">
-                <a:solidFill>
-                  <a:srgbClr val="FFFFFF"/>
-                </a:solidFill>
-                <a:latin typeface="Consolas"/>
-                <a:ea typeface="Consolas"/>
-                <a:cs typeface="Consolas"/>
-              </a:rPr>
-              <a:t>255         0             ±infinity</a:t>
-            </a:r>
-          </a:p>
-          <a:p xmlns:a="http://schemas.openxmlformats.org/drawingml/2006/main">
-            <a:pPr marL="0" indent="0">
-              <a:lnSpc>
-                <a:spcPct val="112000"/>
-              </a:lnSpc>
-              <a:spcBef>
-                <a:spcPts val="0"/>
-              </a:spcBef>
-              <a:spcAft>
-                <a:spcPts val="0"/>
-              </a:spcAft>
-              <a:buNone/>
-              <a:defRPr sz="1800">
-                <a:solidFill>
-                  <a:srgbClr val="FFFFFF"/>
-                </a:solidFill>
-                <a:latin typeface="Consolas"/>
-                <a:ea typeface="Consolas"/>
-                <a:cs typeface="Consolas"/>
-              </a:defRPr>
-            </a:pPr>
-            <a:r>
-              <a:rPr sz="1800">
-                <a:solidFill>
-                  <a:srgbClr val="FFFFFF"/>
-                </a:solidFill>
-                <a:latin typeface="Consolas"/>
-                <a:ea typeface="Consolas"/>
-                <a:cs typeface="Consolas"/>
-              </a:rPr>
-              <a:t>255         nonzero       NaN</a:t>
-            </a:r>
-          </a:p>
-          <a:p xmlns:a="http://schemas.openxmlformats.org/drawingml/2006/main">
-            <a:pPr marL="0" indent="0">
-              <a:lnSpc>
-                <a:spcPct val="112000"/>
-              </a:lnSpc>
-              <a:spcBef>
-                <a:spcPts val="0"/>
-              </a:spcBef>
-              <a:spcAft>
-                <a:spcPts val="0"/>
-              </a:spcAft>
-              <a:buNone/>
-            </a:pPr>
-            <a:r>
-              <a:t/>
-            </a:r>
-          </a:p>
-          <a:p xmlns:a="http://schemas.openxmlformats.org/drawingml/2006/main">
-            <a:pPr marL="0" indent="0">
-              <a:lnSpc>
-                <a:spcPct val="112000"/>
-              </a:lnSpc>
-              <a:spcBef>
-                <a:spcPts val="0"/>
-              </a:spcBef>
-              <a:spcAft>
-                <a:spcPts val="0"/>
-              </a:spcAft>
-              <a:buNone/>
-              <a:defRPr sz="1800">
-                <a:solidFill>
-                  <a:srgbClr val="FFFFFF"/>
-                </a:solidFill>
-                <a:latin typeface="Consolas"/>
-                <a:ea typeface="Consolas"/>
-                <a:cs typeface="Consolas"/>
-              </a:defRPr>
-            </a:pPr>
-            <a:r>
-              <a:rPr sz="1800">
-                <a:solidFill>
-                  <a:srgbClr val="FFFFFF"/>
-                </a:solidFill>
-                <a:latin typeface="Consolas"/>
-                <a:ea typeface="Consolas"/>
-                <a:cs typeface="Consolas"/>
-              </a:rPr>
-              <a:t>Subnormal magnitude:</a:t>
-            </a:r>
-          </a:p>
-          <a:p xmlns:a="http://schemas.openxmlformats.org/drawingml/2006/main">
-            <a:pPr marL="0" indent="0">
-              <a:lnSpc>
-                <a:spcPct val="112000"/>
-              </a:lnSpc>
-              <a:spcBef>
-                <a:spcPts val="0"/>
-              </a:spcBef>
-              <a:spcAft>
-                <a:spcPts val="0"/>
-              </a:spcAft>
-              <a:buNone/>
-              <a:defRPr sz="1800">
-                <a:solidFill>
-                  <a:srgbClr val="FFFFFF"/>
-                </a:solidFill>
-                <a:latin typeface="Consolas"/>
-                <a:ea typeface="Consolas"/>
-                <a:cs typeface="Consolas"/>
-              </a:defRPr>
-            </a:pPr>
-            <a:r>
-              <a:rPr sz="1800">
-                <a:solidFill>
-                  <a:srgbClr val="FFFFFF"/>
-                </a:solidFill>
-                <a:latin typeface="Consolas"/>
-                <a:ea typeface="Consolas"/>
-                <a:cs typeface="Consolas"/>
-              </a:rPr>
-              <a:t>2^(1 - 127) × F/2^23</a:t>
-            </a:r>
-          </a:p>
-        </p:txBody>
-      </p:sp>
-      <p:sp>
-        <p:nvSpPr>
-          <p:cNvPr id="534" name="Takeaway">
-            <a:extLst xmlns:a="http://schemas.openxmlformats.org/drawingml/2006/main">
-              <a:ext uri="{FF2B5EF4-FFF2-40B4-BE49-F238E27FC236}">
-                <a16:creationId xmlns:a16="http://schemas.microsoft.com/office/drawing/2014/main" id="{012F7FD1-B715-4B7F-994F-C339EE2677A8}"/>
-              </a:ext>
-            </a:extLst>
-          </p:cNvPr>
-          <p:cNvSpPr>
-            <a:spLocks xmlns:a="http://schemas.openxmlformats.org/drawingml/2006/main" noGrp="1"/>
-          </p:cNvSpPr>
-          <p:nvPr/>
-        </p:nvSpPr>
-        <p:spPr>
-          <a:xfrm xmlns:a="http://schemas.openxmlformats.org/drawingml/2006/main">
-            <a:off x="393668" y="5715000"/>
-            <a:ext cx="11404283" cy="466725"/>
-          </a:xfrm>
-          <a:prstGeom xmlns:a="http://schemas.openxmlformats.org/drawingml/2006/main" prst="rect">
-            <a:avLst/>
-          </a:prstGeom>
-          <a:noFill xmlns:a="http://schemas.openxmlformats.org/drawingml/2006/main"/>
-          <a:ln xmlns:a="http://schemas.openxmlformats.org/drawingml/2006/main" w="0">
-            <a:noFill/>
-          </a:ln>
-        </p:spPr>
-        <p:txBody>
-          <a:bodyPr xmlns:a="http://schemas.openxmlformats.org/drawingml/2006/main" lIns="0" tIns="0" rIns="0" bIns="0" anchor="t">
-            <a:noAutofit/>
-          </a:bodyPr>
-          <a:lstStyle xmlns:a="http://schemas.openxmlformats.org/drawingml/2006/main">
-            <a:defPPr>
-              <a:defRPr sz="1350">
-                <a:solidFill>
-                  <a:srgbClr val="CCCCCC"/>
-                </a:solidFill>
-                <a:latin typeface="Arial"/>
-                <a:ea typeface="Arial"/>
-                <a:cs typeface="Arial"/>
-              </a:defRPr>
-            </a:defPPr>
-          </a:lstStyle>
-          <a:p xmlns:a="http://schemas.openxmlformats.org/drawingml/2006/main">
-            <a:pPr marL="0" indent="0">
-              <a:lnSpc>
-                <a:spcPct val="112000"/>
-              </a:lnSpc>
-              <a:spcBef>
-                <a:spcPts val="0"/>
-              </a:spcBef>
-              <a:spcAft>
-                <a:spcPts val="0"/>
-              </a:spcAft>
-              <a:buNone/>
-              <a:defRPr sz="1350">
-                <a:solidFill>
-                  <a:srgbClr val="CCCCCC"/>
-                </a:solidFill>
-                <a:latin typeface="Arial"/>
-                <a:ea typeface="Arial"/>
-                <a:cs typeface="Arial"/>
-              </a:defRPr>
-            </a:pPr>
-            <a:r>
-              <a:rPr sz="1350">
-                <a:solidFill>
-                  <a:srgbClr val="CCCCCC"/>
-                </a:solidFill>
-                <a:latin typeface="Arial"/>
-                <a:ea typeface="Arial"/>
-                <a:cs typeface="Arial"/>
-              </a:rPr>
-              <a:t>A stored exponent of zero does not mean the whole number must be zero.</a:t>
-            </a:r>
-          </a:p>
-        </p:txBody>
-      </p:sp>
-    </p:spTree>
-    <p:extLst>
-      <p:ext uri="{BB962C8B-B14F-4D97-AF65-F5344CB8AC3E}">
-        <p14:creationId xmlns:p14="http://schemas.microsoft.com/office/powerpoint/2010/main" val="3667182145"/>
-      </p:ext>
-    </p:extLst>
-  </p:cSld>
-</p:sld>
-</file>
-
-<file path=ppt/slides/slide13.xml><?xml version="1.0" encoding="utf-8"?>
-<p:sld xmlns:p="http://schemas.openxmlformats.org/presentationml/2006/main">
-  <p:cSld>
-    <p:spTree>
-      <p:nvGrpSpPr>
-        <p:cNvPr id="1" name=""/>
-        <p:cNvGrpSpPr/>
-        <p:nvPr/>
-      </p:nvGrpSpPr>
-      <p:grpSpPr>
-        <a:xfrm xmlns:a="http://schemas.openxmlformats.org/drawingml/2006/main"/>
-      </p:grpSpPr>
-      <p:sp>
-        <p:nvSpPr>
-          <p:cNvPr id="3" name="Footer Placeholder 2">
-            <a:extLst xmlns:a="http://schemas.openxmlformats.org/drawingml/2006/main">
-              <a:ext uri="{FF2B5EF4-FFF2-40B4-BE49-F238E27FC236}">
-                <a16:creationId xmlns:a16="http://schemas.microsoft.com/office/drawing/2014/main" id="{39EA4C82-C623-0196-4A95-876ADF5DEE92}"/>
-              </a:ext>
-            </a:extLst>
-          </p:cNvPr>
-          <p:cNvSpPr>
-            <a:spLocks xmlns:a="http://schemas.openxmlformats.org/drawingml/2006/main" noGrp="1"/>
-          </p:cNvSpPr>
-          <p:nvPr>
-            <p:ph type="ftr" idx="3"/>
-          </p:nvPr>
-        </p:nvSpPr>
-        <p:spPr>
-          <a:xfrm xmlns:a="http://schemas.openxmlformats.org/drawingml/2006/main">
-            <a:off x="393700" y="6279952"/>
-            <a:ext cx="3568700" cy="241240"/>
-          </a:xfrm>
-        </p:spPr>
-        <p:txBody>
-          <a:bodyPr xmlns:a="http://schemas.openxmlformats.org/drawingml/2006/main" lIns="0" tIns="0" rIns="0" bIns="0" anchor="t">
-            <a:noAutofit/>
-          </a:bodyPr>
-          <a:lstStyle xmlns:a="http://schemas.openxmlformats.org/drawingml/2006/main">
-            <a:defPPr>
-              <a:defRPr sz="1125">
-                <a:solidFill>
-                  <a:srgbClr val="FFFFFF"/>
-                </a:solidFill>
-                <a:latin typeface="Arial"/>
-                <a:ea typeface="Arial"/>
-                <a:cs typeface="Arial"/>
-              </a:defRPr>
-            </a:defPPr>
-          </a:lstStyle>
-          <a:p xmlns:a="http://schemas.openxmlformats.org/drawingml/2006/main">
-            <a:pPr marL="0" indent="0">
-              <a:lnSpc>
-                <a:spcPct val="112000"/>
-              </a:lnSpc>
-              <a:spcBef>
-                <a:spcPts val="0"/>
-              </a:spcBef>
-              <a:spcAft>
-                <a:spcPts val="0"/>
-              </a:spcAft>
-              <a:buNone/>
-              <a:defRPr sz="1125">
-                <a:solidFill>
-                  <a:srgbClr val="FFFFFF"/>
-                </a:solidFill>
-                <a:latin typeface="Arial"/>
-                <a:ea typeface="Arial"/>
-                <a:cs typeface="Arial"/>
-              </a:defRPr>
-            </a:pPr>
-            <a:r>
-              <a:rPr sz="1125">
-                <a:solidFill>
-                  <a:srgbClr val="FFFFFF"/>
-                </a:solidFill>
-                <a:latin typeface="Arial"/>
-                <a:ea typeface="Arial"/>
-                <a:cs typeface="Arial"/>
-              </a:rPr>
-              <a:t>CS 211 · Recitation 06</a:t>
-            </a:r>
-          </a:p>
-        </p:txBody>
-      </p:sp>
-      <p:sp>
-        <p:nvSpPr>
-          <p:cNvPr id="532" name="Google Shape;532;p58">
-            <a:extLst xmlns:a="http://schemas.openxmlformats.org/drawingml/2006/main">
-              <a:ext uri="{FF2B5EF4-FFF2-40B4-BE49-F238E27FC236}">
-                <a16:creationId xmlns:a16="http://schemas.microsoft.com/office/drawing/2014/main" id="{1BCBE750-7048-686D-1472-52C53362D6CD}"/>
-              </a:ext>
-            </a:extLst>
-          </p:cNvPr>
-          <p:cNvSpPr>
-            <a:spLocks xmlns:a="http://schemas.openxmlformats.org/drawingml/2006/main" noGrp="1"/>
-          </p:cNvSpPr>
-          <p:nvPr>
-            <p:ph type="sldNum" idx="4"/>
-          </p:nvPr>
-        </p:nvSpPr>
-        <p:spPr>
-          <a:xfrm xmlns:a="http://schemas.openxmlformats.org/drawingml/2006/main">
-            <a:off x="11279332" y="6279294"/>
-            <a:ext cx="518968" cy="241240"/>
-          </a:xfrm>
-        </p:spPr>
-        <p:txBody>
-          <a:bodyPr xmlns:a="http://schemas.openxmlformats.org/drawingml/2006/main" spcFirstLastPara="1" vert="horz" wrap="square" lIns="0" tIns="0" rIns="0" bIns="0" anchor="t">
-            <a:noAutofit/>
-          </a:bodyPr>
-          <a:lstStyle xmlns:a="http://schemas.openxmlformats.org/drawingml/2006/main">
-            <a:defPPr>
-              <a:defRPr sz="1125">
-                <a:solidFill>
-                  <a:srgbClr val="FFFFFF"/>
-                </a:solidFill>
-                <a:latin typeface="Arial"/>
-                <a:ea typeface="Arial"/>
-                <a:cs typeface="Arial"/>
-              </a:defRPr>
-            </a:defPPr>
-          </a:lstStyle>
-          <a:p xmlns:a="http://schemas.openxmlformats.org/drawingml/2006/main">
-            <a:pPr marL="0" indent="0">
-              <a:lnSpc>
-                <a:spcPct val="112000"/>
-              </a:lnSpc>
-              <a:spcBef>
-                <a:spcPts val="0"/>
-              </a:spcBef>
-              <a:spcAft>
-                <a:spcPts val="0"/>
-              </a:spcAft>
-              <a:buNone/>
-              <a:defRPr sz="1125">
-                <a:solidFill>
-                  <a:srgbClr val="FFFFFF"/>
-                </a:solidFill>
-                <a:latin typeface="Arial"/>
-                <a:ea typeface="Arial"/>
-                <a:cs typeface="Arial"/>
-              </a:defRPr>
-            </a:pPr>
-            <a:r>
-              <a:rPr sz="1125">
-                <a:solidFill>
-                  <a:srgbClr val="FFFFFF"/>
-                </a:solidFill>
-                <a:latin typeface="Arial"/>
-                <a:ea typeface="Arial"/>
-                <a:cs typeface="Arial"/>
-              </a:rPr>
-              <a:t>13</a:t>
-            </a:r>
-          </a:p>
-        </p:txBody>
-      </p:sp>
-      <p:sp>
-        <p:nvSpPr>
-          <p:cNvPr id="533" name="Google Shape;533;p58">
-            <a:extLst xmlns:a="http://schemas.openxmlformats.org/drawingml/2006/main">
-              <a:ext uri="{FF2B5EF4-FFF2-40B4-BE49-F238E27FC236}">
-                <a16:creationId xmlns:a16="http://schemas.microsoft.com/office/drawing/2014/main" id="{1B5D55CD-1C17-7CD8-F26A-2DD65B067687}"/>
-              </a:ext>
-            </a:extLst>
-          </p:cNvPr>
-          <p:cNvSpPr>
-            <a:spLocks xmlns:a="http://schemas.openxmlformats.org/drawingml/2006/main" noGrp="1"/>
-          </p:cNvSpPr>
-          <p:nvPr>
-            <p:ph type="title" idx="0"/>
-          </p:nvPr>
-        </p:nvSpPr>
-        <p:spPr>
-          <a:xfrm xmlns:a="http://schemas.openxmlformats.org/drawingml/2006/main">
-            <a:off x="393700" y="344008"/>
-            <a:ext cx="11404600" cy="1047491"/>
-          </a:xfrm>
-        </p:spPr>
-        <p:txBody>
-          <a:bodyPr xmlns:a="http://schemas.openxmlformats.org/drawingml/2006/main" spcFirstLastPara="1" vert="horz" wrap="square" lIns="0" tIns="0" rIns="0" bIns="0" anchor="t">
-            <a:noAutofit/>
-          </a:bodyPr>
-          <a:lstStyle xmlns:a="http://schemas.openxmlformats.org/drawingml/2006/main">
-            <a:defPPr>
-              <a:defRPr sz="3150">
-                <a:solidFill>
-                  <a:srgbClr val="FFFFFF"/>
-                </a:solidFill>
-                <a:latin typeface="Arial"/>
-                <a:ea typeface="Arial"/>
-                <a:cs typeface="Arial"/>
-              </a:defRPr>
-            </a:defPPr>
-          </a:lstStyle>
-          <a:p xmlns:a="http://schemas.openxmlformats.org/drawingml/2006/main">
-            <a:pPr marL="0" indent="0">
-              <a:lnSpc>
-                <a:spcPct val="112000"/>
-              </a:lnSpc>
-              <a:spcBef>
-                <a:spcPts val="0"/>
-              </a:spcBef>
-              <a:spcAft>
-                <a:spcPts val="0"/>
-              </a:spcAft>
-              <a:buNone/>
-              <a:defRPr sz="3150">
-                <a:solidFill>
-                  <a:srgbClr val="FFFFFF"/>
-                </a:solidFill>
-                <a:latin typeface="Arial"/>
-                <a:ea typeface="Arial"/>
-                <a:cs typeface="Arial"/>
-              </a:defRPr>
-            </a:pPr>
-            <a:r>
-              <a:rPr sz="3150">
-                <a:solidFill>
-                  <a:srgbClr val="FFFFFF"/>
-                </a:solidFill>
-                <a:latin typeface="Arial"/>
-                <a:ea typeface="Arial"/>
-                <a:cs typeface="Arial"/>
-              </a:rPr>
-              <a:t>Floating-point register families</a:t>
-            </a:r>
-          </a:p>
-        </p:txBody>
-      </p:sp>
-      <p:sp>
-        <p:nvSpPr>
-          <p:cNvPr id="7" name="Google Shape;534;p58">
-            <a:extLst xmlns:a="http://schemas.openxmlformats.org/drawingml/2006/main">
-              <a:ext uri="{FF2B5EF4-FFF2-40B4-BE49-F238E27FC236}">
-                <a16:creationId xmlns:a16="http://schemas.microsoft.com/office/drawing/2014/main" id="{3A923FEE-B8D2-CD3A-ABBD-21770B40AA24}"/>
-              </a:ext>
-            </a:extLst>
-          </p:cNvPr>
-          <p:cNvSpPr>
-            <a:spLocks xmlns:a="http://schemas.openxmlformats.org/drawingml/2006/main" noGrp="1"/>
-          </p:cNvSpPr>
-          <p:nvPr/>
-        </p:nvSpPr>
-        <p:spPr>
-          <a:xfrm xmlns:a="http://schemas.openxmlformats.org/drawingml/2006/main">
-            <a:off x="393700" y="2031999"/>
-            <a:ext cx="5537200" cy="3534787"/>
-          </a:xfrm>
-          <a:prstGeom xmlns:a="http://schemas.openxmlformats.org/drawingml/2006/main" prst="rect">
-            <a:avLst/>
-          </a:prstGeom>
-        </p:spPr>
-        <p:txBody>
-          <a:bodyPr xmlns:a="http://schemas.openxmlformats.org/drawingml/2006/main" spcFirstLastPara="1" vert="horz" wrap="square" lIns="0" tIns="0" rIns="0" bIns="0" anchor="t">
-            <a:noAutofit/>
-          </a:bodyPr>
-          <a:lstStyle xmlns:a="http://schemas.openxmlformats.org/drawingml/2006/main">
-            <a:defPPr>
-              <a:defRPr sz="1575">
-                <a:solidFill>
-                  <a:srgbClr val="FFFFFF"/>
-                </a:solidFill>
-                <a:latin typeface="Arial"/>
-                <a:ea typeface="Arial"/>
-                <a:cs typeface="Arial"/>
-              </a:defRPr>
-            </a:defPPr>
-            <a:lvl1pPr marL="228600" indent="-228600" algn="l" defTabSz="914400">
-              <a:lnSpc>
-                <a:spcPct val="90000"/>
-              </a:lnSpc>
-              <a:spcBef>
-                <a:spcPts val="1000"/>
-              </a:spcBef>
-              <a:buFont typeface="Arial"/>
-              <a:buChar char="•"/>
-              <a:defRPr sz="2400" kern="1200">
-                <a:solidFill>
-                  <a:schemeClr val="tx1"/>
-                </a:solidFill>
-                <a:latin typeface="+mn-lt"/>
-                <a:ea typeface="+mn-lt"/>
-                <a:cs typeface="+mn-lt"/>
-              </a:defRPr>
-            </a:lvl1pPr>
-            <a:lvl2pPr marL="685800" indent="-228600" algn="l" defTabSz="914400">
-              <a:lnSpc>
-                <a:spcPct val="90000"/>
-              </a:lnSpc>
-              <a:spcBef>
-                <a:spcPts val="500"/>
-              </a:spcBef>
-              <a:buFont typeface="Arial"/>
-              <a:buChar char="•"/>
-              <a:defRPr sz="2000" kern="1200">
-                <a:solidFill>
-                  <a:schemeClr val="tx1"/>
-                </a:solidFill>
-                <a:latin typeface="+mn-lt"/>
-                <a:ea typeface="+mn-lt"/>
-                <a:cs typeface="+mn-lt"/>
-              </a:defRPr>
-            </a:lvl2pPr>
-            <a:lvl3pPr marL="1143000" indent="-228600" algn="l" defTabSz="914400">
-              <a:lnSpc>
-                <a:spcPct val="90000"/>
-              </a:lnSpc>
-              <a:spcBef>
-                <a:spcPts val="500"/>
-              </a:spcBef>
-              <a:buFont typeface="Arial"/>
-              <a:buChar char="•"/>
-              <a:defRPr sz="1800" kern="1200">
-                <a:solidFill>
-                  <a:schemeClr val="tx1"/>
-                </a:solidFill>
-                <a:latin typeface="+mn-lt"/>
-                <a:ea typeface="+mn-lt"/>
-                <a:cs typeface="+mn-lt"/>
-              </a:defRPr>
-            </a:lvl3pPr>
-            <a:lvl4pPr marL="1600200" indent="-228600" algn="l" defTabSz="914400">
-              <a:lnSpc>
-                <a:spcPct val="90000"/>
-              </a:lnSpc>
-              <a:spcBef>
-                <a:spcPts val="500"/>
-              </a:spcBef>
-              <a:buFont typeface="Arial"/>
-              <a:buChar char="•"/>
-              <a:defRPr sz="1800" kern="1200">
-                <a:solidFill>
-                  <a:schemeClr val="tx1"/>
-                </a:solidFill>
-                <a:latin typeface="+mn-lt"/>
-                <a:ea typeface="+mn-lt"/>
-                <a:cs typeface="+mn-lt"/>
-              </a:defRPr>
-            </a:lvl4pPr>
-            <a:lvl5pPr marL="2057400" indent="-228600" algn="l" defTabSz="914400">
-              <a:lnSpc>
-                <a:spcPct val="90000"/>
-              </a:lnSpc>
-              <a:spcBef>
-                <a:spcPts val="500"/>
-              </a:spcBef>
-              <a:buFont typeface="Arial"/>
-              <a:buChar char="•"/>
-              <a:defRPr sz="1800" kern="1200">
-                <a:solidFill>
-                  <a:schemeClr val="tx1"/>
-                </a:solidFill>
-                <a:latin typeface="+mn-lt"/>
-                <a:ea typeface="+mn-lt"/>
-                <a:cs typeface="+mn-lt"/>
-              </a:defRPr>
-            </a:lvl5pPr>
-            <a:lvl6pPr marL="2514600" indent="-228600" algn="l" defTabSz="914400">
-              <a:lnSpc>
-                <a:spcPct val="90000"/>
-              </a:lnSpc>
-              <a:spcBef>
-                <a:spcPts val="500"/>
-              </a:spcBef>
-              <a:buFont typeface="Arial"/>
-              <a:buChar char="•"/>
-              <a:defRPr sz="1800" kern="1200">
-                <a:solidFill>
-                  <a:schemeClr val="tx1"/>
-                </a:solidFill>
-                <a:latin typeface="+mn-lt"/>
-                <a:ea typeface="+mn-lt"/>
-                <a:cs typeface="+mn-lt"/>
-              </a:defRPr>
-            </a:lvl6pPr>
-            <a:lvl7pPr marL="2971800" indent="-228600" algn="l" defTabSz="914400">
-              <a:lnSpc>
-                <a:spcPct val="90000"/>
-              </a:lnSpc>
-              <a:spcBef>
-                <a:spcPts val="500"/>
-              </a:spcBef>
-              <a:buFont typeface="Arial"/>
-              <a:buChar char="•"/>
-              <a:defRPr sz="1800" kern="1200">
-                <a:solidFill>
-                  <a:schemeClr val="tx1"/>
-                </a:solidFill>
-                <a:latin typeface="+mn-lt"/>
-                <a:ea typeface="+mn-lt"/>
-                <a:cs typeface="+mn-lt"/>
-              </a:defRPr>
-            </a:lvl7pPr>
-            <a:lvl8pPr marL="3429000" indent="-228600" algn="l" defTabSz="914400">
-              <a:lnSpc>
-                <a:spcPct val="90000"/>
-              </a:lnSpc>
-              <a:spcBef>
-                <a:spcPts val="500"/>
-              </a:spcBef>
-              <a:buFont typeface="Arial"/>
-              <a:buChar char="•"/>
-              <a:defRPr sz="1800" kern="1200">
-                <a:solidFill>
-                  <a:schemeClr val="tx1"/>
-                </a:solidFill>
-                <a:latin typeface="+mn-lt"/>
-                <a:ea typeface="+mn-lt"/>
-                <a:cs typeface="+mn-lt"/>
-              </a:defRPr>
-            </a:lvl8pPr>
-            <a:lvl9pPr marL="3886200" indent="-228600" algn="l" defTabSz="914400">
-              <a:lnSpc>
-                <a:spcPct val="90000"/>
-              </a:lnSpc>
-              <a:spcBef>
-                <a:spcPts val="500"/>
-              </a:spcBef>
-              <a:buFont typeface="Arial"/>
-              <a:buChar char="•"/>
-              <a:defRPr sz="1800" kern="1200">
-                <a:solidFill>
-                  <a:schemeClr val="tx1"/>
-                </a:solidFill>
-                <a:latin typeface="+mn-lt"/>
-                <a:ea typeface="+mn-lt"/>
-                <a:cs typeface="+mn-lt"/>
-              </a:defRPr>
-            </a:lvl9pPr>
-          </a:lstStyle>
-          <a:p xmlns:a="http://schemas.openxmlformats.org/drawingml/2006/main">
-            <a:pPr marL="0" indent="0">
-              <a:lnSpc>
-                <a:spcPct val="112000"/>
-              </a:lnSpc>
-              <a:spcBef>
-                <a:spcPts val="0"/>
-              </a:spcBef>
-              <a:spcAft>
-                <a:spcPts val="0"/>
-              </a:spcAft>
-              <a:buNone/>
-              <a:defRPr sz="1575">
-                <a:solidFill>
-                  <a:srgbClr val="FFFFFF"/>
-                </a:solidFill>
-                <a:latin typeface="Arial"/>
-                <a:ea typeface="Arial"/>
-                <a:cs typeface="Arial"/>
-              </a:defRPr>
-            </a:pPr>
-            <a:r>
-              <a:rPr sz="1575">
-                <a:solidFill>
-                  <a:srgbClr val="FFFFFF"/>
-                </a:solidFill>
-                <a:latin typeface="Arial"/>
-                <a:ea typeface="Arial"/>
-                <a:cs typeface="Arial"/>
-              </a:rPr>
-              <a:t>x87 has eight 80-bit registers organized as a register stack. This is separate from the function-call stack.</a:t>
-            </a:r>
-          </a:p>
-          <a:p xmlns:a="http://schemas.openxmlformats.org/drawingml/2006/main">
-            <a:pPr marL="0" indent="0">
-              <a:lnSpc>
-                <a:spcPct val="112000"/>
-              </a:lnSpc>
-              <a:spcBef>
-                <a:spcPts val="0"/>
-              </a:spcBef>
-              <a:spcAft>
-                <a:spcPts val="0"/>
-              </a:spcAft>
-              <a:buNone/>
-            </a:pPr>
-            <a:r>
-              <a:t/>
-            </a:r>
-          </a:p>
-          <a:p xmlns:a="http://schemas.openxmlformats.org/drawingml/2006/main">
-            <a:pPr marL="0" indent="0">
-              <a:lnSpc>
-                <a:spcPct val="112000"/>
-              </a:lnSpc>
-              <a:spcBef>
-                <a:spcPts val="0"/>
-              </a:spcBef>
-              <a:spcAft>
-                <a:spcPts val="0"/>
-              </a:spcAft>
-              <a:buNone/>
-              <a:defRPr sz="1575">
-                <a:solidFill>
-                  <a:srgbClr val="FFFFFF"/>
-                </a:solidFill>
-                <a:latin typeface="Arial"/>
-                <a:ea typeface="Arial"/>
-                <a:cs typeface="Arial"/>
-              </a:defRPr>
-            </a:pPr>
-            <a:r>
-              <a:rPr sz="1575">
-                <a:solidFill>
-                  <a:srgbClr val="FFFFFF"/>
-                </a:solidFill>
-                <a:latin typeface="Arial"/>
-                <a:ea typeface="Arial"/>
-                <a:cs typeface="Arial"/>
-              </a:rPr>
-              <a:t>XMM registers are 128 bits wide. Scalar float instructions use one value within that register.</a:t>
-            </a:r>
-          </a:p>
-          <a:p xmlns:a="http://schemas.openxmlformats.org/drawingml/2006/main">
-            <a:pPr marL="0" indent="0">
-              <a:lnSpc>
-                <a:spcPct val="112000"/>
-              </a:lnSpc>
-              <a:spcBef>
-                <a:spcPts val="0"/>
-              </a:spcBef>
-              <a:spcAft>
-                <a:spcPts val="0"/>
-              </a:spcAft>
-              <a:buNone/>
-            </a:pPr>
-            <a:r>
-              <a:t/>
-            </a:r>
-          </a:p>
-          <a:p xmlns:a="http://schemas.openxmlformats.org/drawingml/2006/main">
-            <a:pPr marL="0" indent="0">
-              <a:lnSpc>
-                <a:spcPct val="112000"/>
-              </a:lnSpc>
-              <a:spcBef>
-                <a:spcPts val="0"/>
-              </a:spcBef>
-              <a:spcAft>
-                <a:spcPts val="0"/>
-              </a:spcAft>
-              <a:buNone/>
-              <a:defRPr sz="1575">
-                <a:solidFill>
-                  <a:srgbClr val="FFFFFF"/>
-                </a:solidFill>
-                <a:latin typeface="Arial"/>
-                <a:ea typeface="Arial"/>
-                <a:cs typeface="Arial"/>
-              </a:defRPr>
-            </a:pPr>
-            <a:r>
-              <a:rPr sz="1575">
-                <a:solidFill>
-                  <a:srgbClr val="FFFFFF"/>
-                </a:solidFill>
-                <a:latin typeface="Arial"/>
-                <a:ea typeface="Arial"/>
-                <a:cs typeface="Arial"/>
-              </a:rPr>
-              <a:t>YMM registers are 256 bits wide; their low 128 bits overlap XMM.</a:t>
-            </a:r>
-          </a:p>
-        </p:txBody>
-      </p:sp>
-      <p:sp>
-        <p:nvSpPr>
-          <p:cNvPr id="8" name="Content Placeholder 3">
-            <a:extLst xmlns:a="http://schemas.openxmlformats.org/drawingml/2006/main">
-              <a:ext uri="{FF2B5EF4-FFF2-40B4-BE49-F238E27FC236}">
-                <a16:creationId xmlns:a16="http://schemas.microsoft.com/office/drawing/2014/main" id="{2EE8F343-A95F-2AAA-FE9E-A6C31E298DF7}"/>
-              </a:ext>
-            </a:extLst>
-          </p:cNvPr>
-          <p:cNvSpPr>
-            <a:spLocks xmlns:a="http://schemas.openxmlformats.org/drawingml/2006/main" noGrp="1"/>
-          </p:cNvSpPr>
-          <p:nvPr/>
-        </p:nvSpPr>
-        <p:spPr>
-          <a:xfrm xmlns:a="http://schemas.openxmlformats.org/drawingml/2006/main">
-            <a:off x="6256618" y="2031999"/>
-            <a:ext cx="5537200" cy="3534787"/>
-          </a:xfrm>
-          <a:prstGeom xmlns:a="http://schemas.openxmlformats.org/drawingml/2006/main" prst="rect">
-            <a:avLst/>
-          </a:prstGeom>
-        </p:spPr>
-        <p:txBody>
-          <a:bodyPr xmlns:a="http://schemas.openxmlformats.org/drawingml/2006/main" lIns="0" tIns="0" rIns="0" bIns="0" anchor="t">
-            <a:noAutofit/>
-          </a:bodyPr>
-          <a:lstStyle xmlns:a="http://schemas.openxmlformats.org/drawingml/2006/main">
-            <a:defPPr>
-              <a:defRPr sz="1800">
-                <a:solidFill>
-                  <a:srgbClr val="FFFFFF"/>
-                </a:solidFill>
-                <a:latin typeface="Consolas"/>
-                <a:ea typeface="Consolas"/>
-                <a:cs typeface="Consolas"/>
-              </a:defRPr>
-            </a:defPPr>
-            <a:lvl1pPr marL="228600" indent="-228600" algn="l" defTabSz="914400">
-              <a:lnSpc>
-                <a:spcPct val="90000"/>
-              </a:lnSpc>
-              <a:spcBef>
-                <a:spcPts val="1000"/>
-              </a:spcBef>
-              <a:buFont typeface="Arial"/>
-              <a:buChar char="•"/>
-              <a:defRPr sz="2400" kern="1200">
-                <a:solidFill>
-                  <a:schemeClr val="tx1"/>
-                </a:solidFill>
-                <a:latin typeface="+mn-lt"/>
-                <a:ea typeface="+mn-lt"/>
-                <a:cs typeface="+mn-lt"/>
-              </a:defRPr>
-            </a:lvl1pPr>
-            <a:lvl2pPr marL="685800" indent="-228600" algn="l" defTabSz="914400">
-              <a:lnSpc>
-                <a:spcPct val="90000"/>
-              </a:lnSpc>
-              <a:spcBef>
-                <a:spcPts val="500"/>
-              </a:spcBef>
-              <a:buFont typeface="Arial"/>
-              <a:buChar char="•"/>
-              <a:defRPr sz="2000" kern="1200">
-                <a:solidFill>
-                  <a:schemeClr val="tx1"/>
-                </a:solidFill>
-                <a:latin typeface="+mn-lt"/>
-                <a:ea typeface="+mn-lt"/>
-                <a:cs typeface="+mn-lt"/>
-              </a:defRPr>
-            </a:lvl2pPr>
-            <a:lvl3pPr marL="1143000" indent="-228600" algn="l" defTabSz="914400">
-              <a:lnSpc>
-                <a:spcPct val="90000"/>
-              </a:lnSpc>
-              <a:spcBef>
-                <a:spcPts val="500"/>
-              </a:spcBef>
-              <a:buFont typeface="Arial"/>
-              <a:buChar char="•"/>
-              <a:defRPr sz="1800" kern="1200">
-                <a:solidFill>
-                  <a:schemeClr val="tx1"/>
-                </a:solidFill>
-                <a:latin typeface="+mn-lt"/>
-                <a:ea typeface="+mn-lt"/>
-                <a:cs typeface="+mn-lt"/>
-              </a:defRPr>
-            </a:lvl3pPr>
-            <a:lvl4pPr marL="1600200" indent="-228600" algn="l" defTabSz="914400">
-              <a:lnSpc>
-                <a:spcPct val="90000"/>
-              </a:lnSpc>
-              <a:spcBef>
-                <a:spcPts val="500"/>
-              </a:spcBef>
-              <a:buFont typeface="Arial"/>
-              <a:buChar char="•"/>
-              <a:defRPr sz="1800" kern="1200">
-                <a:solidFill>
-                  <a:schemeClr val="tx1"/>
-                </a:solidFill>
-                <a:latin typeface="+mn-lt"/>
-                <a:ea typeface="+mn-lt"/>
-                <a:cs typeface="+mn-lt"/>
-              </a:defRPr>
-            </a:lvl4pPr>
-            <a:lvl5pPr marL="2057400" indent="-228600" algn="l" defTabSz="914400">
-              <a:lnSpc>
-                <a:spcPct val="90000"/>
-              </a:lnSpc>
-              <a:spcBef>
-                <a:spcPts val="500"/>
-              </a:spcBef>
-              <a:buFont typeface="Arial"/>
-              <a:buChar char="•"/>
-              <a:defRPr sz="1800" kern="1200">
-                <a:solidFill>
-                  <a:schemeClr val="tx1"/>
-                </a:solidFill>
-                <a:latin typeface="+mn-lt"/>
-                <a:ea typeface="+mn-lt"/>
-                <a:cs typeface="+mn-lt"/>
-              </a:defRPr>
-            </a:lvl5pPr>
-            <a:lvl6pPr marL="2514600" indent="-228600" algn="l" defTabSz="914400">
-              <a:lnSpc>
-                <a:spcPct val="90000"/>
-              </a:lnSpc>
-              <a:spcBef>
-                <a:spcPts val="500"/>
-              </a:spcBef>
-              <a:buFont typeface="Arial"/>
-              <a:buChar char="•"/>
-              <a:defRPr sz="1800" kern="1200">
-                <a:solidFill>
-                  <a:schemeClr val="tx1"/>
-                </a:solidFill>
-                <a:latin typeface="+mn-lt"/>
-                <a:ea typeface="+mn-lt"/>
-                <a:cs typeface="+mn-lt"/>
-              </a:defRPr>
-            </a:lvl6pPr>
-            <a:lvl7pPr marL="2971800" indent="-228600" algn="l" defTabSz="914400">
-              <a:lnSpc>
-                <a:spcPct val="90000"/>
-              </a:lnSpc>
-              <a:spcBef>
-                <a:spcPts val="500"/>
-              </a:spcBef>
-              <a:buFont typeface="Arial"/>
-              <a:buChar char="•"/>
-              <a:defRPr sz="1800" kern="1200">
-                <a:solidFill>
-                  <a:schemeClr val="tx1"/>
-                </a:solidFill>
-                <a:latin typeface="+mn-lt"/>
-                <a:ea typeface="+mn-lt"/>
-                <a:cs typeface="+mn-lt"/>
-              </a:defRPr>
-            </a:lvl7pPr>
-            <a:lvl8pPr marL="3429000" indent="-228600" algn="l" defTabSz="914400">
-              <a:lnSpc>
-                <a:spcPct val="90000"/>
-              </a:lnSpc>
-              <a:spcBef>
-                <a:spcPts val="500"/>
-              </a:spcBef>
-              <a:buFont typeface="Arial"/>
-              <a:buChar char="•"/>
-              <a:defRPr sz="1800" kern="1200">
-                <a:solidFill>
-                  <a:schemeClr val="tx1"/>
-                </a:solidFill>
-                <a:latin typeface="+mn-lt"/>
-                <a:ea typeface="+mn-lt"/>
-                <a:cs typeface="+mn-lt"/>
-              </a:defRPr>
-            </a:lvl8pPr>
-            <a:lvl9pPr marL="3886200" indent="-228600" algn="l" defTabSz="914400">
-              <a:lnSpc>
-                <a:spcPct val="90000"/>
-              </a:lnSpc>
-              <a:spcBef>
-                <a:spcPts val="500"/>
-              </a:spcBef>
-              <a:buFont typeface="Arial"/>
-              <a:buChar char="•"/>
-              <a:defRPr sz="1800" kern="1200">
-                <a:solidFill>
-                  <a:schemeClr val="tx1"/>
-                </a:solidFill>
-                <a:latin typeface="+mn-lt"/>
-                <a:ea typeface="+mn-lt"/>
-                <a:cs typeface="+mn-lt"/>
-              </a:defRPr>
-            </a:lvl9pPr>
-          </a:lstStyle>
-          <a:p xmlns:a="http://schemas.openxmlformats.org/drawingml/2006/main">
-            <a:pPr marL="0" indent="0">
-              <a:lnSpc>
-                <a:spcPct val="112000"/>
-              </a:lnSpc>
-              <a:spcBef>
-                <a:spcPts val="0"/>
-              </a:spcBef>
-              <a:spcAft>
-                <a:spcPts val="0"/>
-              </a:spcAft>
-              <a:buNone/>
-              <a:defRPr sz="1800">
-                <a:solidFill>
-                  <a:srgbClr val="FFFFFF"/>
-                </a:solidFill>
-                <a:latin typeface="Consolas"/>
-                <a:ea typeface="Consolas"/>
-                <a:cs typeface="Consolas"/>
-              </a:defRPr>
-            </a:pPr>
-            <a:r>
-              <a:rPr sz="1800">
-                <a:solidFill>
-                  <a:srgbClr val="FFFFFF"/>
-                </a:solidFill>
-                <a:latin typeface="Consolas"/>
-                <a:ea typeface="Consolas"/>
-                <a:cs typeface="Consolas"/>
-              </a:rPr>
-              <a:t>x87:  ST(0) ... ST(7)   80 bits</a:t>
-            </a:r>
-          </a:p>
-          <a:p xmlns:a="http://schemas.openxmlformats.org/drawingml/2006/main">
-            <a:pPr marL="0" indent="0">
-              <a:lnSpc>
-                <a:spcPct val="112000"/>
-              </a:lnSpc>
-              <a:spcBef>
-                <a:spcPts val="0"/>
-              </a:spcBef>
-              <a:spcAft>
-                <a:spcPts val="0"/>
-              </a:spcAft>
-              <a:buNone/>
-              <a:defRPr sz="1800">
-                <a:solidFill>
-                  <a:srgbClr val="FFFFFF"/>
-                </a:solidFill>
-                <a:latin typeface="Consolas"/>
-                <a:ea typeface="Consolas"/>
-                <a:cs typeface="Consolas"/>
-              </a:defRPr>
-            </a:pPr>
-            <a:r>
-              <a:rPr sz="1800">
-                <a:solidFill>
-                  <a:srgbClr val="FFFFFF"/>
-                </a:solidFill>
-                <a:latin typeface="Consolas"/>
-                <a:ea typeface="Consolas"/>
-                <a:cs typeface="Consolas"/>
-              </a:rPr>
-              <a:t>MMX:  mm0 ... mm7       64 bits</a:t>
-            </a:r>
-          </a:p>
-          <a:p xmlns:a="http://schemas.openxmlformats.org/drawingml/2006/main">
-            <a:pPr marL="0" indent="0">
-              <a:lnSpc>
-                <a:spcPct val="112000"/>
-              </a:lnSpc>
-              <a:spcBef>
-                <a:spcPts val="0"/>
-              </a:spcBef>
-              <a:spcAft>
-                <a:spcPts val="0"/>
-              </a:spcAft>
-              <a:buNone/>
-              <a:defRPr sz="1800">
-                <a:solidFill>
-                  <a:srgbClr val="FFFFFF"/>
-                </a:solidFill>
-                <a:latin typeface="Consolas"/>
-                <a:ea typeface="Consolas"/>
-                <a:cs typeface="Consolas"/>
-              </a:defRPr>
-            </a:pPr>
-            <a:r>
-              <a:rPr sz="1800">
-                <a:solidFill>
-                  <a:srgbClr val="FFFFFF"/>
-                </a:solidFill>
-                <a:latin typeface="Consolas"/>
-                <a:ea typeface="Consolas"/>
-                <a:cs typeface="Consolas"/>
-              </a:rPr>
-              <a:t>      packed integers; aliases x87</a:t>
-            </a:r>
-          </a:p>
-          <a:p xmlns:a="http://schemas.openxmlformats.org/drawingml/2006/main">
-            <a:pPr marL="0" indent="0">
-              <a:lnSpc>
-                <a:spcPct val="112000"/>
-              </a:lnSpc>
-              <a:spcBef>
-                <a:spcPts val="0"/>
-              </a:spcBef>
-              <a:spcAft>
-                <a:spcPts val="0"/>
-              </a:spcAft>
-              <a:buNone/>
-              <a:defRPr sz="1800">
-                <a:solidFill>
-                  <a:srgbClr val="FFFFFF"/>
-                </a:solidFill>
-                <a:latin typeface="Consolas"/>
-                <a:ea typeface="Consolas"/>
-                <a:cs typeface="Consolas"/>
-              </a:defRPr>
-            </a:pPr>
-            <a:r>
-              <a:rPr sz="1800">
-                <a:solidFill>
-                  <a:srgbClr val="FFFFFF"/>
-                </a:solidFill>
-                <a:latin typeface="Consolas"/>
-                <a:ea typeface="Consolas"/>
-                <a:cs typeface="Consolas"/>
-              </a:rPr>
-              <a:t>XMM:  xmm0 ... xmm15   128 bits</a:t>
-            </a:r>
-          </a:p>
-          <a:p xmlns:a="http://schemas.openxmlformats.org/drawingml/2006/main">
-            <a:pPr marL="0" indent="0">
-              <a:lnSpc>
-                <a:spcPct val="112000"/>
-              </a:lnSpc>
-              <a:spcBef>
-                <a:spcPts val="0"/>
-              </a:spcBef>
-              <a:spcAft>
-                <a:spcPts val="0"/>
-              </a:spcAft>
-              <a:buNone/>
-              <a:defRPr sz="1800">
-                <a:solidFill>
-                  <a:srgbClr val="FFFFFF"/>
-                </a:solidFill>
-                <a:latin typeface="Consolas"/>
-                <a:ea typeface="Consolas"/>
-                <a:cs typeface="Consolas"/>
-              </a:defRPr>
-            </a:pPr>
-            <a:r>
-              <a:rPr sz="1800">
-                <a:solidFill>
-                  <a:srgbClr val="FFFFFF"/>
-                </a:solidFill>
-                <a:latin typeface="Consolas"/>
-                <a:ea typeface="Consolas"/>
-                <a:cs typeface="Consolas"/>
-              </a:rPr>
-              <a:t>YMM:  ymm0 ... ymm15   256 bits</a:t>
-            </a:r>
-          </a:p>
-          <a:p xmlns:a="http://schemas.openxmlformats.org/drawingml/2006/main">
-            <a:pPr marL="0" indent="0">
-              <a:lnSpc>
-                <a:spcPct val="112000"/>
-              </a:lnSpc>
-              <a:spcBef>
-                <a:spcPts val="0"/>
-              </a:spcBef>
-              <a:spcAft>
-                <a:spcPts val="0"/>
-              </a:spcAft>
-              <a:buNone/>
-            </a:pPr>
-            <a:r>
-              <a:t/>
-            </a:r>
-          </a:p>
-          <a:p xmlns:a="http://schemas.openxmlformats.org/drawingml/2006/main">
-            <a:pPr marL="0" indent="0">
-              <a:lnSpc>
-                <a:spcPct val="112000"/>
-              </a:lnSpc>
-              <a:spcBef>
-                <a:spcPts val="0"/>
-              </a:spcBef>
-              <a:spcAft>
-                <a:spcPts val="0"/>
-              </a:spcAft>
-              <a:buNone/>
-              <a:defRPr sz="1800">
-                <a:solidFill>
-                  <a:srgbClr val="FFFFFF"/>
-                </a:solidFill>
-                <a:latin typeface="Consolas"/>
-                <a:ea typeface="Consolas"/>
-                <a:cs typeface="Consolas"/>
-              </a:defRPr>
-            </a:pPr>
-            <a:r>
-              <a:rPr sz="1800">
-                <a:solidFill>
-                  <a:srgbClr val="FFFFFF"/>
-                </a:solidFill>
-                <a:latin typeface="Consolas"/>
-                <a:ea typeface="Consolas"/>
-                <a:cs typeface="Consolas"/>
-              </a:rPr>
-              <a:t>movss / addss: scalar FP32</a:t>
-            </a:r>
-          </a:p>
-          <a:p xmlns:a="http://schemas.openxmlformats.org/drawingml/2006/main">
-            <a:pPr marL="0" indent="0">
-              <a:lnSpc>
-                <a:spcPct val="112000"/>
-              </a:lnSpc>
-              <a:spcBef>
-                <a:spcPts val="0"/>
-              </a:spcBef>
-              <a:spcAft>
-                <a:spcPts val="0"/>
-              </a:spcAft>
-              <a:buNone/>
-              <a:defRPr sz="1800">
-                <a:solidFill>
-                  <a:srgbClr val="FFFFFF"/>
-                </a:solidFill>
-                <a:latin typeface="Consolas"/>
-                <a:ea typeface="Consolas"/>
-                <a:cs typeface="Consolas"/>
-              </a:defRPr>
-            </a:pPr>
-            <a:r>
-              <a:rPr sz="1800">
-                <a:solidFill>
-                  <a:srgbClr val="FFFFFF"/>
-                </a:solidFill>
-                <a:latin typeface="Consolas"/>
-                <a:ea typeface="Consolas"/>
-                <a:cs typeface="Consolas"/>
-              </a:rPr>
-              <a:t>movsd / addsd: scalar FP64</a:t>
-            </a:r>
-          </a:p>
-        </p:txBody>
-      </p:sp>
-      <p:sp>
-        <p:nvSpPr>
-          <p:cNvPr id="534" name="Takeaway">
-            <a:extLst xmlns:a="http://schemas.openxmlformats.org/drawingml/2006/main">
-              <a:ext uri="{FF2B5EF4-FFF2-40B4-BE49-F238E27FC236}">
-                <a16:creationId xmlns:a16="http://schemas.microsoft.com/office/drawing/2014/main" id="{69C5629F-9CEC-4E04-A62F-A90FAB491945}"/>
-              </a:ext>
-            </a:extLst>
-          </p:cNvPr>
-          <p:cNvSpPr>
-            <a:spLocks xmlns:a="http://schemas.openxmlformats.org/drawingml/2006/main" noGrp="1"/>
-          </p:cNvSpPr>
-          <p:nvPr/>
-        </p:nvSpPr>
-        <p:spPr>
-          <a:xfrm xmlns:a="http://schemas.openxmlformats.org/drawingml/2006/main">
-            <a:off x="393668" y="5715000"/>
-            <a:ext cx="11404283" cy="466725"/>
-          </a:xfrm>
-          <a:prstGeom xmlns:a="http://schemas.openxmlformats.org/drawingml/2006/main" prst="rect">
-            <a:avLst/>
-          </a:prstGeom>
-          <a:noFill xmlns:a="http://schemas.openxmlformats.org/drawingml/2006/main"/>
-          <a:ln xmlns:a="http://schemas.openxmlformats.org/drawingml/2006/main" w="0">
-            <a:noFill/>
-          </a:ln>
-        </p:spPr>
-        <p:txBody>
-          <a:bodyPr xmlns:a="http://schemas.openxmlformats.org/drawingml/2006/main" lIns="0" tIns="0" rIns="0" bIns="0" anchor="t">
-            <a:noAutofit/>
-          </a:bodyPr>
-          <a:lstStyle xmlns:a="http://schemas.openxmlformats.org/drawingml/2006/main">
-            <a:defPPr>
-              <a:defRPr sz="1350">
-                <a:solidFill>
-                  <a:srgbClr val="CCCCCC"/>
-                </a:solidFill>
-                <a:latin typeface="Arial"/>
-                <a:ea typeface="Arial"/>
-                <a:cs typeface="Arial"/>
-              </a:defRPr>
-            </a:defPPr>
-          </a:lstStyle>
-          <a:p xmlns:a="http://schemas.openxmlformats.org/drawingml/2006/main">
-            <a:pPr marL="0" indent="0">
-              <a:lnSpc>
-                <a:spcPct val="112000"/>
-              </a:lnSpc>
-              <a:spcBef>
-                <a:spcPts val="0"/>
-              </a:spcBef>
-              <a:spcAft>
-                <a:spcPts val="0"/>
-              </a:spcAft>
-              <a:buNone/>
-              <a:defRPr sz="1350">
-                <a:solidFill>
-                  <a:srgbClr val="CCCCCC"/>
-                </a:solidFill>
-                <a:latin typeface="Arial"/>
-                <a:ea typeface="Arial"/>
-                <a:cs typeface="Arial"/>
-              </a:defRPr>
-            </a:pPr>
-            <a:r>
-              <a:rPr sz="1350">
-                <a:solidFill>
-                  <a:srgbClr val="CCCCCC"/>
-                </a:solidFill>
-                <a:latin typeface="Arial"/>
-                <a:ea typeface="Arial"/>
-                <a:cs typeface="Arial"/>
-              </a:rPr>
-              <a:t>The register width is not the size of every value it holds. Names here use the baseline x86-64 model.</a:t>
-            </a:r>
-          </a:p>
-        </p:txBody>
-      </p:sp>
-    </p:spTree>
-    <p:extLst>
-      <p:ext uri="{BB962C8B-B14F-4D97-AF65-F5344CB8AC3E}">
-        <p14:creationId xmlns:p14="http://schemas.microsoft.com/office/powerpoint/2010/main" val="3667182145"/>
-      </p:ext>
-    </p:extLst>
-  </p:cSld>
-</p:sld>
-</file>
-
-<file path=ppt/slides/slide14.xml><?xml version="1.0" encoding="utf-8"?>
-<p:sld xmlns:p="http://schemas.openxmlformats.org/presentationml/2006/main">
-  <p:cSld>
-    <p:spTree>
-      <p:nvGrpSpPr>
-        <p:cNvPr id="1" name=""/>
-        <p:cNvGrpSpPr/>
-        <p:nvPr/>
-      </p:nvGrpSpPr>
-      <p:grpSpPr>
-        <a:xfrm xmlns:a="http://schemas.openxmlformats.org/drawingml/2006/main"/>
-      </p:grpSpPr>
-      <p:sp>
-        <p:nvSpPr>
-          <p:cNvPr id="3" name="Footer Placeholder 2">
-            <a:extLst xmlns:a="http://schemas.openxmlformats.org/drawingml/2006/main">
-              <a:ext uri="{FF2B5EF4-FFF2-40B4-BE49-F238E27FC236}">
-                <a16:creationId xmlns:a16="http://schemas.microsoft.com/office/drawing/2014/main" id="{39EA4C82-C623-0196-4A95-876ADF5DEE92}"/>
-              </a:ext>
-            </a:extLst>
-          </p:cNvPr>
-          <p:cNvSpPr>
-            <a:spLocks xmlns:a="http://schemas.openxmlformats.org/drawingml/2006/main" noGrp="1"/>
-          </p:cNvSpPr>
-          <p:nvPr>
-            <p:ph type="ftr" idx="3"/>
-          </p:nvPr>
-        </p:nvSpPr>
-        <p:spPr>
-          <a:xfrm xmlns:a="http://schemas.openxmlformats.org/drawingml/2006/main">
-            <a:off x="393700" y="6279952"/>
-            <a:ext cx="3568700" cy="241240"/>
-          </a:xfrm>
-        </p:spPr>
-        <p:txBody>
-          <a:bodyPr xmlns:a="http://schemas.openxmlformats.org/drawingml/2006/main" lIns="0" tIns="0" rIns="0" bIns="0" anchor="t">
-            <a:noAutofit/>
-          </a:bodyPr>
-          <a:lstStyle xmlns:a="http://schemas.openxmlformats.org/drawingml/2006/main">
-            <a:defPPr>
-              <a:defRPr sz="1125">
-                <a:solidFill>
-                  <a:srgbClr val="FFFFFF"/>
-                </a:solidFill>
-                <a:latin typeface="Arial"/>
-                <a:ea typeface="Arial"/>
-                <a:cs typeface="Arial"/>
-              </a:defRPr>
-            </a:defPPr>
-          </a:lstStyle>
-          <a:p xmlns:a="http://schemas.openxmlformats.org/drawingml/2006/main">
-            <a:pPr marL="0" indent="0">
-              <a:lnSpc>
-                <a:spcPct val="112000"/>
-              </a:lnSpc>
-              <a:spcBef>
-                <a:spcPts val="0"/>
-              </a:spcBef>
-              <a:spcAft>
-                <a:spcPts val="0"/>
-              </a:spcAft>
-              <a:buNone/>
-              <a:defRPr sz="1125">
-                <a:solidFill>
-                  <a:srgbClr val="FFFFFF"/>
-                </a:solidFill>
-                <a:latin typeface="Arial"/>
-                <a:ea typeface="Arial"/>
-                <a:cs typeface="Arial"/>
-              </a:defRPr>
-            </a:pPr>
-            <a:r>
-              <a:rPr sz="1125">
-                <a:solidFill>
-                  <a:srgbClr val="FFFFFF"/>
-                </a:solidFill>
-                <a:latin typeface="Arial"/>
-                <a:ea typeface="Arial"/>
-                <a:cs typeface="Arial"/>
-              </a:rPr>
-              <a:t>CS 211 · Recitation 06</a:t>
-            </a:r>
-          </a:p>
-        </p:txBody>
-      </p:sp>
-      <p:sp>
-        <p:nvSpPr>
-          <p:cNvPr id="532" name="Google Shape;532;p58">
-            <a:extLst xmlns:a="http://schemas.openxmlformats.org/drawingml/2006/main">
-              <a:ext uri="{FF2B5EF4-FFF2-40B4-BE49-F238E27FC236}">
-                <a16:creationId xmlns:a16="http://schemas.microsoft.com/office/drawing/2014/main" id="{1BCBE750-7048-686D-1472-52C53362D6CD}"/>
-              </a:ext>
-            </a:extLst>
-          </p:cNvPr>
-          <p:cNvSpPr>
-            <a:spLocks xmlns:a="http://schemas.openxmlformats.org/drawingml/2006/main" noGrp="1"/>
-          </p:cNvSpPr>
-          <p:nvPr>
-            <p:ph type="sldNum" idx="4"/>
-          </p:nvPr>
-        </p:nvSpPr>
-        <p:spPr>
-          <a:xfrm xmlns:a="http://schemas.openxmlformats.org/drawingml/2006/main">
-            <a:off x="11279332" y="6279294"/>
-            <a:ext cx="518968" cy="241240"/>
-          </a:xfrm>
-        </p:spPr>
-        <p:txBody>
-          <a:bodyPr xmlns:a="http://schemas.openxmlformats.org/drawingml/2006/main" spcFirstLastPara="1" vert="horz" wrap="square" lIns="0" tIns="0" rIns="0" bIns="0" anchor="t">
-            <a:noAutofit/>
-          </a:bodyPr>
-          <a:lstStyle xmlns:a="http://schemas.openxmlformats.org/drawingml/2006/main">
-            <a:defPPr>
-              <a:defRPr sz="1125">
-                <a:solidFill>
-                  <a:srgbClr val="FFFFFF"/>
-                </a:solidFill>
-                <a:latin typeface="Arial"/>
-                <a:ea typeface="Arial"/>
-                <a:cs typeface="Arial"/>
-              </a:defRPr>
-            </a:defPPr>
-          </a:lstStyle>
-          <a:p xmlns:a="http://schemas.openxmlformats.org/drawingml/2006/main">
-            <a:pPr marL="0" indent="0">
-              <a:lnSpc>
-                <a:spcPct val="112000"/>
-              </a:lnSpc>
-              <a:spcBef>
-                <a:spcPts val="0"/>
-              </a:spcBef>
-              <a:spcAft>
-                <a:spcPts val="0"/>
-              </a:spcAft>
-              <a:buNone/>
-              <a:defRPr sz="1125">
-                <a:solidFill>
-                  <a:srgbClr val="FFFFFF"/>
-                </a:solidFill>
-                <a:latin typeface="Arial"/>
-                <a:ea typeface="Arial"/>
-                <a:cs typeface="Arial"/>
-              </a:defRPr>
-            </a:pPr>
-            <a:r>
-              <a:rPr sz="1125">
-                <a:solidFill>
-                  <a:srgbClr val="FFFFFF"/>
-                </a:solidFill>
-                <a:latin typeface="Arial"/>
-                <a:ea typeface="Arial"/>
-                <a:cs typeface="Arial"/>
-              </a:rPr>
-              <a:t>14</a:t>
-            </a:r>
-          </a:p>
-        </p:txBody>
-      </p:sp>
-      <p:sp>
-        <p:nvSpPr>
-          <p:cNvPr id="533" name="Google Shape;533;p58">
-            <a:extLst xmlns:a="http://schemas.openxmlformats.org/drawingml/2006/main">
-              <a:ext uri="{FF2B5EF4-FFF2-40B4-BE49-F238E27FC236}">
-                <a16:creationId xmlns:a16="http://schemas.microsoft.com/office/drawing/2014/main" id="{1B5D55CD-1C17-7CD8-F26A-2DD65B067687}"/>
-              </a:ext>
-            </a:extLst>
-          </p:cNvPr>
-          <p:cNvSpPr>
-            <a:spLocks xmlns:a="http://schemas.openxmlformats.org/drawingml/2006/main" noGrp="1"/>
-          </p:cNvSpPr>
-          <p:nvPr>
-            <p:ph type="title" idx="0"/>
-          </p:nvPr>
-        </p:nvSpPr>
-        <p:spPr>
-          <a:xfrm xmlns:a="http://schemas.openxmlformats.org/drawingml/2006/main">
-            <a:off x="393700" y="344008"/>
-            <a:ext cx="11404600" cy="1047491"/>
-          </a:xfrm>
-        </p:spPr>
-        <p:txBody>
-          <a:bodyPr xmlns:a="http://schemas.openxmlformats.org/drawingml/2006/main" spcFirstLastPara="1" vert="horz" wrap="square" lIns="0" tIns="0" rIns="0" bIns="0" anchor="t">
-            <a:noAutofit/>
-          </a:bodyPr>
-          <a:lstStyle xmlns:a="http://schemas.openxmlformats.org/drawingml/2006/main">
-            <a:defPPr>
-              <a:defRPr sz="3150">
-                <a:solidFill>
-                  <a:srgbClr val="FFFFFF"/>
-                </a:solidFill>
-                <a:latin typeface="Arial"/>
-                <a:ea typeface="Arial"/>
-                <a:cs typeface="Arial"/>
-              </a:defRPr>
-            </a:defPPr>
-          </a:lstStyle>
-          <a:p xmlns:a="http://schemas.openxmlformats.org/drawingml/2006/main">
-            <a:pPr marL="0" indent="0">
-              <a:lnSpc>
-                <a:spcPct val="112000"/>
-              </a:lnSpc>
-              <a:spcBef>
-                <a:spcPts val="0"/>
-              </a:spcBef>
-              <a:spcAft>
-                <a:spcPts val="0"/>
-              </a:spcAft>
-              <a:buNone/>
-              <a:defRPr sz="3150">
-                <a:solidFill>
-                  <a:srgbClr val="FFFFFF"/>
-                </a:solidFill>
-                <a:latin typeface="Arial"/>
-                <a:ea typeface="Arial"/>
-                <a:cs typeface="Arial"/>
-              </a:defRPr>
-            </a:pPr>
-            <a:r>
-              <a:rPr sz="3150">
-                <a:solidFill>
-                  <a:srgbClr val="FFFFFF"/>
-                </a:solidFill>
-                <a:latin typeface="Arial"/>
-                <a:ea typeface="Arial"/>
-                <a:cs typeface="Arial"/>
-              </a:rPr>
-              <a:t>Practice: scalar float instructions</a:t>
-            </a:r>
-          </a:p>
-        </p:txBody>
-      </p:sp>
-      <p:sp>
-        <p:nvSpPr>
-          <p:cNvPr id="7" name="Google Shape;534;p58">
-            <a:extLst xmlns:a="http://schemas.openxmlformats.org/drawingml/2006/main">
-              <a:ext uri="{FF2B5EF4-FFF2-40B4-BE49-F238E27FC236}">
-                <a16:creationId xmlns:a16="http://schemas.microsoft.com/office/drawing/2014/main" id="{3A923FEE-B8D2-CD3A-ABBD-21770B40AA24}"/>
-              </a:ext>
-            </a:extLst>
-          </p:cNvPr>
-          <p:cNvSpPr>
-            <a:spLocks xmlns:a="http://schemas.openxmlformats.org/drawingml/2006/main" noGrp="1"/>
-          </p:cNvSpPr>
-          <p:nvPr/>
-        </p:nvSpPr>
-        <p:spPr>
-          <a:xfrm xmlns:a="http://schemas.openxmlformats.org/drawingml/2006/main">
-            <a:off x="393700" y="2031999"/>
-            <a:ext cx="5537200" cy="3534787"/>
-          </a:xfrm>
-          <a:prstGeom xmlns:a="http://schemas.openxmlformats.org/drawingml/2006/main" prst="rect">
-            <a:avLst/>
-          </a:prstGeom>
-        </p:spPr>
-        <p:txBody>
-          <a:bodyPr xmlns:a="http://schemas.openxmlformats.org/drawingml/2006/main" spcFirstLastPara="1" vert="horz" wrap="square" lIns="0" tIns="0" rIns="0" bIns="0" anchor="t">
-            <a:noAutofit/>
-          </a:bodyPr>
-          <a:lstStyle xmlns:a="http://schemas.openxmlformats.org/drawingml/2006/main">
-            <a:defPPr>
-              <a:defRPr sz="1875">
-                <a:solidFill>
-                  <a:srgbClr val="FFFFFF"/>
-                </a:solidFill>
-                <a:latin typeface="Arial"/>
-                <a:ea typeface="Arial"/>
-                <a:cs typeface="Arial"/>
-              </a:defRPr>
-            </a:defPPr>
-            <a:lvl1pPr marL="228600" indent="-228600" algn="l" defTabSz="914400">
-              <a:lnSpc>
-                <a:spcPct val="90000"/>
-              </a:lnSpc>
-              <a:spcBef>
-                <a:spcPts val="1000"/>
-              </a:spcBef>
-              <a:buFont typeface="Arial"/>
-              <a:buChar char="•"/>
-              <a:defRPr sz="2400" kern="1200">
-                <a:solidFill>
-                  <a:schemeClr val="tx1"/>
-                </a:solidFill>
-                <a:latin typeface="+mn-lt"/>
-                <a:ea typeface="+mn-lt"/>
-                <a:cs typeface="+mn-lt"/>
-              </a:defRPr>
-            </a:lvl1pPr>
-            <a:lvl2pPr marL="685800" indent="-228600" algn="l" defTabSz="914400">
-              <a:lnSpc>
-                <a:spcPct val="90000"/>
-              </a:lnSpc>
-              <a:spcBef>
-                <a:spcPts val="500"/>
-              </a:spcBef>
-              <a:buFont typeface="Arial"/>
-              <a:buChar char="•"/>
-              <a:defRPr sz="2000" kern="1200">
-                <a:solidFill>
-                  <a:schemeClr val="tx1"/>
-                </a:solidFill>
-                <a:latin typeface="+mn-lt"/>
-                <a:ea typeface="+mn-lt"/>
-                <a:cs typeface="+mn-lt"/>
-              </a:defRPr>
-            </a:lvl2pPr>
-            <a:lvl3pPr marL="1143000" indent="-228600" algn="l" defTabSz="914400">
-              <a:lnSpc>
-                <a:spcPct val="90000"/>
-              </a:lnSpc>
-              <a:spcBef>
-                <a:spcPts val="500"/>
-              </a:spcBef>
-              <a:buFont typeface="Arial"/>
-              <a:buChar char="•"/>
-              <a:defRPr sz="1800" kern="1200">
-                <a:solidFill>
-                  <a:schemeClr val="tx1"/>
-                </a:solidFill>
-                <a:latin typeface="+mn-lt"/>
-                <a:ea typeface="+mn-lt"/>
-                <a:cs typeface="+mn-lt"/>
-              </a:defRPr>
-            </a:lvl3pPr>
-            <a:lvl4pPr marL="1600200" indent="-228600" algn="l" defTabSz="914400">
-              <a:lnSpc>
-                <a:spcPct val="90000"/>
-              </a:lnSpc>
-              <a:spcBef>
-                <a:spcPts val="500"/>
-              </a:spcBef>
-              <a:buFont typeface="Arial"/>
-              <a:buChar char="•"/>
-              <a:defRPr sz="1800" kern="1200">
-                <a:solidFill>
-                  <a:schemeClr val="tx1"/>
-                </a:solidFill>
-                <a:latin typeface="+mn-lt"/>
-                <a:ea typeface="+mn-lt"/>
-                <a:cs typeface="+mn-lt"/>
-              </a:defRPr>
-            </a:lvl4pPr>
-            <a:lvl5pPr marL="2057400" indent="-228600" algn="l" defTabSz="914400">
-              <a:lnSpc>
-                <a:spcPct val="90000"/>
-              </a:lnSpc>
-              <a:spcBef>
-                <a:spcPts val="500"/>
-              </a:spcBef>
-              <a:buFont typeface="Arial"/>
-              <a:buChar char="•"/>
-              <a:defRPr sz="1800" kern="1200">
-                <a:solidFill>
-                  <a:schemeClr val="tx1"/>
-                </a:solidFill>
-                <a:latin typeface="+mn-lt"/>
-                <a:ea typeface="+mn-lt"/>
-                <a:cs typeface="+mn-lt"/>
-              </a:defRPr>
-            </a:lvl5pPr>
-            <a:lvl6pPr marL="2514600" indent="-228600" algn="l" defTabSz="914400">
-              <a:lnSpc>
-                <a:spcPct val="90000"/>
-              </a:lnSpc>
-              <a:spcBef>
-                <a:spcPts val="500"/>
-              </a:spcBef>
-              <a:buFont typeface="Arial"/>
-              <a:buChar char="•"/>
-              <a:defRPr sz="1800" kern="1200">
-                <a:solidFill>
-                  <a:schemeClr val="tx1"/>
-                </a:solidFill>
-                <a:latin typeface="+mn-lt"/>
-                <a:ea typeface="+mn-lt"/>
-                <a:cs typeface="+mn-lt"/>
-              </a:defRPr>
-            </a:lvl6pPr>
-            <a:lvl7pPr marL="2971800" indent="-228600" algn="l" defTabSz="914400">
-              <a:lnSpc>
-                <a:spcPct val="90000"/>
-              </a:lnSpc>
-              <a:spcBef>
-                <a:spcPts val="500"/>
-              </a:spcBef>
-              <a:buFont typeface="Arial"/>
-              <a:buChar char="•"/>
-              <a:defRPr sz="1800" kern="1200">
-                <a:solidFill>
-                  <a:schemeClr val="tx1"/>
-                </a:solidFill>
-                <a:latin typeface="+mn-lt"/>
-                <a:ea typeface="+mn-lt"/>
-                <a:cs typeface="+mn-lt"/>
-              </a:defRPr>
-            </a:lvl7pPr>
-            <a:lvl8pPr marL="3429000" indent="-228600" algn="l" defTabSz="914400">
-              <a:lnSpc>
-                <a:spcPct val="90000"/>
-              </a:lnSpc>
-              <a:spcBef>
-                <a:spcPts val="500"/>
-              </a:spcBef>
-              <a:buFont typeface="Arial"/>
-              <a:buChar char="•"/>
-              <a:defRPr sz="1800" kern="1200">
-                <a:solidFill>
-                  <a:schemeClr val="tx1"/>
-                </a:solidFill>
-                <a:latin typeface="+mn-lt"/>
-                <a:ea typeface="+mn-lt"/>
-                <a:cs typeface="+mn-lt"/>
-              </a:defRPr>
-            </a:lvl8pPr>
-            <a:lvl9pPr marL="3886200" indent="-228600" algn="l" defTabSz="914400">
-              <a:lnSpc>
-                <a:spcPct val="90000"/>
-              </a:lnSpc>
-              <a:spcBef>
-                <a:spcPts val="500"/>
-              </a:spcBef>
-              <a:buFont typeface="Arial"/>
-              <a:buChar char="•"/>
-              <a:defRPr sz="1800" kern="1200">
-                <a:solidFill>
-                  <a:schemeClr val="tx1"/>
-                </a:solidFill>
-                <a:latin typeface="+mn-lt"/>
-                <a:ea typeface="+mn-lt"/>
-                <a:cs typeface="+mn-lt"/>
-              </a:defRPr>
-            </a:lvl9pPr>
-          </a:lstStyle>
-          <a:p xmlns:a="http://schemas.openxmlformats.org/drawingml/2006/main">
-            <a:pPr marL="0" indent="0">
-              <a:lnSpc>
-                <a:spcPct val="112000"/>
-              </a:lnSpc>
-              <a:spcBef>
-                <a:spcPts val="0"/>
-              </a:spcBef>
-              <a:spcAft>
-                <a:spcPts val="0"/>
-              </a:spcAft>
-              <a:buNone/>
-              <a:defRPr sz="1875">
-                <a:solidFill>
-                  <a:srgbClr val="FFFFFF"/>
-                </a:solidFill>
-                <a:latin typeface="Arial"/>
-                <a:ea typeface="Arial"/>
-                <a:cs typeface="Arial"/>
-              </a:defRPr>
-            </a:pPr>
-            <a:r>
-              <a:rPr sz="1875">
-                <a:solidFill>
-                  <a:srgbClr val="FFFFFF"/>
-                </a:solidFill>
-                <a:latin typeface="Arial"/>
-                <a:ea typeface="Arial"/>
-                <a:cs typeface="Arial"/>
-              </a:rPr>
-              <a:t>Initially, the low float in %xmm0 is 2.5 and the low float in %xmm1 is 4.0.</a:t>
-            </a:r>
-          </a:p>
-          <a:p xmlns:a="http://schemas.openxmlformats.org/drawingml/2006/main">
-            <a:pPr marL="0" indent="0">
-              <a:lnSpc>
-                <a:spcPct val="112000"/>
-              </a:lnSpc>
-              <a:spcBef>
-                <a:spcPts val="0"/>
-              </a:spcBef>
-              <a:spcAft>
-                <a:spcPts val="0"/>
-              </a:spcAft>
-              <a:buNone/>
-            </a:pPr>
-            <a:r>
-              <a:t/>
-            </a:r>
-          </a:p>
-          <a:p xmlns:a="http://schemas.openxmlformats.org/drawingml/2006/main">
-            <a:pPr marL="0" indent="0">
-              <a:lnSpc>
-                <a:spcPct val="112000"/>
-              </a:lnSpc>
-              <a:spcBef>
-                <a:spcPts val="0"/>
-              </a:spcBef>
-              <a:spcAft>
-                <a:spcPts val="0"/>
-              </a:spcAft>
-              <a:buNone/>
-              <a:defRPr sz="1875">
-                <a:solidFill>
-                  <a:srgbClr val="FFFFFF"/>
-                </a:solidFill>
-                <a:latin typeface="Arial"/>
-                <a:ea typeface="Arial"/>
-                <a:cs typeface="Arial"/>
-              </a:defRPr>
-            </a:pPr>
-            <a:r>
-              <a:rPr sz="1875">
-                <a:solidFill>
-                  <a:srgbClr val="FFFFFF"/>
-                </a:solidFill>
-                <a:latin typeface="Arial"/>
-                <a:ea typeface="Arial"/>
-                <a:cs typeface="Arial"/>
-              </a:rPr>
-              <a:t>What value is in %xmm0 after each instruction?</a:t>
-            </a:r>
-          </a:p>
-          <a:p xmlns:a="http://schemas.openxmlformats.org/drawingml/2006/main">
-            <a:pPr marL="0" indent="0">
-              <a:lnSpc>
-                <a:spcPct val="112000"/>
-              </a:lnSpc>
-              <a:spcBef>
-                <a:spcPts val="0"/>
-              </a:spcBef>
-              <a:spcAft>
-                <a:spcPts val="0"/>
-              </a:spcAft>
-              <a:buNone/>
-            </a:pPr>
-            <a:r>
-              <a:t/>
-            </a:r>
-          </a:p>
-          <a:p xmlns:a="http://schemas.openxmlformats.org/drawingml/2006/main">
-            <a:pPr marL="0" indent="0">
-              <a:lnSpc>
-                <a:spcPct val="112000"/>
-              </a:lnSpc>
-              <a:spcBef>
-                <a:spcPts val="0"/>
-              </a:spcBef>
-              <a:spcAft>
-                <a:spcPts val="0"/>
-              </a:spcAft>
-              <a:buNone/>
-              <a:defRPr sz="1875">
-                <a:solidFill>
-                  <a:srgbClr val="FFFFFF"/>
-                </a:solidFill>
-                <a:latin typeface="Arial"/>
-                <a:ea typeface="Arial"/>
-                <a:cs typeface="Arial"/>
-              </a:defRPr>
-            </a:pPr>
-            <a:r>
-              <a:rPr sz="1875">
-                <a:solidFill>
-                  <a:srgbClr val="FFFFFF"/>
-                </a:solidFill>
-                <a:latin typeface="Arial"/>
-                <a:ea typeface="Arial"/>
-                <a:cs typeface="Arial"/>
-              </a:rPr>
-              <a:t>Why convert to double before passing a float to printf?</a:t>
-            </a:r>
-          </a:p>
-        </p:txBody>
-      </p:sp>
-      <p:sp>
-        <p:nvSpPr>
-          <p:cNvPr id="8" name="Content Placeholder 3">
-            <a:extLst xmlns:a="http://schemas.openxmlformats.org/drawingml/2006/main">
-              <a:ext uri="{FF2B5EF4-FFF2-40B4-BE49-F238E27FC236}">
-                <a16:creationId xmlns:a16="http://schemas.microsoft.com/office/drawing/2014/main" id="{2EE8F343-A95F-2AAA-FE9E-A6C31E298DF7}"/>
-              </a:ext>
-            </a:extLst>
-          </p:cNvPr>
-          <p:cNvSpPr>
-            <a:spLocks xmlns:a="http://schemas.openxmlformats.org/drawingml/2006/main" noGrp="1"/>
-          </p:cNvSpPr>
-          <p:nvPr/>
-        </p:nvSpPr>
-        <p:spPr>
-          <a:xfrm xmlns:a="http://schemas.openxmlformats.org/drawingml/2006/main">
-            <a:off x="6256618" y="2031999"/>
-            <a:ext cx="5537200" cy="3534787"/>
-          </a:xfrm>
-          <a:prstGeom xmlns:a="http://schemas.openxmlformats.org/drawingml/2006/main" prst="rect">
-            <a:avLst/>
-          </a:prstGeom>
-        </p:spPr>
-        <p:txBody>
-          <a:bodyPr xmlns:a="http://schemas.openxmlformats.org/drawingml/2006/main" lIns="0" tIns="0" rIns="0" bIns="0" anchor="t">
-            <a:noAutofit/>
-          </a:bodyPr>
-          <a:lstStyle xmlns:a="http://schemas.openxmlformats.org/drawingml/2006/main">
-            <a:defPPr>
-              <a:defRPr sz="1800">
-                <a:solidFill>
-                  <a:srgbClr val="FFFFFF"/>
-                </a:solidFill>
-                <a:latin typeface="Consolas"/>
-                <a:ea typeface="Consolas"/>
-                <a:cs typeface="Consolas"/>
-              </a:defRPr>
-            </a:defPPr>
-            <a:lvl1pPr marL="228600" indent="-228600" algn="l" defTabSz="914400">
-              <a:lnSpc>
-                <a:spcPct val="90000"/>
-              </a:lnSpc>
-              <a:spcBef>
-                <a:spcPts val="1000"/>
-              </a:spcBef>
-              <a:buFont typeface="Arial"/>
-              <a:buChar char="•"/>
-              <a:defRPr sz="2400" kern="1200">
-                <a:solidFill>
-                  <a:schemeClr val="tx1"/>
-                </a:solidFill>
-                <a:latin typeface="+mn-lt"/>
-                <a:ea typeface="+mn-lt"/>
-                <a:cs typeface="+mn-lt"/>
-              </a:defRPr>
-            </a:lvl1pPr>
-            <a:lvl2pPr marL="685800" indent="-228600" algn="l" defTabSz="914400">
-              <a:lnSpc>
-                <a:spcPct val="90000"/>
-              </a:lnSpc>
-              <a:spcBef>
-                <a:spcPts val="500"/>
-              </a:spcBef>
-              <a:buFont typeface="Arial"/>
-              <a:buChar char="•"/>
-              <a:defRPr sz="2000" kern="1200">
-                <a:solidFill>
-                  <a:schemeClr val="tx1"/>
-                </a:solidFill>
-                <a:latin typeface="+mn-lt"/>
-                <a:ea typeface="+mn-lt"/>
-                <a:cs typeface="+mn-lt"/>
-              </a:defRPr>
-            </a:lvl2pPr>
-            <a:lvl3pPr marL="1143000" indent="-228600" algn="l" defTabSz="914400">
-              <a:lnSpc>
-                <a:spcPct val="90000"/>
-              </a:lnSpc>
-              <a:spcBef>
-                <a:spcPts val="500"/>
-              </a:spcBef>
-              <a:buFont typeface="Arial"/>
-              <a:buChar char="•"/>
-              <a:defRPr sz="1800" kern="1200">
-                <a:solidFill>
-                  <a:schemeClr val="tx1"/>
-                </a:solidFill>
-                <a:latin typeface="+mn-lt"/>
-                <a:ea typeface="+mn-lt"/>
-                <a:cs typeface="+mn-lt"/>
-              </a:defRPr>
-            </a:lvl3pPr>
-            <a:lvl4pPr marL="1600200" indent="-228600" algn="l" defTabSz="914400">
-              <a:lnSpc>
-                <a:spcPct val="90000"/>
-              </a:lnSpc>
-              <a:spcBef>
-                <a:spcPts val="500"/>
-              </a:spcBef>
-              <a:buFont typeface="Arial"/>
-              <a:buChar char="•"/>
-              <a:defRPr sz="1800" kern="1200">
-                <a:solidFill>
-                  <a:schemeClr val="tx1"/>
-                </a:solidFill>
-                <a:latin typeface="+mn-lt"/>
-                <a:ea typeface="+mn-lt"/>
-                <a:cs typeface="+mn-lt"/>
-              </a:defRPr>
-            </a:lvl4pPr>
-            <a:lvl5pPr marL="2057400" indent="-228600" algn="l" defTabSz="914400">
-              <a:lnSpc>
-                <a:spcPct val="90000"/>
-              </a:lnSpc>
-              <a:spcBef>
-                <a:spcPts val="500"/>
-              </a:spcBef>
-              <a:buFont typeface="Arial"/>
-              <a:buChar char="•"/>
-              <a:defRPr sz="1800" kern="1200">
-                <a:solidFill>
-                  <a:schemeClr val="tx1"/>
-                </a:solidFill>
-                <a:latin typeface="+mn-lt"/>
-                <a:ea typeface="+mn-lt"/>
-                <a:cs typeface="+mn-lt"/>
-              </a:defRPr>
-            </a:lvl5pPr>
-            <a:lvl6pPr marL="2514600" indent="-228600" algn="l" defTabSz="914400">
-              <a:lnSpc>
-                <a:spcPct val="90000"/>
-              </a:lnSpc>
-              <a:spcBef>
-                <a:spcPts val="500"/>
-              </a:spcBef>
-              <a:buFont typeface="Arial"/>
-              <a:buChar char="•"/>
-              <a:defRPr sz="1800" kern="1200">
-                <a:solidFill>
-                  <a:schemeClr val="tx1"/>
-                </a:solidFill>
-                <a:latin typeface="+mn-lt"/>
-                <a:ea typeface="+mn-lt"/>
-                <a:cs typeface="+mn-lt"/>
-              </a:defRPr>
-            </a:lvl6pPr>
-            <a:lvl7pPr marL="2971800" indent="-228600" algn="l" defTabSz="914400">
-              <a:lnSpc>
-                <a:spcPct val="90000"/>
-              </a:lnSpc>
-              <a:spcBef>
-                <a:spcPts val="500"/>
-              </a:spcBef>
-              <a:buFont typeface="Arial"/>
-              <a:buChar char="•"/>
-              <a:defRPr sz="1800" kern="1200">
-                <a:solidFill>
-                  <a:schemeClr val="tx1"/>
-                </a:solidFill>
-                <a:latin typeface="+mn-lt"/>
-                <a:ea typeface="+mn-lt"/>
-                <a:cs typeface="+mn-lt"/>
-              </a:defRPr>
-            </a:lvl7pPr>
-            <a:lvl8pPr marL="3429000" indent="-228600" algn="l" defTabSz="914400">
-              <a:lnSpc>
-                <a:spcPct val="90000"/>
-              </a:lnSpc>
-              <a:spcBef>
-                <a:spcPts val="500"/>
-              </a:spcBef>
-              <a:buFont typeface="Arial"/>
-              <a:buChar char="•"/>
-              <a:defRPr sz="1800" kern="1200">
-                <a:solidFill>
-                  <a:schemeClr val="tx1"/>
-                </a:solidFill>
-                <a:latin typeface="+mn-lt"/>
-                <a:ea typeface="+mn-lt"/>
-                <a:cs typeface="+mn-lt"/>
-              </a:defRPr>
-            </a:lvl8pPr>
-            <a:lvl9pPr marL="3886200" indent="-228600" algn="l" defTabSz="914400">
-              <a:lnSpc>
-                <a:spcPct val="90000"/>
-              </a:lnSpc>
-              <a:spcBef>
-                <a:spcPts val="500"/>
-              </a:spcBef>
-              <a:buFont typeface="Arial"/>
-              <a:buChar char="•"/>
-              <a:defRPr sz="1800" kern="1200">
-                <a:solidFill>
-                  <a:schemeClr val="tx1"/>
-                </a:solidFill>
-                <a:latin typeface="+mn-lt"/>
-                <a:ea typeface="+mn-lt"/>
-                <a:cs typeface="+mn-lt"/>
-              </a:defRPr>
-            </a:lvl9pPr>
-          </a:lstStyle>
-          <a:p xmlns:a="http://schemas.openxmlformats.org/drawingml/2006/main">
-            <a:pPr marL="0" indent="0">
-              <a:lnSpc>
-                <a:spcPct val="112000"/>
-              </a:lnSpc>
-              <a:spcBef>
-                <a:spcPts val="0"/>
-              </a:spcBef>
-              <a:spcAft>
-                <a:spcPts val="0"/>
-              </a:spcAft>
-              <a:buNone/>
-              <a:defRPr sz="1800">
-                <a:solidFill>
-                  <a:srgbClr val="FFFFFF"/>
-                </a:solidFill>
-                <a:latin typeface="Consolas"/>
-                <a:ea typeface="Consolas"/>
-                <a:cs typeface="Consolas"/>
-              </a:defRPr>
-            </a:pPr>
-            <a:r>
-              <a:rPr sz="1800">
-                <a:solidFill>
-                  <a:srgbClr val="FFFFFF"/>
-                </a:solidFill>
-                <a:latin typeface="Consolas"/>
-                <a:ea typeface="Consolas"/>
-                <a:cs typeface="Consolas"/>
-              </a:rPr>
-              <a:t># AT&amp;T: source, destination</a:t>
-            </a:r>
-          </a:p>
-          <a:p xmlns:a="http://schemas.openxmlformats.org/drawingml/2006/main">
-            <a:pPr marL="0" indent="0">
-              <a:lnSpc>
-                <a:spcPct val="112000"/>
-              </a:lnSpc>
-              <a:spcBef>
-                <a:spcPts val="0"/>
-              </a:spcBef>
-              <a:spcAft>
-                <a:spcPts val="0"/>
-              </a:spcAft>
-              <a:buNone/>
-              <a:defRPr sz="1800">
-                <a:solidFill>
-                  <a:srgbClr val="FFFFFF"/>
-                </a:solidFill>
-                <a:latin typeface="Consolas"/>
-                <a:ea typeface="Consolas"/>
-                <a:cs typeface="Consolas"/>
-              </a:defRPr>
-            </a:pPr>
-            <a:r>
-              <a:rPr sz="1800">
-                <a:solidFill>
-                  <a:srgbClr val="FFFFFF"/>
-                </a:solidFill>
-                <a:latin typeface="Consolas"/>
-                <a:ea typeface="Consolas"/>
-                <a:cs typeface="Consolas"/>
-              </a:rPr>
-              <a:t>mulss %xmm1, %xmm0</a:t>
-            </a:r>
-          </a:p>
-          <a:p xmlns:a="http://schemas.openxmlformats.org/drawingml/2006/main">
-            <a:pPr marL="0" indent="0">
-              <a:lnSpc>
-                <a:spcPct val="112000"/>
-              </a:lnSpc>
-              <a:spcBef>
-                <a:spcPts val="0"/>
-              </a:spcBef>
-              <a:spcAft>
-                <a:spcPts val="0"/>
-              </a:spcAft>
-              <a:buNone/>
-              <a:defRPr sz="1800">
-                <a:solidFill>
-                  <a:srgbClr val="FFFFFF"/>
-                </a:solidFill>
-                <a:latin typeface="Consolas"/>
-                <a:ea typeface="Consolas"/>
-                <a:cs typeface="Consolas"/>
-              </a:defRPr>
-            </a:pPr>
-            <a:r>
-              <a:rPr sz="1800">
-                <a:solidFill>
-                  <a:srgbClr val="FFFFFF"/>
-                </a:solidFill>
-                <a:latin typeface="Consolas"/>
-                <a:ea typeface="Consolas"/>
-                <a:cs typeface="Consolas"/>
-              </a:rPr>
-              <a:t>addss %xmm1, %xmm0</a:t>
-            </a:r>
-          </a:p>
-          <a:p xmlns:a="http://schemas.openxmlformats.org/drawingml/2006/main">
-            <a:pPr marL="0" indent="0">
-              <a:lnSpc>
-                <a:spcPct val="112000"/>
-              </a:lnSpc>
-              <a:spcBef>
-                <a:spcPts val="0"/>
-              </a:spcBef>
-              <a:spcAft>
-                <a:spcPts val="0"/>
-              </a:spcAft>
-              <a:buNone/>
-              <a:defRPr sz="1800">
-                <a:solidFill>
-                  <a:srgbClr val="FFFFFF"/>
-                </a:solidFill>
-                <a:latin typeface="Consolas"/>
-                <a:ea typeface="Consolas"/>
-                <a:cs typeface="Consolas"/>
-              </a:defRPr>
-            </a:pPr>
-            <a:r>
-              <a:rPr sz="1800">
-                <a:solidFill>
-                  <a:srgbClr val="FFFFFF"/>
-                </a:solidFill>
-                <a:latin typeface="Consolas"/>
-                <a:ea typeface="Consolas"/>
-                <a:cs typeface="Consolas"/>
-              </a:rPr>
-              <a:t>cvtss2sd %xmm0, %xmm0</a:t>
-            </a:r>
-          </a:p>
-          <a:p xmlns:a="http://schemas.openxmlformats.org/drawingml/2006/main">
-            <a:pPr marL="0" indent="0">
-              <a:lnSpc>
-                <a:spcPct val="112000"/>
-              </a:lnSpc>
-              <a:spcBef>
-                <a:spcPts val="0"/>
-              </a:spcBef>
-              <a:spcAft>
-                <a:spcPts val="0"/>
-              </a:spcAft>
-              <a:buNone/>
-            </a:pPr>
-            <a:r>
-              <a:t/>
-            </a:r>
-          </a:p>
-          <a:p xmlns:a="http://schemas.openxmlformats.org/drawingml/2006/main">
-            <a:pPr marL="0" indent="0">
-              <a:lnSpc>
-                <a:spcPct val="112000"/>
-              </a:lnSpc>
-              <a:spcBef>
-                <a:spcPts val="0"/>
-              </a:spcBef>
-              <a:spcAft>
-                <a:spcPts val="0"/>
-              </a:spcAft>
-              <a:buNone/>
-              <a:defRPr sz="1800">
-                <a:solidFill>
-                  <a:srgbClr val="FFFFFF"/>
-                </a:solidFill>
-                <a:latin typeface="Consolas"/>
-                <a:ea typeface="Consolas"/>
-                <a:cs typeface="Consolas"/>
-              </a:defRPr>
-            </a:pPr>
-            <a:r>
-              <a:rPr sz="1800">
-                <a:solidFill>
-                  <a:srgbClr val="FFFFFF"/>
-                </a:solidFill>
-                <a:latin typeface="Consolas"/>
-                <a:ea typeface="Consolas"/>
-                <a:cs typeface="Consolas"/>
-              </a:rPr>
-              <a:t>ss = scalar single precision</a:t>
-            </a:r>
-          </a:p>
-          <a:p xmlns:a="http://schemas.openxmlformats.org/drawingml/2006/main">
-            <a:pPr marL="0" indent="0">
-              <a:lnSpc>
-                <a:spcPct val="112000"/>
-              </a:lnSpc>
-              <a:spcBef>
-                <a:spcPts val="0"/>
-              </a:spcBef>
-              <a:spcAft>
-                <a:spcPts val="0"/>
-              </a:spcAft>
-              <a:buNone/>
-              <a:defRPr sz="1800">
-                <a:solidFill>
-                  <a:srgbClr val="FFFFFF"/>
-                </a:solidFill>
-                <a:latin typeface="Consolas"/>
-                <a:ea typeface="Consolas"/>
-                <a:cs typeface="Consolas"/>
-              </a:defRPr>
-            </a:pPr>
-            <a:r>
-              <a:rPr sz="1800">
-                <a:solidFill>
-                  <a:srgbClr val="FFFFFF"/>
-                </a:solidFill>
-                <a:latin typeface="Consolas"/>
-                <a:ea typeface="Consolas"/>
-                <a:cs typeface="Consolas"/>
-              </a:rPr>
-              <a:t>sd = scalar double precision</a:t>
-            </a:r>
-          </a:p>
-        </p:txBody>
-      </p:sp>
-      <p:sp>
-        <p:nvSpPr>
-          <p:cNvPr id="534" name="Takeaway">
-            <a:extLst xmlns:a="http://schemas.openxmlformats.org/drawingml/2006/main">
-              <a:ext uri="{FF2B5EF4-FFF2-40B4-BE49-F238E27FC236}">
-                <a16:creationId xmlns:a16="http://schemas.microsoft.com/office/drawing/2014/main" id="{712A850F-E2D7-4EA8-AD7E-970A047A6A31}"/>
-              </a:ext>
-            </a:extLst>
-          </p:cNvPr>
-          <p:cNvSpPr>
-            <a:spLocks xmlns:a="http://schemas.openxmlformats.org/drawingml/2006/main" noGrp="1"/>
-          </p:cNvSpPr>
-          <p:nvPr/>
-        </p:nvSpPr>
-        <p:spPr>
-          <a:xfrm xmlns:a="http://schemas.openxmlformats.org/drawingml/2006/main">
-            <a:off x="393668" y="5715000"/>
-            <a:ext cx="11404283" cy="466725"/>
-          </a:xfrm>
-          <a:prstGeom xmlns:a="http://schemas.openxmlformats.org/drawingml/2006/main" prst="rect">
-            <a:avLst/>
-          </a:prstGeom>
-          <a:noFill xmlns:a="http://schemas.openxmlformats.org/drawingml/2006/main"/>
-          <a:ln xmlns:a="http://schemas.openxmlformats.org/drawingml/2006/main" w="0">
-            <a:noFill/>
-          </a:ln>
-        </p:spPr>
-        <p:txBody>
-          <a:bodyPr xmlns:a="http://schemas.openxmlformats.org/drawingml/2006/main" lIns="0" tIns="0" rIns="0" bIns="0" anchor="t">
-            <a:noAutofit/>
-          </a:bodyPr>
-          <a:lstStyle xmlns:a="http://schemas.openxmlformats.org/drawingml/2006/main">
-            <a:defPPr>
-              <a:defRPr sz="1350">
-                <a:solidFill>
-                  <a:srgbClr val="CCCCCC"/>
-                </a:solidFill>
-                <a:latin typeface="Arial"/>
-                <a:ea typeface="Arial"/>
-                <a:cs typeface="Arial"/>
-              </a:defRPr>
-            </a:defPPr>
-          </a:lstStyle>
-          <a:p xmlns:a="http://schemas.openxmlformats.org/drawingml/2006/main">
-            <a:pPr marL="0" indent="0">
-              <a:lnSpc>
-                <a:spcPct val="112000"/>
-              </a:lnSpc>
-              <a:spcBef>
-                <a:spcPts val="0"/>
-              </a:spcBef>
-              <a:spcAft>
-                <a:spcPts val="0"/>
-              </a:spcAft>
-              <a:buNone/>
-              <a:defRPr sz="1350">
-                <a:solidFill>
-                  <a:srgbClr val="CCCCCC"/>
-                </a:solidFill>
-                <a:latin typeface="Arial"/>
-                <a:ea typeface="Arial"/>
-                <a:cs typeface="Arial"/>
-              </a:defRPr>
-            </a:pPr>
-            <a:r>
-              <a:rPr sz="1350">
-                <a:solidFill>
-                  <a:srgbClr val="CCCCCC"/>
-                </a:solidFill>
-                <a:latin typeface="Arial"/>
-                <a:ea typeface="Arial"/>
-                <a:cs typeface="Arial"/>
-              </a:rPr>
-              <a:t>For these operations, %xmm0 is the destination; %xmm1 stays unchanged.</a:t>
             </a:r>
           </a:p>
         </p:txBody>
@@ -11825,7 +6525,7 @@
                 <a:ea typeface="Arial"/>
                 <a:cs typeface="Arial"/>
               </a:rPr>
-              <a:t>15</a:t>
+              <a:t>11</a:t>
             </a:r>
           </a:p>
         </p:txBody>
@@ -12715,2169 +7415,6 @@
                 <a:cs typeface="Arial"/>
               </a:rPr>
               <a:t>Stack exhaustion is different from writing past the end of a stack buffer.</a:t>
-            </a:r>
-          </a:p>
-        </p:txBody>
-      </p:sp>
-    </p:spTree>
-    <p:extLst>
-      <p:ext uri="{BB962C8B-B14F-4D97-AF65-F5344CB8AC3E}">
-        <p14:creationId xmlns:p14="http://schemas.microsoft.com/office/powerpoint/2010/main" val="3667182145"/>
-      </p:ext>
-    </p:extLst>
-  </p:cSld>
-</p:sld>
-</file>
-
-<file path=ppt/slides/slide16.xml><?xml version="1.0" encoding="utf-8"?>
-<p:sld xmlns:p="http://schemas.openxmlformats.org/presentationml/2006/main">
-  <p:cSld>
-    <p:spTree>
-      <p:nvGrpSpPr>
-        <p:cNvPr id="1" name=""/>
-        <p:cNvGrpSpPr/>
-        <p:nvPr/>
-      </p:nvGrpSpPr>
-      <p:grpSpPr>
-        <a:xfrm xmlns:a="http://schemas.openxmlformats.org/drawingml/2006/main"/>
-      </p:grpSpPr>
-      <p:sp>
-        <p:nvSpPr>
-          <p:cNvPr id="3" name="Footer Placeholder 2">
-            <a:extLst xmlns:a="http://schemas.openxmlformats.org/drawingml/2006/main">
-              <a:ext uri="{FF2B5EF4-FFF2-40B4-BE49-F238E27FC236}">
-                <a16:creationId xmlns:a16="http://schemas.microsoft.com/office/drawing/2014/main" id="{39EA4C82-C623-0196-4A95-876ADF5DEE92}"/>
-              </a:ext>
-            </a:extLst>
-          </p:cNvPr>
-          <p:cNvSpPr>
-            <a:spLocks xmlns:a="http://schemas.openxmlformats.org/drawingml/2006/main" noGrp="1"/>
-          </p:cNvSpPr>
-          <p:nvPr>
-            <p:ph type="ftr" idx="3"/>
-          </p:nvPr>
-        </p:nvSpPr>
-        <p:spPr>
-          <a:xfrm xmlns:a="http://schemas.openxmlformats.org/drawingml/2006/main">
-            <a:off x="393700" y="6279952"/>
-            <a:ext cx="3568700" cy="241240"/>
-          </a:xfrm>
-        </p:spPr>
-        <p:txBody>
-          <a:bodyPr xmlns:a="http://schemas.openxmlformats.org/drawingml/2006/main" lIns="0" tIns="0" rIns="0" bIns="0" anchor="t">
-            <a:noAutofit/>
-          </a:bodyPr>
-          <a:lstStyle xmlns:a="http://schemas.openxmlformats.org/drawingml/2006/main">
-            <a:defPPr>
-              <a:defRPr sz="1125">
-                <a:solidFill>
-                  <a:srgbClr val="FFFFFF"/>
-                </a:solidFill>
-                <a:latin typeface="Arial"/>
-                <a:ea typeface="Arial"/>
-                <a:cs typeface="Arial"/>
-              </a:defRPr>
-            </a:defPPr>
-          </a:lstStyle>
-          <a:p xmlns:a="http://schemas.openxmlformats.org/drawingml/2006/main">
-            <a:pPr marL="0" indent="0">
-              <a:lnSpc>
-                <a:spcPct val="112000"/>
-              </a:lnSpc>
-              <a:spcBef>
-                <a:spcPts val="0"/>
-              </a:spcBef>
-              <a:spcAft>
-                <a:spcPts val="0"/>
-              </a:spcAft>
-              <a:buNone/>
-              <a:defRPr sz="1125">
-                <a:solidFill>
-                  <a:srgbClr val="FFFFFF"/>
-                </a:solidFill>
-                <a:latin typeface="Arial"/>
-                <a:ea typeface="Arial"/>
-                <a:cs typeface="Arial"/>
-              </a:defRPr>
-            </a:pPr>
-            <a:r>
-              <a:rPr sz="1125">
-                <a:solidFill>
-                  <a:srgbClr val="FFFFFF"/>
-                </a:solidFill>
-                <a:latin typeface="Arial"/>
-                <a:ea typeface="Arial"/>
-                <a:cs typeface="Arial"/>
-              </a:rPr>
-              <a:t>CS 211 · Recitation 06</a:t>
-            </a:r>
-          </a:p>
-        </p:txBody>
-      </p:sp>
-      <p:sp>
-        <p:nvSpPr>
-          <p:cNvPr id="532" name="Google Shape;532;p58">
-            <a:extLst xmlns:a="http://schemas.openxmlformats.org/drawingml/2006/main">
-              <a:ext uri="{FF2B5EF4-FFF2-40B4-BE49-F238E27FC236}">
-                <a16:creationId xmlns:a16="http://schemas.microsoft.com/office/drawing/2014/main" id="{1BCBE750-7048-686D-1472-52C53362D6CD}"/>
-              </a:ext>
-            </a:extLst>
-          </p:cNvPr>
-          <p:cNvSpPr>
-            <a:spLocks xmlns:a="http://schemas.openxmlformats.org/drawingml/2006/main" noGrp="1"/>
-          </p:cNvSpPr>
-          <p:nvPr>
-            <p:ph type="sldNum" idx="4"/>
-          </p:nvPr>
-        </p:nvSpPr>
-        <p:spPr>
-          <a:xfrm xmlns:a="http://schemas.openxmlformats.org/drawingml/2006/main">
-            <a:off x="11279332" y="6279294"/>
-            <a:ext cx="518968" cy="241240"/>
-          </a:xfrm>
-        </p:spPr>
-        <p:txBody>
-          <a:bodyPr xmlns:a="http://schemas.openxmlformats.org/drawingml/2006/main" spcFirstLastPara="1" vert="horz" wrap="square" lIns="0" tIns="0" rIns="0" bIns="0" anchor="t">
-            <a:noAutofit/>
-          </a:bodyPr>
-          <a:lstStyle xmlns:a="http://schemas.openxmlformats.org/drawingml/2006/main">
-            <a:defPPr>
-              <a:defRPr sz="1125">
-                <a:solidFill>
-                  <a:srgbClr val="FFFFFF"/>
-                </a:solidFill>
-                <a:latin typeface="Arial"/>
-                <a:ea typeface="Arial"/>
-                <a:cs typeface="Arial"/>
-              </a:defRPr>
-            </a:defPPr>
-          </a:lstStyle>
-          <a:p xmlns:a="http://schemas.openxmlformats.org/drawingml/2006/main">
-            <a:pPr marL="0" indent="0">
-              <a:lnSpc>
-                <a:spcPct val="112000"/>
-              </a:lnSpc>
-              <a:spcBef>
-                <a:spcPts val="0"/>
-              </a:spcBef>
-              <a:spcAft>
-                <a:spcPts val="0"/>
-              </a:spcAft>
-              <a:buNone/>
-              <a:defRPr sz="1125">
-                <a:solidFill>
-                  <a:srgbClr val="FFFFFF"/>
-                </a:solidFill>
-                <a:latin typeface="Arial"/>
-                <a:ea typeface="Arial"/>
-                <a:cs typeface="Arial"/>
-              </a:defRPr>
-            </a:pPr>
-            <a:r>
-              <a:rPr sz="1125">
-                <a:solidFill>
-                  <a:srgbClr val="FFFFFF"/>
-                </a:solidFill>
-                <a:latin typeface="Arial"/>
-                <a:ea typeface="Arial"/>
-                <a:cs typeface="Arial"/>
-              </a:rPr>
-              <a:t>16</a:t>
-            </a:r>
-          </a:p>
-        </p:txBody>
-      </p:sp>
-      <p:sp>
-        <p:nvSpPr>
-          <p:cNvPr id="533" name="Google Shape;533;p58">
-            <a:extLst xmlns:a="http://schemas.openxmlformats.org/drawingml/2006/main">
-              <a:ext uri="{FF2B5EF4-FFF2-40B4-BE49-F238E27FC236}">
-                <a16:creationId xmlns:a16="http://schemas.microsoft.com/office/drawing/2014/main" id="{1B5D55CD-1C17-7CD8-F26A-2DD65B067687}"/>
-              </a:ext>
-            </a:extLst>
-          </p:cNvPr>
-          <p:cNvSpPr>
-            <a:spLocks xmlns:a="http://schemas.openxmlformats.org/drawingml/2006/main" noGrp="1"/>
-          </p:cNvSpPr>
-          <p:nvPr>
-            <p:ph type="title" idx="0"/>
-          </p:nvPr>
-        </p:nvSpPr>
-        <p:spPr>
-          <a:xfrm xmlns:a="http://schemas.openxmlformats.org/drawingml/2006/main">
-            <a:off x="393700" y="344008"/>
-            <a:ext cx="11404600" cy="1047491"/>
-          </a:xfrm>
-        </p:spPr>
-        <p:txBody>
-          <a:bodyPr xmlns:a="http://schemas.openxmlformats.org/drawingml/2006/main" spcFirstLastPara="1" vert="horz" wrap="square" lIns="0" tIns="0" rIns="0" bIns="0" anchor="t">
-            <a:noAutofit/>
-          </a:bodyPr>
-          <a:lstStyle xmlns:a="http://schemas.openxmlformats.org/drawingml/2006/main">
-            <a:defPPr>
-              <a:defRPr sz="3150">
-                <a:solidFill>
-                  <a:srgbClr val="FFFFFF"/>
-                </a:solidFill>
-                <a:latin typeface="Arial"/>
-                <a:ea typeface="Arial"/>
-                <a:cs typeface="Arial"/>
-              </a:defRPr>
-            </a:defPPr>
-          </a:lstStyle>
-          <a:p xmlns:a="http://schemas.openxmlformats.org/drawingml/2006/main">
-            <a:pPr marL="0" indent="0">
-              <a:lnSpc>
-                <a:spcPct val="112000"/>
-              </a:lnSpc>
-              <a:spcBef>
-                <a:spcPts val="0"/>
-              </a:spcBef>
-              <a:spcAft>
-                <a:spcPts val="0"/>
-              </a:spcAft>
-              <a:buNone/>
-              <a:defRPr sz="3150">
-                <a:solidFill>
-                  <a:srgbClr val="FFFFFF"/>
-                </a:solidFill>
-                <a:latin typeface="Arial"/>
-                <a:ea typeface="Arial"/>
-                <a:cs typeface="Arial"/>
-              </a:defRPr>
-            </a:pPr>
-            <a:r>
-              <a:rPr sz="3150">
-                <a:solidFill>
-                  <a:srgbClr val="FFFFFF"/>
-                </a:solidFill>
-                <a:latin typeface="Arial"/>
-                <a:ea typeface="Arial"/>
-                <a:cs typeface="Arial"/>
-              </a:rPr>
-              <a:t>Practice: writing past a buffer</a:t>
-            </a:r>
-          </a:p>
-        </p:txBody>
-      </p:sp>
-      <p:sp>
-        <p:nvSpPr>
-          <p:cNvPr id="7" name="Google Shape;534;p58">
-            <a:extLst xmlns:a="http://schemas.openxmlformats.org/drawingml/2006/main">
-              <a:ext uri="{FF2B5EF4-FFF2-40B4-BE49-F238E27FC236}">
-                <a16:creationId xmlns:a16="http://schemas.microsoft.com/office/drawing/2014/main" id="{3A923FEE-B8D2-CD3A-ABBD-21770B40AA24}"/>
-              </a:ext>
-            </a:extLst>
-          </p:cNvPr>
-          <p:cNvSpPr>
-            <a:spLocks xmlns:a="http://schemas.openxmlformats.org/drawingml/2006/main" noGrp="1"/>
-          </p:cNvSpPr>
-          <p:nvPr/>
-        </p:nvSpPr>
-        <p:spPr>
-          <a:xfrm xmlns:a="http://schemas.openxmlformats.org/drawingml/2006/main">
-            <a:off x="393700" y="2031999"/>
-            <a:ext cx="5537200" cy="3534787"/>
-          </a:xfrm>
-          <a:prstGeom xmlns:a="http://schemas.openxmlformats.org/drawingml/2006/main" prst="rect">
-            <a:avLst/>
-          </a:prstGeom>
-        </p:spPr>
-        <p:txBody>
-          <a:bodyPr xmlns:a="http://schemas.openxmlformats.org/drawingml/2006/main" spcFirstLastPara="1" vert="horz" wrap="square" lIns="0" tIns="0" rIns="0" bIns="0" anchor="t">
-            <a:noAutofit/>
-          </a:bodyPr>
-          <a:lstStyle xmlns:a="http://schemas.openxmlformats.org/drawingml/2006/main">
-            <a:defPPr>
-              <a:defRPr sz="1875">
-                <a:solidFill>
-                  <a:srgbClr val="FFFFFF"/>
-                </a:solidFill>
-                <a:latin typeface="Arial"/>
-                <a:ea typeface="Arial"/>
-                <a:cs typeface="Arial"/>
-              </a:defRPr>
-            </a:defPPr>
-            <a:lvl1pPr marL="228600" indent="-228600" algn="l" defTabSz="914400">
-              <a:lnSpc>
-                <a:spcPct val="90000"/>
-              </a:lnSpc>
-              <a:spcBef>
-                <a:spcPts val="1000"/>
-              </a:spcBef>
-              <a:buFont typeface="Arial"/>
-              <a:buChar char="•"/>
-              <a:defRPr sz="2400" kern="1200">
-                <a:solidFill>
-                  <a:schemeClr val="tx1"/>
-                </a:solidFill>
-                <a:latin typeface="+mn-lt"/>
-                <a:ea typeface="+mn-lt"/>
-                <a:cs typeface="+mn-lt"/>
-              </a:defRPr>
-            </a:lvl1pPr>
-            <a:lvl2pPr marL="685800" indent="-228600" algn="l" defTabSz="914400">
-              <a:lnSpc>
-                <a:spcPct val="90000"/>
-              </a:lnSpc>
-              <a:spcBef>
-                <a:spcPts val="500"/>
-              </a:spcBef>
-              <a:buFont typeface="Arial"/>
-              <a:buChar char="•"/>
-              <a:defRPr sz="2000" kern="1200">
-                <a:solidFill>
-                  <a:schemeClr val="tx1"/>
-                </a:solidFill>
-                <a:latin typeface="+mn-lt"/>
-                <a:ea typeface="+mn-lt"/>
-                <a:cs typeface="+mn-lt"/>
-              </a:defRPr>
-            </a:lvl2pPr>
-            <a:lvl3pPr marL="1143000" indent="-228600" algn="l" defTabSz="914400">
-              <a:lnSpc>
-                <a:spcPct val="90000"/>
-              </a:lnSpc>
-              <a:spcBef>
-                <a:spcPts val="500"/>
-              </a:spcBef>
-              <a:buFont typeface="Arial"/>
-              <a:buChar char="•"/>
-              <a:defRPr sz="1800" kern="1200">
-                <a:solidFill>
-                  <a:schemeClr val="tx1"/>
-                </a:solidFill>
-                <a:latin typeface="+mn-lt"/>
-                <a:ea typeface="+mn-lt"/>
-                <a:cs typeface="+mn-lt"/>
-              </a:defRPr>
-            </a:lvl3pPr>
-            <a:lvl4pPr marL="1600200" indent="-228600" algn="l" defTabSz="914400">
-              <a:lnSpc>
-                <a:spcPct val="90000"/>
-              </a:lnSpc>
-              <a:spcBef>
-                <a:spcPts val="500"/>
-              </a:spcBef>
-              <a:buFont typeface="Arial"/>
-              <a:buChar char="•"/>
-              <a:defRPr sz="1800" kern="1200">
-                <a:solidFill>
-                  <a:schemeClr val="tx1"/>
-                </a:solidFill>
-                <a:latin typeface="+mn-lt"/>
-                <a:ea typeface="+mn-lt"/>
-                <a:cs typeface="+mn-lt"/>
-              </a:defRPr>
-            </a:lvl4pPr>
-            <a:lvl5pPr marL="2057400" indent="-228600" algn="l" defTabSz="914400">
-              <a:lnSpc>
-                <a:spcPct val="90000"/>
-              </a:lnSpc>
-              <a:spcBef>
-                <a:spcPts val="500"/>
-              </a:spcBef>
-              <a:buFont typeface="Arial"/>
-              <a:buChar char="•"/>
-              <a:defRPr sz="1800" kern="1200">
-                <a:solidFill>
-                  <a:schemeClr val="tx1"/>
-                </a:solidFill>
-                <a:latin typeface="+mn-lt"/>
-                <a:ea typeface="+mn-lt"/>
-                <a:cs typeface="+mn-lt"/>
-              </a:defRPr>
-            </a:lvl5pPr>
-            <a:lvl6pPr marL="2514600" indent="-228600" algn="l" defTabSz="914400">
-              <a:lnSpc>
-                <a:spcPct val="90000"/>
-              </a:lnSpc>
-              <a:spcBef>
-                <a:spcPts val="500"/>
-              </a:spcBef>
-              <a:buFont typeface="Arial"/>
-              <a:buChar char="•"/>
-              <a:defRPr sz="1800" kern="1200">
-                <a:solidFill>
-                  <a:schemeClr val="tx1"/>
-                </a:solidFill>
-                <a:latin typeface="+mn-lt"/>
-                <a:ea typeface="+mn-lt"/>
-                <a:cs typeface="+mn-lt"/>
-              </a:defRPr>
-            </a:lvl6pPr>
-            <a:lvl7pPr marL="2971800" indent="-228600" algn="l" defTabSz="914400">
-              <a:lnSpc>
-                <a:spcPct val="90000"/>
-              </a:lnSpc>
-              <a:spcBef>
-                <a:spcPts val="500"/>
-              </a:spcBef>
-              <a:buFont typeface="Arial"/>
-              <a:buChar char="•"/>
-              <a:defRPr sz="1800" kern="1200">
-                <a:solidFill>
-                  <a:schemeClr val="tx1"/>
-                </a:solidFill>
-                <a:latin typeface="+mn-lt"/>
-                <a:ea typeface="+mn-lt"/>
-                <a:cs typeface="+mn-lt"/>
-              </a:defRPr>
-            </a:lvl7pPr>
-            <a:lvl8pPr marL="3429000" indent="-228600" algn="l" defTabSz="914400">
-              <a:lnSpc>
-                <a:spcPct val="90000"/>
-              </a:lnSpc>
-              <a:spcBef>
-                <a:spcPts val="500"/>
-              </a:spcBef>
-              <a:buFont typeface="Arial"/>
-              <a:buChar char="•"/>
-              <a:defRPr sz="1800" kern="1200">
-                <a:solidFill>
-                  <a:schemeClr val="tx1"/>
-                </a:solidFill>
-                <a:latin typeface="+mn-lt"/>
-                <a:ea typeface="+mn-lt"/>
-                <a:cs typeface="+mn-lt"/>
-              </a:defRPr>
-            </a:lvl8pPr>
-            <a:lvl9pPr marL="3886200" indent="-228600" algn="l" defTabSz="914400">
-              <a:lnSpc>
-                <a:spcPct val="90000"/>
-              </a:lnSpc>
-              <a:spcBef>
-                <a:spcPts val="500"/>
-              </a:spcBef>
-              <a:buFont typeface="Arial"/>
-              <a:buChar char="•"/>
-              <a:defRPr sz="1800" kern="1200">
-                <a:solidFill>
-                  <a:schemeClr val="tx1"/>
-                </a:solidFill>
-                <a:latin typeface="+mn-lt"/>
-                <a:ea typeface="+mn-lt"/>
-                <a:cs typeface="+mn-lt"/>
-              </a:defRPr>
-            </a:lvl9pPr>
-          </a:lstStyle>
-          <a:p xmlns:a="http://schemas.openxmlformats.org/drawingml/2006/main">
-            <a:pPr marL="0" indent="0">
-              <a:lnSpc>
-                <a:spcPct val="112000"/>
-              </a:lnSpc>
-              <a:spcBef>
-                <a:spcPts val="0"/>
-              </a:spcBef>
-              <a:spcAft>
-                <a:spcPts val="0"/>
-              </a:spcAft>
-              <a:buNone/>
-              <a:defRPr sz="1875">
-                <a:solidFill>
-                  <a:srgbClr val="FFFFFF"/>
-                </a:solidFill>
-                <a:latin typeface="Arial"/>
-                <a:ea typeface="Arial"/>
-                <a:cs typeface="Arial"/>
-              </a:defRPr>
-            </a:pPr>
-            <a:r>
-              <a:rPr sz="1875">
-                <a:solidFill>
-                  <a:srgbClr val="FFFFFF"/>
-                </a:solidFill>
-                <a:latin typeface="Arial"/>
-                <a:ea typeface="Arial"/>
-                <a:cs typeface="Arial"/>
-              </a:rPr>
-              <a:t>How many bytes fit in name, including the terminating null byte?</a:t>
-            </a:r>
-          </a:p>
-          <a:p xmlns:a="http://schemas.openxmlformats.org/drawingml/2006/main">
-            <a:pPr marL="0" indent="0">
-              <a:lnSpc>
-                <a:spcPct val="112000"/>
-              </a:lnSpc>
-              <a:spcBef>
-                <a:spcPts val="0"/>
-              </a:spcBef>
-              <a:spcAft>
-                <a:spcPts val="0"/>
-              </a:spcAft>
-              <a:buNone/>
-            </a:pPr>
-            <a:r>
-              <a:t/>
-            </a:r>
-          </a:p>
-          <a:p xmlns:a="http://schemas.openxmlformats.org/drawingml/2006/main">
-            <a:pPr marL="0" indent="0">
-              <a:lnSpc>
-                <a:spcPct val="112000"/>
-              </a:lnSpc>
-              <a:spcBef>
-                <a:spcPts val="0"/>
-              </a:spcBef>
-              <a:spcAft>
-                <a:spcPts val="0"/>
-              </a:spcAft>
-              <a:buNone/>
-              <a:defRPr sz="1875">
-                <a:solidFill>
-                  <a:srgbClr val="FFFFFF"/>
-                </a:solidFill>
-                <a:latin typeface="Arial"/>
-                <a:ea typeface="Arial"/>
-                <a:cs typeface="Arial"/>
-              </a:defRPr>
-            </a:pPr>
-            <a:r>
-              <a:rPr sz="1875">
-                <a:solidFill>
-                  <a:srgbClr val="FFFFFF"/>
-                </a:solidFill>
-                <a:latin typeface="Arial"/>
-                <a:ea typeface="Arial"/>
-                <a:cs typeface="Arial"/>
-              </a:rPr>
-              <a:t>Identify the invalid write.</a:t>
-            </a:r>
-          </a:p>
-          <a:p xmlns:a="http://schemas.openxmlformats.org/drawingml/2006/main">
-            <a:pPr marL="0" indent="0">
-              <a:lnSpc>
-                <a:spcPct val="112000"/>
-              </a:lnSpc>
-              <a:spcBef>
-                <a:spcPts val="0"/>
-              </a:spcBef>
-              <a:spcAft>
-                <a:spcPts val="0"/>
-              </a:spcAft>
-              <a:buNone/>
-            </a:pPr>
-            <a:r>
-              <a:t/>
-            </a:r>
-          </a:p>
-          <a:p xmlns:a="http://schemas.openxmlformats.org/drawingml/2006/main">
-            <a:pPr marL="0" indent="0">
-              <a:lnSpc>
-                <a:spcPct val="112000"/>
-              </a:lnSpc>
-              <a:spcBef>
-                <a:spcPts val="0"/>
-              </a:spcBef>
-              <a:spcAft>
-                <a:spcPts val="0"/>
-              </a:spcAft>
-              <a:buNone/>
-              <a:defRPr sz="1875">
-                <a:solidFill>
-                  <a:srgbClr val="FFFFFF"/>
-                </a:solidFill>
-                <a:latin typeface="Arial"/>
-                <a:ea typeface="Arial"/>
-                <a:cs typeface="Arial"/>
-              </a:defRPr>
-            </a:pPr>
-            <a:r>
-              <a:rPr sz="1875">
-                <a:solidFill>
-                  <a:srgbClr val="FFFFFF"/>
-                </a:solidFill>
-                <a:latin typeface="Arial"/>
-                <a:ea typeface="Arial"/>
-                <a:cs typeface="Arial"/>
-              </a:rPr>
-              <a:t>Could it affect nearby stack data? Is a crash guaranteed?</a:t>
-            </a:r>
-          </a:p>
-        </p:txBody>
-      </p:sp>
-      <p:sp>
-        <p:nvSpPr>
-          <p:cNvPr id="8" name="Content Placeholder 3">
-            <a:extLst xmlns:a="http://schemas.openxmlformats.org/drawingml/2006/main">
-              <a:ext uri="{FF2B5EF4-FFF2-40B4-BE49-F238E27FC236}">
-                <a16:creationId xmlns:a16="http://schemas.microsoft.com/office/drawing/2014/main" id="{2EE8F343-A95F-2AAA-FE9E-A6C31E298DF7}"/>
-              </a:ext>
-            </a:extLst>
-          </p:cNvPr>
-          <p:cNvSpPr>
-            <a:spLocks xmlns:a="http://schemas.openxmlformats.org/drawingml/2006/main" noGrp="1"/>
-          </p:cNvSpPr>
-          <p:nvPr/>
-        </p:nvSpPr>
-        <p:spPr>
-          <a:xfrm xmlns:a="http://schemas.openxmlformats.org/drawingml/2006/main">
-            <a:off x="6256618" y="2031999"/>
-            <a:ext cx="5537200" cy="3534787"/>
-          </a:xfrm>
-          <a:prstGeom xmlns:a="http://schemas.openxmlformats.org/drawingml/2006/main" prst="rect">
-            <a:avLst/>
-          </a:prstGeom>
-        </p:spPr>
-        <p:txBody>
-          <a:bodyPr xmlns:a="http://schemas.openxmlformats.org/drawingml/2006/main" lIns="0" tIns="0" rIns="0" bIns="0" anchor="t">
-            <a:noAutofit/>
-          </a:bodyPr>
-          <a:lstStyle xmlns:a="http://schemas.openxmlformats.org/drawingml/2006/main">
-            <a:defPPr>
-              <a:defRPr sz="1800">
-                <a:solidFill>
-                  <a:srgbClr val="FFFFFF"/>
-                </a:solidFill>
-                <a:latin typeface="Consolas"/>
-                <a:ea typeface="Consolas"/>
-                <a:cs typeface="Consolas"/>
-              </a:defRPr>
-            </a:defPPr>
-            <a:lvl1pPr marL="228600" indent="-228600" algn="l" defTabSz="914400">
-              <a:lnSpc>
-                <a:spcPct val="90000"/>
-              </a:lnSpc>
-              <a:spcBef>
-                <a:spcPts val="1000"/>
-              </a:spcBef>
-              <a:buFont typeface="Arial"/>
-              <a:buChar char="•"/>
-              <a:defRPr sz="2400" kern="1200">
-                <a:solidFill>
-                  <a:schemeClr val="tx1"/>
-                </a:solidFill>
-                <a:latin typeface="+mn-lt"/>
-                <a:ea typeface="+mn-lt"/>
-                <a:cs typeface="+mn-lt"/>
-              </a:defRPr>
-            </a:lvl1pPr>
-            <a:lvl2pPr marL="685800" indent="-228600" algn="l" defTabSz="914400">
-              <a:lnSpc>
-                <a:spcPct val="90000"/>
-              </a:lnSpc>
-              <a:spcBef>
-                <a:spcPts val="500"/>
-              </a:spcBef>
-              <a:buFont typeface="Arial"/>
-              <a:buChar char="•"/>
-              <a:defRPr sz="2000" kern="1200">
-                <a:solidFill>
-                  <a:schemeClr val="tx1"/>
-                </a:solidFill>
-                <a:latin typeface="+mn-lt"/>
-                <a:ea typeface="+mn-lt"/>
-                <a:cs typeface="+mn-lt"/>
-              </a:defRPr>
-            </a:lvl2pPr>
-            <a:lvl3pPr marL="1143000" indent="-228600" algn="l" defTabSz="914400">
-              <a:lnSpc>
-                <a:spcPct val="90000"/>
-              </a:lnSpc>
-              <a:spcBef>
-                <a:spcPts val="500"/>
-              </a:spcBef>
-              <a:buFont typeface="Arial"/>
-              <a:buChar char="•"/>
-              <a:defRPr sz="1800" kern="1200">
-                <a:solidFill>
-                  <a:schemeClr val="tx1"/>
-                </a:solidFill>
-                <a:latin typeface="+mn-lt"/>
-                <a:ea typeface="+mn-lt"/>
-                <a:cs typeface="+mn-lt"/>
-              </a:defRPr>
-            </a:lvl3pPr>
-            <a:lvl4pPr marL="1600200" indent="-228600" algn="l" defTabSz="914400">
-              <a:lnSpc>
-                <a:spcPct val="90000"/>
-              </a:lnSpc>
-              <a:spcBef>
-                <a:spcPts val="500"/>
-              </a:spcBef>
-              <a:buFont typeface="Arial"/>
-              <a:buChar char="•"/>
-              <a:defRPr sz="1800" kern="1200">
-                <a:solidFill>
-                  <a:schemeClr val="tx1"/>
-                </a:solidFill>
-                <a:latin typeface="+mn-lt"/>
-                <a:ea typeface="+mn-lt"/>
-                <a:cs typeface="+mn-lt"/>
-              </a:defRPr>
-            </a:lvl4pPr>
-            <a:lvl5pPr marL="2057400" indent="-228600" algn="l" defTabSz="914400">
-              <a:lnSpc>
-                <a:spcPct val="90000"/>
-              </a:lnSpc>
-              <a:spcBef>
-                <a:spcPts val="500"/>
-              </a:spcBef>
-              <a:buFont typeface="Arial"/>
-              <a:buChar char="•"/>
-              <a:defRPr sz="1800" kern="1200">
-                <a:solidFill>
-                  <a:schemeClr val="tx1"/>
-                </a:solidFill>
-                <a:latin typeface="+mn-lt"/>
-                <a:ea typeface="+mn-lt"/>
-                <a:cs typeface="+mn-lt"/>
-              </a:defRPr>
-            </a:lvl5pPr>
-            <a:lvl6pPr marL="2514600" indent="-228600" algn="l" defTabSz="914400">
-              <a:lnSpc>
-                <a:spcPct val="90000"/>
-              </a:lnSpc>
-              <a:spcBef>
-                <a:spcPts val="500"/>
-              </a:spcBef>
-              <a:buFont typeface="Arial"/>
-              <a:buChar char="•"/>
-              <a:defRPr sz="1800" kern="1200">
-                <a:solidFill>
-                  <a:schemeClr val="tx1"/>
-                </a:solidFill>
-                <a:latin typeface="+mn-lt"/>
-                <a:ea typeface="+mn-lt"/>
-                <a:cs typeface="+mn-lt"/>
-              </a:defRPr>
-            </a:lvl6pPr>
-            <a:lvl7pPr marL="2971800" indent="-228600" algn="l" defTabSz="914400">
-              <a:lnSpc>
-                <a:spcPct val="90000"/>
-              </a:lnSpc>
-              <a:spcBef>
-                <a:spcPts val="500"/>
-              </a:spcBef>
-              <a:buFont typeface="Arial"/>
-              <a:buChar char="•"/>
-              <a:defRPr sz="1800" kern="1200">
-                <a:solidFill>
-                  <a:schemeClr val="tx1"/>
-                </a:solidFill>
-                <a:latin typeface="+mn-lt"/>
-                <a:ea typeface="+mn-lt"/>
-                <a:cs typeface="+mn-lt"/>
-              </a:defRPr>
-            </a:lvl7pPr>
-            <a:lvl8pPr marL="3429000" indent="-228600" algn="l" defTabSz="914400">
-              <a:lnSpc>
-                <a:spcPct val="90000"/>
-              </a:lnSpc>
-              <a:spcBef>
-                <a:spcPts val="500"/>
-              </a:spcBef>
-              <a:buFont typeface="Arial"/>
-              <a:buChar char="•"/>
-              <a:defRPr sz="1800" kern="1200">
-                <a:solidFill>
-                  <a:schemeClr val="tx1"/>
-                </a:solidFill>
-                <a:latin typeface="+mn-lt"/>
-                <a:ea typeface="+mn-lt"/>
-                <a:cs typeface="+mn-lt"/>
-              </a:defRPr>
-            </a:lvl8pPr>
-            <a:lvl9pPr marL="3886200" indent="-228600" algn="l" defTabSz="914400">
-              <a:lnSpc>
-                <a:spcPct val="90000"/>
-              </a:lnSpc>
-              <a:spcBef>
-                <a:spcPts val="500"/>
-              </a:spcBef>
-              <a:buFont typeface="Arial"/>
-              <a:buChar char="•"/>
-              <a:defRPr sz="1800" kern="1200">
-                <a:solidFill>
-                  <a:schemeClr val="tx1"/>
-                </a:solidFill>
-                <a:latin typeface="+mn-lt"/>
-                <a:ea typeface="+mn-lt"/>
-                <a:cs typeface="+mn-lt"/>
-              </a:defRPr>
-            </a:lvl9pPr>
-          </a:lstStyle>
-          <a:p xmlns:a="http://schemas.openxmlformats.org/drawingml/2006/main">
-            <a:pPr marL="0" indent="0">
-              <a:lnSpc>
-                <a:spcPct val="112000"/>
-              </a:lnSpc>
-              <a:spcBef>
-                <a:spcPts val="0"/>
-              </a:spcBef>
-              <a:spcAft>
-                <a:spcPts val="0"/>
-              </a:spcAft>
-              <a:buNone/>
-              <a:defRPr sz="1800">
-                <a:solidFill>
-                  <a:srgbClr val="FFFFFF"/>
-                </a:solidFill>
-                <a:latin typeface="Consolas"/>
-                <a:ea typeface="Consolas"/>
-                <a:cs typeface="Consolas"/>
-              </a:defRPr>
-            </a:pPr>
-            <a:r>
-              <a:rPr sz="1800">
-                <a:solidFill>
-                  <a:srgbClr val="FFFFFF"/>
-                </a:solidFill>
-                <a:latin typeface="Consolas"/>
-                <a:ea typeface="Consolas"/>
-                <a:cs typeface="Consolas"/>
-              </a:rPr>
-              <a:t>void label(void) {</a:t>
-            </a:r>
-          </a:p>
-          <a:p xmlns:a="http://schemas.openxmlformats.org/drawingml/2006/main">
-            <a:pPr marL="0" indent="0">
-              <a:lnSpc>
-                <a:spcPct val="112000"/>
-              </a:lnSpc>
-              <a:spcBef>
-                <a:spcPts val="0"/>
-              </a:spcBef>
-              <a:spcAft>
-                <a:spcPts val="0"/>
-              </a:spcAft>
-              <a:buNone/>
-              <a:defRPr sz="1800">
-                <a:solidFill>
-                  <a:srgbClr val="FFFFFF"/>
-                </a:solidFill>
-                <a:latin typeface="Consolas"/>
-                <a:ea typeface="Consolas"/>
-                <a:cs typeface="Consolas"/>
-              </a:defRPr>
-            </a:pPr>
-            <a:r>
-              <a:rPr sz="1800">
-                <a:solidFill>
-                  <a:srgbClr val="FFFFFF"/>
-                </a:solidFill>
-                <a:latin typeface="Consolas"/>
-                <a:ea typeface="Consolas"/>
-                <a:cs typeface="Consolas"/>
-              </a:rPr>
-              <a:t>    char name[4];</a:t>
-            </a:r>
-          </a:p>
-          <a:p xmlns:a="http://schemas.openxmlformats.org/drawingml/2006/main">
-            <a:pPr marL="0" indent="0">
-              <a:lnSpc>
-                <a:spcPct val="112000"/>
-              </a:lnSpc>
-              <a:spcBef>
-                <a:spcPts val="0"/>
-              </a:spcBef>
-              <a:spcAft>
-                <a:spcPts val="0"/>
-              </a:spcAft>
-              <a:buNone/>
-              <a:defRPr sz="1800">
-                <a:solidFill>
-                  <a:srgbClr val="FFFFFF"/>
-                </a:solidFill>
-                <a:latin typeface="Consolas"/>
-                <a:ea typeface="Consolas"/>
-                <a:cs typeface="Consolas"/>
-              </a:defRPr>
-            </a:pPr>
-            <a:r>
-              <a:rPr sz="1800">
-                <a:solidFill>
-                  <a:srgbClr val="FFFFFF"/>
-                </a:solidFill>
-                <a:latin typeface="Consolas"/>
-                <a:ea typeface="Consolas"/>
-                <a:cs typeface="Consolas"/>
-              </a:rPr>
-              <a:t>    name[0] = 'C';</a:t>
-            </a:r>
-          </a:p>
-          <a:p xmlns:a="http://schemas.openxmlformats.org/drawingml/2006/main">
-            <a:pPr marL="0" indent="0">
-              <a:lnSpc>
-                <a:spcPct val="112000"/>
-              </a:lnSpc>
-              <a:spcBef>
-                <a:spcPts val="0"/>
-              </a:spcBef>
-              <a:spcAft>
-                <a:spcPts val="0"/>
-              </a:spcAft>
-              <a:buNone/>
-              <a:defRPr sz="1800">
-                <a:solidFill>
-                  <a:srgbClr val="FFFFFF"/>
-                </a:solidFill>
-                <a:latin typeface="Consolas"/>
-                <a:ea typeface="Consolas"/>
-                <a:cs typeface="Consolas"/>
-              </a:defRPr>
-            </a:pPr>
-            <a:r>
-              <a:rPr sz="1800">
-                <a:solidFill>
-                  <a:srgbClr val="FFFFFF"/>
-                </a:solidFill>
-                <a:latin typeface="Consolas"/>
-                <a:ea typeface="Consolas"/>
-                <a:cs typeface="Consolas"/>
-              </a:rPr>
-              <a:t>    name[1] = 'S';</a:t>
-            </a:r>
-          </a:p>
-          <a:p xmlns:a="http://schemas.openxmlformats.org/drawingml/2006/main">
-            <a:pPr marL="0" indent="0">
-              <a:lnSpc>
-                <a:spcPct val="112000"/>
-              </a:lnSpc>
-              <a:spcBef>
-                <a:spcPts val="0"/>
-              </a:spcBef>
-              <a:spcAft>
-                <a:spcPts val="0"/>
-              </a:spcAft>
-              <a:buNone/>
-              <a:defRPr sz="1800">
-                <a:solidFill>
-                  <a:srgbClr val="FFFFFF"/>
-                </a:solidFill>
-                <a:latin typeface="Consolas"/>
-                <a:ea typeface="Consolas"/>
-                <a:cs typeface="Consolas"/>
-              </a:defRPr>
-            </a:pPr>
-            <a:r>
-              <a:rPr sz="1800">
-                <a:solidFill>
-                  <a:srgbClr val="FFFFFF"/>
-                </a:solidFill>
-                <a:latin typeface="Consolas"/>
-                <a:ea typeface="Consolas"/>
-                <a:cs typeface="Consolas"/>
-              </a:rPr>
-              <a:t>    name[2] = '2';</a:t>
-            </a:r>
-          </a:p>
-          <a:p xmlns:a="http://schemas.openxmlformats.org/drawingml/2006/main">
-            <a:pPr marL="0" indent="0">
-              <a:lnSpc>
-                <a:spcPct val="112000"/>
-              </a:lnSpc>
-              <a:spcBef>
-                <a:spcPts val="0"/>
-              </a:spcBef>
-              <a:spcAft>
-                <a:spcPts val="0"/>
-              </a:spcAft>
-              <a:buNone/>
-              <a:defRPr sz="1800">
-                <a:solidFill>
-                  <a:srgbClr val="FFFFFF"/>
-                </a:solidFill>
-                <a:latin typeface="Consolas"/>
-                <a:ea typeface="Consolas"/>
-                <a:cs typeface="Consolas"/>
-              </a:defRPr>
-            </a:pPr>
-            <a:r>
-              <a:rPr sz="1800">
-                <a:solidFill>
-                  <a:srgbClr val="FFFFFF"/>
-                </a:solidFill>
-                <a:latin typeface="Consolas"/>
-                <a:ea typeface="Consolas"/>
-                <a:cs typeface="Consolas"/>
-              </a:rPr>
-              <a:t>    name[3] = '1';</a:t>
-            </a:r>
-          </a:p>
-          <a:p xmlns:a="http://schemas.openxmlformats.org/drawingml/2006/main">
-            <a:pPr marL="0" indent="0">
-              <a:lnSpc>
-                <a:spcPct val="112000"/>
-              </a:lnSpc>
-              <a:spcBef>
-                <a:spcPts val="0"/>
-              </a:spcBef>
-              <a:spcAft>
-                <a:spcPts val="0"/>
-              </a:spcAft>
-              <a:buNone/>
-              <a:defRPr sz="1800">
-                <a:solidFill>
-                  <a:srgbClr val="FFFFFF"/>
-                </a:solidFill>
-                <a:latin typeface="Consolas"/>
-                <a:ea typeface="Consolas"/>
-                <a:cs typeface="Consolas"/>
-              </a:defRPr>
-            </a:pPr>
-            <a:r>
-              <a:rPr sz="1800">
-                <a:solidFill>
-                  <a:srgbClr val="FFFFFF"/>
-                </a:solidFill>
-                <a:latin typeface="Consolas"/>
-                <a:ea typeface="Consolas"/>
-                <a:cs typeface="Consolas"/>
-              </a:rPr>
-              <a:t>    name[4] = '\0';</a:t>
-            </a:r>
-          </a:p>
-          <a:p xmlns:a="http://schemas.openxmlformats.org/drawingml/2006/main">
-            <a:pPr marL="0" indent="0">
-              <a:lnSpc>
-                <a:spcPct val="112000"/>
-              </a:lnSpc>
-              <a:spcBef>
-                <a:spcPts val="0"/>
-              </a:spcBef>
-              <a:spcAft>
-                <a:spcPts val="0"/>
-              </a:spcAft>
-              <a:buNone/>
-              <a:defRPr sz="1800">
-                <a:solidFill>
-                  <a:srgbClr val="FFFFFF"/>
-                </a:solidFill>
-                <a:latin typeface="Consolas"/>
-                <a:ea typeface="Consolas"/>
-                <a:cs typeface="Consolas"/>
-              </a:defRPr>
-            </a:pPr>
-            <a:r>
-              <a:rPr sz="1800">
-                <a:solidFill>
-                  <a:srgbClr val="FFFFFF"/>
-                </a:solidFill>
-                <a:latin typeface="Consolas"/>
-                <a:ea typeface="Consolas"/>
-                <a:cs typeface="Consolas"/>
-              </a:rPr>
-              <a:t>}</a:t>
-            </a:r>
-          </a:p>
-        </p:txBody>
-      </p:sp>
-      <p:sp>
-        <p:nvSpPr>
-          <p:cNvPr id="534" name="Takeaway">
-            <a:extLst xmlns:a="http://schemas.openxmlformats.org/drawingml/2006/main">
-              <a:ext uri="{FF2B5EF4-FFF2-40B4-BE49-F238E27FC236}">
-                <a16:creationId xmlns:a16="http://schemas.microsoft.com/office/drawing/2014/main" id="{FB79E5B0-37D0-4DEB-A781-A77B02ECCAB6}"/>
-              </a:ext>
-            </a:extLst>
-          </p:cNvPr>
-          <p:cNvSpPr>
-            <a:spLocks xmlns:a="http://schemas.openxmlformats.org/drawingml/2006/main" noGrp="1"/>
-          </p:cNvSpPr>
-          <p:nvPr/>
-        </p:nvSpPr>
-        <p:spPr>
-          <a:xfrm xmlns:a="http://schemas.openxmlformats.org/drawingml/2006/main">
-            <a:off x="393668" y="5715000"/>
-            <a:ext cx="11404283" cy="466725"/>
-          </a:xfrm>
-          <a:prstGeom xmlns:a="http://schemas.openxmlformats.org/drawingml/2006/main" prst="rect">
-            <a:avLst/>
-          </a:prstGeom>
-          <a:noFill xmlns:a="http://schemas.openxmlformats.org/drawingml/2006/main"/>
-          <a:ln xmlns:a="http://schemas.openxmlformats.org/drawingml/2006/main" w="0">
-            <a:noFill/>
-          </a:ln>
-        </p:spPr>
-        <p:txBody>
-          <a:bodyPr xmlns:a="http://schemas.openxmlformats.org/drawingml/2006/main" lIns="0" tIns="0" rIns="0" bIns="0" anchor="t">
-            <a:noAutofit/>
-          </a:bodyPr>
-          <a:lstStyle xmlns:a="http://schemas.openxmlformats.org/drawingml/2006/main">
-            <a:defPPr>
-              <a:defRPr sz="1350">
-                <a:solidFill>
-                  <a:srgbClr val="CCCCCC"/>
-                </a:solidFill>
-                <a:latin typeface="Arial"/>
-                <a:ea typeface="Arial"/>
-                <a:cs typeface="Arial"/>
-              </a:defRPr>
-            </a:defPPr>
-          </a:lstStyle>
-          <a:p xmlns:a="http://schemas.openxmlformats.org/drawingml/2006/main">
-            <a:pPr marL="0" indent="0">
-              <a:lnSpc>
-                <a:spcPct val="112000"/>
-              </a:lnSpc>
-              <a:spcBef>
-                <a:spcPts val="0"/>
-              </a:spcBef>
-              <a:spcAft>
-                <a:spcPts val="0"/>
-              </a:spcAft>
-              <a:buNone/>
-              <a:defRPr sz="1350">
-                <a:solidFill>
-                  <a:srgbClr val="CCCCCC"/>
-                </a:solidFill>
-                <a:latin typeface="Arial"/>
-                <a:ea typeface="Arial"/>
-                <a:cs typeface="Arial"/>
-              </a:defRPr>
-            </a:pPr>
-            <a:r>
-              <a:rPr sz="1350">
-                <a:solidFill>
-                  <a:srgbClr val="CCCCCC"/>
-                </a:solidFill>
-                <a:latin typeface="Arial"/>
-                <a:ea typeface="Arial"/>
-                <a:cs typeface="Arial"/>
-              </a:rPr>
-              <a:t>An invalid write is undefined behavior even when the program appears to run normally.</a:t>
-            </a:r>
-          </a:p>
-        </p:txBody>
-      </p:sp>
-    </p:spTree>
-    <p:extLst>
-      <p:ext uri="{BB962C8B-B14F-4D97-AF65-F5344CB8AC3E}">
-        <p14:creationId xmlns:p14="http://schemas.microsoft.com/office/powerpoint/2010/main" val="3667182145"/>
-      </p:ext>
-    </p:extLst>
-  </p:cSld>
-</p:sld>
-</file>
-
-<file path=ppt/slides/slide17.xml><?xml version="1.0" encoding="utf-8"?>
-<p:sld xmlns:p="http://schemas.openxmlformats.org/presentationml/2006/main">
-  <p:cSld>
-    <p:spTree>
-      <p:nvGrpSpPr>
-        <p:cNvPr id="1" name=""/>
-        <p:cNvGrpSpPr/>
-        <p:nvPr/>
-      </p:nvGrpSpPr>
-      <p:grpSpPr>
-        <a:xfrm xmlns:a="http://schemas.openxmlformats.org/drawingml/2006/main"/>
-      </p:grpSpPr>
-      <p:sp>
-        <p:nvSpPr>
-          <p:cNvPr id="3" name="Footer Placeholder 2">
-            <a:extLst xmlns:a="http://schemas.openxmlformats.org/drawingml/2006/main">
-              <a:ext uri="{FF2B5EF4-FFF2-40B4-BE49-F238E27FC236}">
-                <a16:creationId xmlns:a16="http://schemas.microsoft.com/office/drawing/2014/main" id="{39EA4C82-C623-0196-4A95-876ADF5DEE92}"/>
-              </a:ext>
-            </a:extLst>
-          </p:cNvPr>
-          <p:cNvSpPr>
-            <a:spLocks xmlns:a="http://schemas.openxmlformats.org/drawingml/2006/main" noGrp="1"/>
-          </p:cNvSpPr>
-          <p:nvPr>
-            <p:ph type="ftr" idx="3"/>
-          </p:nvPr>
-        </p:nvSpPr>
-        <p:spPr>
-          <a:xfrm xmlns:a="http://schemas.openxmlformats.org/drawingml/2006/main">
-            <a:off x="393700" y="6279952"/>
-            <a:ext cx="3568700" cy="241240"/>
-          </a:xfrm>
-        </p:spPr>
-        <p:txBody>
-          <a:bodyPr xmlns:a="http://schemas.openxmlformats.org/drawingml/2006/main" lIns="0" tIns="0" rIns="0" bIns="0" anchor="t">
-            <a:noAutofit/>
-          </a:bodyPr>
-          <a:lstStyle xmlns:a="http://schemas.openxmlformats.org/drawingml/2006/main">
-            <a:defPPr>
-              <a:defRPr sz="1125">
-                <a:solidFill>
-                  <a:srgbClr val="FFFFFF"/>
-                </a:solidFill>
-                <a:latin typeface="Arial"/>
-                <a:ea typeface="Arial"/>
-                <a:cs typeface="Arial"/>
-              </a:defRPr>
-            </a:defPPr>
-          </a:lstStyle>
-          <a:p xmlns:a="http://schemas.openxmlformats.org/drawingml/2006/main">
-            <a:pPr marL="0" indent="0">
-              <a:lnSpc>
-                <a:spcPct val="112000"/>
-              </a:lnSpc>
-              <a:spcBef>
-                <a:spcPts val="0"/>
-              </a:spcBef>
-              <a:spcAft>
-                <a:spcPts val="0"/>
-              </a:spcAft>
-              <a:buNone/>
-              <a:defRPr sz="1125">
-                <a:solidFill>
-                  <a:srgbClr val="FFFFFF"/>
-                </a:solidFill>
-                <a:latin typeface="Arial"/>
-                <a:ea typeface="Arial"/>
-                <a:cs typeface="Arial"/>
-              </a:defRPr>
-            </a:pPr>
-            <a:r>
-              <a:rPr sz="1125">
-                <a:solidFill>
-                  <a:srgbClr val="FFFFFF"/>
-                </a:solidFill>
-                <a:latin typeface="Arial"/>
-                <a:ea typeface="Arial"/>
-                <a:cs typeface="Arial"/>
-              </a:rPr>
-              <a:t>CS 211 · Recitation 06</a:t>
-            </a:r>
-          </a:p>
-        </p:txBody>
-      </p:sp>
-      <p:sp>
-        <p:nvSpPr>
-          <p:cNvPr id="532" name="Google Shape;532;p58">
-            <a:extLst xmlns:a="http://schemas.openxmlformats.org/drawingml/2006/main">
-              <a:ext uri="{FF2B5EF4-FFF2-40B4-BE49-F238E27FC236}">
-                <a16:creationId xmlns:a16="http://schemas.microsoft.com/office/drawing/2014/main" id="{1BCBE750-7048-686D-1472-52C53362D6CD}"/>
-              </a:ext>
-            </a:extLst>
-          </p:cNvPr>
-          <p:cNvSpPr>
-            <a:spLocks xmlns:a="http://schemas.openxmlformats.org/drawingml/2006/main" noGrp="1"/>
-          </p:cNvSpPr>
-          <p:nvPr>
-            <p:ph type="sldNum" idx="4"/>
-          </p:nvPr>
-        </p:nvSpPr>
-        <p:spPr>
-          <a:xfrm xmlns:a="http://schemas.openxmlformats.org/drawingml/2006/main">
-            <a:off x="11279332" y="6279294"/>
-            <a:ext cx="518968" cy="241240"/>
-          </a:xfrm>
-        </p:spPr>
-        <p:txBody>
-          <a:bodyPr xmlns:a="http://schemas.openxmlformats.org/drawingml/2006/main" spcFirstLastPara="1" vert="horz" wrap="square" lIns="0" tIns="0" rIns="0" bIns="0" anchor="t">
-            <a:noAutofit/>
-          </a:bodyPr>
-          <a:lstStyle xmlns:a="http://schemas.openxmlformats.org/drawingml/2006/main">
-            <a:defPPr>
-              <a:defRPr sz="1125">
-                <a:solidFill>
-                  <a:srgbClr val="FFFFFF"/>
-                </a:solidFill>
-                <a:latin typeface="Arial"/>
-                <a:ea typeface="Arial"/>
-                <a:cs typeface="Arial"/>
-              </a:defRPr>
-            </a:defPPr>
-          </a:lstStyle>
-          <a:p xmlns:a="http://schemas.openxmlformats.org/drawingml/2006/main">
-            <a:pPr marL="0" indent="0">
-              <a:lnSpc>
-                <a:spcPct val="112000"/>
-              </a:lnSpc>
-              <a:spcBef>
-                <a:spcPts val="0"/>
-              </a:spcBef>
-              <a:spcAft>
-                <a:spcPts val="0"/>
-              </a:spcAft>
-              <a:buNone/>
-              <a:defRPr sz="1125">
-                <a:solidFill>
-                  <a:srgbClr val="FFFFFF"/>
-                </a:solidFill>
-                <a:latin typeface="Arial"/>
-                <a:ea typeface="Arial"/>
-                <a:cs typeface="Arial"/>
-              </a:defRPr>
-            </a:pPr>
-            <a:r>
-              <a:rPr sz="1125">
-                <a:solidFill>
-                  <a:srgbClr val="FFFFFF"/>
-                </a:solidFill>
-                <a:latin typeface="Arial"/>
-                <a:ea typeface="Arial"/>
-                <a:cs typeface="Arial"/>
-              </a:rPr>
-              <a:t>17</a:t>
-            </a:r>
-          </a:p>
-        </p:txBody>
-      </p:sp>
-      <p:sp>
-        <p:nvSpPr>
-          <p:cNvPr id="533" name="Google Shape;533;p58">
-            <a:extLst xmlns:a="http://schemas.openxmlformats.org/drawingml/2006/main">
-              <a:ext uri="{FF2B5EF4-FFF2-40B4-BE49-F238E27FC236}">
-                <a16:creationId xmlns:a16="http://schemas.microsoft.com/office/drawing/2014/main" id="{1B5D55CD-1C17-7CD8-F26A-2DD65B067687}"/>
-              </a:ext>
-            </a:extLst>
-          </p:cNvPr>
-          <p:cNvSpPr>
-            <a:spLocks xmlns:a="http://schemas.openxmlformats.org/drawingml/2006/main" noGrp="1"/>
-          </p:cNvSpPr>
-          <p:nvPr>
-            <p:ph type="title" idx="0"/>
-          </p:nvPr>
-        </p:nvSpPr>
-        <p:spPr>
-          <a:xfrm xmlns:a="http://schemas.openxmlformats.org/drawingml/2006/main">
-            <a:off x="393700" y="344008"/>
-            <a:ext cx="11404600" cy="1047491"/>
-          </a:xfrm>
-        </p:spPr>
-        <p:txBody>
-          <a:bodyPr xmlns:a="http://schemas.openxmlformats.org/drawingml/2006/main" spcFirstLastPara="1" vert="horz" wrap="square" lIns="0" tIns="0" rIns="0" bIns="0" anchor="t">
-            <a:noAutofit/>
-          </a:bodyPr>
-          <a:lstStyle xmlns:a="http://schemas.openxmlformats.org/drawingml/2006/main">
-            <a:defPPr>
-              <a:defRPr sz="3150">
-                <a:solidFill>
-                  <a:srgbClr val="FFFFFF"/>
-                </a:solidFill>
-                <a:latin typeface="Arial"/>
-                <a:ea typeface="Arial"/>
-                <a:cs typeface="Arial"/>
-              </a:defRPr>
-            </a:defPPr>
-          </a:lstStyle>
-          <a:p xmlns:a="http://schemas.openxmlformats.org/drawingml/2006/main">
-            <a:pPr marL="0" indent="0">
-              <a:lnSpc>
-                <a:spcPct val="112000"/>
-              </a:lnSpc>
-              <a:spcBef>
-                <a:spcPts val="0"/>
-              </a:spcBef>
-              <a:spcAft>
-                <a:spcPts val="0"/>
-              </a:spcAft>
-              <a:buNone/>
-              <a:defRPr sz="3150">
-                <a:solidFill>
-                  <a:srgbClr val="FFFFFF"/>
-                </a:solidFill>
-                <a:latin typeface="Arial"/>
-                <a:ea typeface="Arial"/>
-                <a:cs typeface="Arial"/>
-              </a:defRPr>
-            </a:pPr>
-            <a:r>
-              <a:rPr sz="3150">
-                <a:solidFill>
-                  <a:srgbClr val="FFFFFF"/>
-                </a:solidFill>
-                <a:latin typeface="Arial"/>
-                <a:ea typeface="Arial"/>
-                <a:cs typeface="Arial"/>
-              </a:rPr>
-              <a:t>Stack protections</a:t>
-            </a:r>
-          </a:p>
-        </p:txBody>
-      </p:sp>
-      <p:sp>
-        <p:nvSpPr>
-          <p:cNvPr id="7" name="Google Shape;534;p58">
-            <a:extLst xmlns:a="http://schemas.openxmlformats.org/drawingml/2006/main">
-              <a:ext uri="{FF2B5EF4-FFF2-40B4-BE49-F238E27FC236}">
-                <a16:creationId xmlns:a16="http://schemas.microsoft.com/office/drawing/2014/main" id="{3A923FEE-B8D2-CD3A-ABBD-21770B40AA24}"/>
-              </a:ext>
-            </a:extLst>
-          </p:cNvPr>
-          <p:cNvSpPr>
-            <a:spLocks xmlns:a="http://schemas.openxmlformats.org/drawingml/2006/main" noGrp="1"/>
-          </p:cNvSpPr>
-          <p:nvPr/>
-        </p:nvSpPr>
-        <p:spPr>
-          <a:xfrm xmlns:a="http://schemas.openxmlformats.org/drawingml/2006/main">
-            <a:off x="393700" y="2031999"/>
-            <a:ext cx="5537200" cy="3534787"/>
-          </a:xfrm>
-          <a:prstGeom xmlns:a="http://schemas.openxmlformats.org/drawingml/2006/main" prst="rect">
-            <a:avLst/>
-          </a:prstGeom>
-        </p:spPr>
-        <p:txBody>
-          <a:bodyPr xmlns:a="http://schemas.openxmlformats.org/drawingml/2006/main" spcFirstLastPara="1" vert="horz" wrap="square" lIns="0" tIns="0" rIns="0" bIns="0" anchor="t">
-            <a:noAutofit/>
-          </a:bodyPr>
-          <a:lstStyle xmlns:a="http://schemas.openxmlformats.org/drawingml/2006/main">
-            <a:defPPr>
-              <a:defRPr sz="1875">
-                <a:solidFill>
-                  <a:srgbClr val="FFFFFF"/>
-                </a:solidFill>
-                <a:latin typeface="Arial"/>
-                <a:ea typeface="Arial"/>
-                <a:cs typeface="Arial"/>
-              </a:defRPr>
-            </a:defPPr>
-            <a:lvl1pPr marL="228600" indent="-228600" algn="l" defTabSz="914400">
-              <a:lnSpc>
-                <a:spcPct val="90000"/>
-              </a:lnSpc>
-              <a:spcBef>
-                <a:spcPts val="1000"/>
-              </a:spcBef>
-              <a:buFont typeface="Arial"/>
-              <a:buChar char="•"/>
-              <a:defRPr sz="2400" kern="1200">
-                <a:solidFill>
-                  <a:schemeClr val="tx1"/>
-                </a:solidFill>
-                <a:latin typeface="+mn-lt"/>
-                <a:ea typeface="+mn-lt"/>
-                <a:cs typeface="+mn-lt"/>
-              </a:defRPr>
-            </a:lvl1pPr>
-            <a:lvl2pPr marL="685800" indent="-228600" algn="l" defTabSz="914400">
-              <a:lnSpc>
-                <a:spcPct val="90000"/>
-              </a:lnSpc>
-              <a:spcBef>
-                <a:spcPts val="500"/>
-              </a:spcBef>
-              <a:buFont typeface="Arial"/>
-              <a:buChar char="•"/>
-              <a:defRPr sz="2000" kern="1200">
-                <a:solidFill>
-                  <a:schemeClr val="tx1"/>
-                </a:solidFill>
-                <a:latin typeface="+mn-lt"/>
-                <a:ea typeface="+mn-lt"/>
-                <a:cs typeface="+mn-lt"/>
-              </a:defRPr>
-            </a:lvl2pPr>
-            <a:lvl3pPr marL="1143000" indent="-228600" algn="l" defTabSz="914400">
-              <a:lnSpc>
-                <a:spcPct val="90000"/>
-              </a:lnSpc>
-              <a:spcBef>
-                <a:spcPts val="500"/>
-              </a:spcBef>
-              <a:buFont typeface="Arial"/>
-              <a:buChar char="•"/>
-              <a:defRPr sz="1800" kern="1200">
-                <a:solidFill>
-                  <a:schemeClr val="tx1"/>
-                </a:solidFill>
-                <a:latin typeface="+mn-lt"/>
-                <a:ea typeface="+mn-lt"/>
-                <a:cs typeface="+mn-lt"/>
-              </a:defRPr>
-            </a:lvl3pPr>
-            <a:lvl4pPr marL="1600200" indent="-228600" algn="l" defTabSz="914400">
-              <a:lnSpc>
-                <a:spcPct val="90000"/>
-              </a:lnSpc>
-              <a:spcBef>
-                <a:spcPts val="500"/>
-              </a:spcBef>
-              <a:buFont typeface="Arial"/>
-              <a:buChar char="•"/>
-              <a:defRPr sz="1800" kern="1200">
-                <a:solidFill>
-                  <a:schemeClr val="tx1"/>
-                </a:solidFill>
-                <a:latin typeface="+mn-lt"/>
-                <a:ea typeface="+mn-lt"/>
-                <a:cs typeface="+mn-lt"/>
-              </a:defRPr>
-            </a:lvl4pPr>
-            <a:lvl5pPr marL="2057400" indent="-228600" algn="l" defTabSz="914400">
-              <a:lnSpc>
-                <a:spcPct val="90000"/>
-              </a:lnSpc>
-              <a:spcBef>
-                <a:spcPts val="500"/>
-              </a:spcBef>
-              <a:buFont typeface="Arial"/>
-              <a:buChar char="•"/>
-              <a:defRPr sz="1800" kern="1200">
-                <a:solidFill>
-                  <a:schemeClr val="tx1"/>
-                </a:solidFill>
-                <a:latin typeface="+mn-lt"/>
-                <a:ea typeface="+mn-lt"/>
-                <a:cs typeface="+mn-lt"/>
-              </a:defRPr>
-            </a:lvl5pPr>
-            <a:lvl6pPr marL="2514600" indent="-228600" algn="l" defTabSz="914400">
-              <a:lnSpc>
-                <a:spcPct val="90000"/>
-              </a:lnSpc>
-              <a:spcBef>
-                <a:spcPts val="500"/>
-              </a:spcBef>
-              <a:buFont typeface="Arial"/>
-              <a:buChar char="•"/>
-              <a:defRPr sz="1800" kern="1200">
-                <a:solidFill>
-                  <a:schemeClr val="tx1"/>
-                </a:solidFill>
-                <a:latin typeface="+mn-lt"/>
-                <a:ea typeface="+mn-lt"/>
-                <a:cs typeface="+mn-lt"/>
-              </a:defRPr>
-            </a:lvl6pPr>
-            <a:lvl7pPr marL="2971800" indent="-228600" algn="l" defTabSz="914400">
-              <a:lnSpc>
-                <a:spcPct val="90000"/>
-              </a:lnSpc>
-              <a:spcBef>
-                <a:spcPts val="500"/>
-              </a:spcBef>
-              <a:buFont typeface="Arial"/>
-              <a:buChar char="•"/>
-              <a:defRPr sz="1800" kern="1200">
-                <a:solidFill>
-                  <a:schemeClr val="tx1"/>
-                </a:solidFill>
-                <a:latin typeface="+mn-lt"/>
-                <a:ea typeface="+mn-lt"/>
-                <a:cs typeface="+mn-lt"/>
-              </a:defRPr>
-            </a:lvl7pPr>
-            <a:lvl8pPr marL="3429000" indent="-228600" algn="l" defTabSz="914400">
-              <a:lnSpc>
-                <a:spcPct val="90000"/>
-              </a:lnSpc>
-              <a:spcBef>
-                <a:spcPts val="500"/>
-              </a:spcBef>
-              <a:buFont typeface="Arial"/>
-              <a:buChar char="•"/>
-              <a:defRPr sz="1800" kern="1200">
-                <a:solidFill>
-                  <a:schemeClr val="tx1"/>
-                </a:solidFill>
-                <a:latin typeface="+mn-lt"/>
-                <a:ea typeface="+mn-lt"/>
-                <a:cs typeface="+mn-lt"/>
-              </a:defRPr>
-            </a:lvl8pPr>
-            <a:lvl9pPr marL="3886200" indent="-228600" algn="l" defTabSz="914400">
-              <a:lnSpc>
-                <a:spcPct val="90000"/>
-              </a:lnSpc>
-              <a:spcBef>
-                <a:spcPts val="500"/>
-              </a:spcBef>
-              <a:buFont typeface="Arial"/>
-              <a:buChar char="•"/>
-              <a:defRPr sz="1800" kern="1200">
-                <a:solidFill>
-                  <a:schemeClr val="tx1"/>
-                </a:solidFill>
-                <a:latin typeface="+mn-lt"/>
-                <a:ea typeface="+mn-lt"/>
-                <a:cs typeface="+mn-lt"/>
-              </a:defRPr>
-            </a:lvl9pPr>
-          </a:lstStyle>
-          <a:p xmlns:a="http://schemas.openxmlformats.org/drawingml/2006/main">
-            <a:pPr marL="0" indent="0">
-              <a:lnSpc>
-                <a:spcPct val="112000"/>
-              </a:lnSpc>
-              <a:spcBef>
-                <a:spcPts val="0"/>
-              </a:spcBef>
-              <a:spcAft>
-                <a:spcPts val="0"/>
-              </a:spcAft>
-              <a:buNone/>
-              <a:defRPr sz="1875">
-                <a:solidFill>
-                  <a:srgbClr val="FFFFFF"/>
-                </a:solidFill>
-                <a:latin typeface="Arial"/>
-                <a:ea typeface="Arial"/>
-                <a:cs typeface="Arial"/>
-              </a:defRPr>
-            </a:pPr>
-            <a:r>
-              <a:rPr sz="1875">
-                <a:solidFill>
-                  <a:srgbClr val="FFFFFF"/>
-                </a:solidFill>
-                <a:latin typeface="Arial"/>
-                <a:ea typeface="Arial"/>
-                <a:cs typeface="Arial"/>
-              </a:rPr>
-              <a:t>Match each mechanism to its purpose.</a:t>
-            </a:r>
-          </a:p>
-          <a:p xmlns:a="http://schemas.openxmlformats.org/drawingml/2006/main">
-            <a:pPr marL="0" indent="0">
-              <a:lnSpc>
-                <a:spcPct val="112000"/>
-              </a:lnSpc>
-              <a:spcBef>
-                <a:spcPts val="0"/>
-              </a:spcBef>
-              <a:spcAft>
-                <a:spcPts val="0"/>
-              </a:spcAft>
-              <a:buNone/>
-            </a:pPr>
-            <a:r>
-              <a:t/>
-            </a:r>
-          </a:p>
-          <a:p xmlns:a="http://schemas.openxmlformats.org/drawingml/2006/main">
-            <a:pPr marL="0" indent="0">
-              <a:lnSpc>
-                <a:spcPct val="112000"/>
-              </a:lnSpc>
-              <a:spcBef>
-                <a:spcPts val="0"/>
-              </a:spcBef>
-              <a:spcAft>
-                <a:spcPts val="0"/>
-              </a:spcAft>
-              <a:buNone/>
-              <a:defRPr sz="1875">
-                <a:solidFill>
-                  <a:srgbClr val="FFFFFF"/>
-                </a:solidFill>
-                <a:latin typeface="Arial"/>
-                <a:ea typeface="Arial"/>
-                <a:cs typeface="Arial"/>
-              </a:defRPr>
-            </a:pPr>
-            <a:r>
-              <a:rPr sz="1875">
-                <a:solidFill>
-                  <a:srgbClr val="FFFFFF"/>
-                </a:solidFill>
-                <a:latin typeface="Arial"/>
-                <a:ea typeface="Arial"/>
-                <a:cs typeface="Arial"/>
-              </a:rPr>
-              <a:t>Which detects some stack corruption? Which makes addresses less predictable? Which prevents executing instructions from data pages?</a:t>
-            </a:r>
-          </a:p>
-          <a:p xmlns:a="http://schemas.openxmlformats.org/drawingml/2006/main">
-            <a:pPr marL="0" indent="0">
-              <a:lnSpc>
-                <a:spcPct val="112000"/>
-              </a:lnSpc>
-              <a:spcBef>
-                <a:spcPts val="0"/>
-              </a:spcBef>
-              <a:spcAft>
-                <a:spcPts val="0"/>
-              </a:spcAft>
-              <a:buNone/>
-            </a:pPr>
-            <a:r>
-              <a:t/>
-            </a:r>
-          </a:p>
-          <a:p xmlns:a="http://schemas.openxmlformats.org/drawingml/2006/main">
-            <a:pPr marL="0" indent="0">
-              <a:lnSpc>
-                <a:spcPct val="112000"/>
-              </a:lnSpc>
-              <a:spcBef>
-                <a:spcPts val="0"/>
-              </a:spcBef>
-              <a:spcAft>
-                <a:spcPts val="0"/>
-              </a:spcAft>
-              <a:buNone/>
-              <a:defRPr sz="1875">
-                <a:solidFill>
-                  <a:srgbClr val="FFFFFF"/>
-                </a:solidFill>
-                <a:latin typeface="Arial"/>
-                <a:ea typeface="Arial"/>
-                <a:cs typeface="Arial"/>
-              </a:defRPr>
-            </a:pPr>
-            <a:r>
-              <a:rPr sz="1875">
-                <a:solidFill>
-                  <a:srgbClr val="FFFFFF"/>
-                </a:solidFill>
-                <a:latin typeface="Arial"/>
-                <a:ea typeface="Arial"/>
-                <a:cs typeface="Arial"/>
-              </a:rPr>
-              <a:t>Do any of these make an out-of-bounds C write valid?</a:t>
-            </a:r>
-          </a:p>
-        </p:txBody>
-      </p:sp>
-      <p:sp>
-        <p:nvSpPr>
-          <p:cNvPr id="8" name="Content Placeholder 3">
-            <a:extLst xmlns:a="http://schemas.openxmlformats.org/drawingml/2006/main">
-              <a:ext uri="{FF2B5EF4-FFF2-40B4-BE49-F238E27FC236}">
-                <a16:creationId xmlns:a16="http://schemas.microsoft.com/office/drawing/2014/main" id="{2EE8F343-A95F-2AAA-FE9E-A6C31E298DF7}"/>
-              </a:ext>
-            </a:extLst>
-          </p:cNvPr>
-          <p:cNvSpPr>
-            <a:spLocks xmlns:a="http://schemas.openxmlformats.org/drawingml/2006/main" noGrp="1"/>
-          </p:cNvSpPr>
-          <p:nvPr/>
-        </p:nvSpPr>
-        <p:spPr>
-          <a:xfrm xmlns:a="http://schemas.openxmlformats.org/drawingml/2006/main">
-            <a:off x="6256618" y="2031999"/>
-            <a:ext cx="5537200" cy="3534787"/>
-          </a:xfrm>
-          <a:prstGeom xmlns:a="http://schemas.openxmlformats.org/drawingml/2006/main" prst="rect">
-            <a:avLst/>
-          </a:prstGeom>
-        </p:spPr>
-        <p:txBody>
-          <a:bodyPr xmlns:a="http://schemas.openxmlformats.org/drawingml/2006/main" lIns="0" tIns="0" rIns="0" bIns="0" anchor="t">
-            <a:noAutofit/>
-          </a:bodyPr>
-          <a:lstStyle xmlns:a="http://schemas.openxmlformats.org/drawingml/2006/main">
-            <a:defPPr>
-              <a:defRPr sz="1800">
-                <a:solidFill>
-                  <a:srgbClr val="FFFFFF"/>
-                </a:solidFill>
-                <a:latin typeface="Consolas"/>
-                <a:ea typeface="Consolas"/>
-                <a:cs typeface="Consolas"/>
-              </a:defRPr>
-            </a:defPPr>
-            <a:lvl1pPr marL="228600" indent="-228600" algn="l" defTabSz="914400">
-              <a:lnSpc>
-                <a:spcPct val="90000"/>
-              </a:lnSpc>
-              <a:spcBef>
-                <a:spcPts val="1000"/>
-              </a:spcBef>
-              <a:buFont typeface="Arial"/>
-              <a:buChar char="•"/>
-              <a:defRPr sz="2400" kern="1200">
-                <a:solidFill>
-                  <a:schemeClr val="tx1"/>
-                </a:solidFill>
-                <a:latin typeface="+mn-lt"/>
-                <a:ea typeface="+mn-lt"/>
-                <a:cs typeface="+mn-lt"/>
-              </a:defRPr>
-            </a:lvl1pPr>
-            <a:lvl2pPr marL="685800" indent="-228600" algn="l" defTabSz="914400">
-              <a:lnSpc>
-                <a:spcPct val="90000"/>
-              </a:lnSpc>
-              <a:spcBef>
-                <a:spcPts val="500"/>
-              </a:spcBef>
-              <a:buFont typeface="Arial"/>
-              <a:buChar char="•"/>
-              <a:defRPr sz="2000" kern="1200">
-                <a:solidFill>
-                  <a:schemeClr val="tx1"/>
-                </a:solidFill>
-                <a:latin typeface="+mn-lt"/>
-                <a:ea typeface="+mn-lt"/>
-                <a:cs typeface="+mn-lt"/>
-              </a:defRPr>
-            </a:lvl2pPr>
-            <a:lvl3pPr marL="1143000" indent="-228600" algn="l" defTabSz="914400">
-              <a:lnSpc>
-                <a:spcPct val="90000"/>
-              </a:lnSpc>
-              <a:spcBef>
-                <a:spcPts val="500"/>
-              </a:spcBef>
-              <a:buFont typeface="Arial"/>
-              <a:buChar char="•"/>
-              <a:defRPr sz="1800" kern="1200">
-                <a:solidFill>
-                  <a:schemeClr val="tx1"/>
-                </a:solidFill>
-                <a:latin typeface="+mn-lt"/>
-                <a:ea typeface="+mn-lt"/>
-                <a:cs typeface="+mn-lt"/>
-              </a:defRPr>
-            </a:lvl3pPr>
-            <a:lvl4pPr marL="1600200" indent="-228600" algn="l" defTabSz="914400">
-              <a:lnSpc>
-                <a:spcPct val="90000"/>
-              </a:lnSpc>
-              <a:spcBef>
-                <a:spcPts val="500"/>
-              </a:spcBef>
-              <a:buFont typeface="Arial"/>
-              <a:buChar char="•"/>
-              <a:defRPr sz="1800" kern="1200">
-                <a:solidFill>
-                  <a:schemeClr val="tx1"/>
-                </a:solidFill>
-                <a:latin typeface="+mn-lt"/>
-                <a:ea typeface="+mn-lt"/>
-                <a:cs typeface="+mn-lt"/>
-              </a:defRPr>
-            </a:lvl4pPr>
-            <a:lvl5pPr marL="2057400" indent="-228600" algn="l" defTabSz="914400">
-              <a:lnSpc>
-                <a:spcPct val="90000"/>
-              </a:lnSpc>
-              <a:spcBef>
-                <a:spcPts val="500"/>
-              </a:spcBef>
-              <a:buFont typeface="Arial"/>
-              <a:buChar char="•"/>
-              <a:defRPr sz="1800" kern="1200">
-                <a:solidFill>
-                  <a:schemeClr val="tx1"/>
-                </a:solidFill>
-                <a:latin typeface="+mn-lt"/>
-                <a:ea typeface="+mn-lt"/>
-                <a:cs typeface="+mn-lt"/>
-              </a:defRPr>
-            </a:lvl5pPr>
-            <a:lvl6pPr marL="2514600" indent="-228600" algn="l" defTabSz="914400">
-              <a:lnSpc>
-                <a:spcPct val="90000"/>
-              </a:lnSpc>
-              <a:spcBef>
-                <a:spcPts val="500"/>
-              </a:spcBef>
-              <a:buFont typeface="Arial"/>
-              <a:buChar char="•"/>
-              <a:defRPr sz="1800" kern="1200">
-                <a:solidFill>
-                  <a:schemeClr val="tx1"/>
-                </a:solidFill>
-                <a:latin typeface="+mn-lt"/>
-                <a:ea typeface="+mn-lt"/>
-                <a:cs typeface="+mn-lt"/>
-              </a:defRPr>
-            </a:lvl6pPr>
-            <a:lvl7pPr marL="2971800" indent="-228600" algn="l" defTabSz="914400">
-              <a:lnSpc>
-                <a:spcPct val="90000"/>
-              </a:lnSpc>
-              <a:spcBef>
-                <a:spcPts val="500"/>
-              </a:spcBef>
-              <a:buFont typeface="Arial"/>
-              <a:buChar char="•"/>
-              <a:defRPr sz="1800" kern="1200">
-                <a:solidFill>
-                  <a:schemeClr val="tx1"/>
-                </a:solidFill>
-                <a:latin typeface="+mn-lt"/>
-                <a:ea typeface="+mn-lt"/>
-                <a:cs typeface="+mn-lt"/>
-              </a:defRPr>
-            </a:lvl7pPr>
-            <a:lvl8pPr marL="3429000" indent="-228600" algn="l" defTabSz="914400">
-              <a:lnSpc>
-                <a:spcPct val="90000"/>
-              </a:lnSpc>
-              <a:spcBef>
-                <a:spcPts val="500"/>
-              </a:spcBef>
-              <a:buFont typeface="Arial"/>
-              <a:buChar char="•"/>
-              <a:defRPr sz="1800" kern="1200">
-                <a:solidFill>
-                  <a:schemeClr val="tx1"/>
-                </a:solidFill>
-                <a:latin typeface="+mn-lt"/>
-                <a:ea typeface="+mn-lt"/>
-                <a:cs typeface="+mn-lt"/>
-              </a:defRPr>
-            </a:lvl8pPr>
-            <a:lvl9pPr marL="3886200" indent="-228600" algn="l" defTabSz="914400">
-              <a:lnSpc>
-                <a:spcPct val="90000"/>
-              </a:lnSpc>
-              <a:spcBef>
-                <a:spcPts val="500"/>
-              </a:spcBef>
-              <a:buFont typeface="Arial"/>
-              <a:buChar char="•"/>
-              <a:defRPr sz="1800" kern="1200">
-                <a:solidFill>
-                  <a:schemeClr val="tx1"/>
-                </a:solidFill>
-                <a:latin typeface="+mn-lt"/>
-                <a:ea typeface="+mn-lt"/>
-                <a:cs typeface="+mn-lt"/>
-              </a:defRPr>
-            </a:lvl9pPr>
-          </a:lstStyle>
-          <a:p xmlns:a="http://schemas.openxmlformats.org/drawingml/2006/main">
-            <a:pPr marL="0" indent="0">
-              <a:lnSpc>
-                <a:spcPct val="112000"/>
-              </a:lnSpc>
-              <a:spcBef>
-                <a:spcPts val="0"/>
-              </a:spcBef>
-              <a:spcAft>
-                <a:spcPts val="0"/>
-              </a:spcAft>
-              <a:buNone/>
-              <a:defRPr sz="1800">
-                <a:solidFill>
-                  <a:srgbClr val="FFFFFF"/>
-                </a:solidFill>
-                <a:latin typeface="Consolas"/>
-                <a:ea typeface="Consolas"/>
-                <a:cs typeface="Consolas"/>
-              </a:defRPr>
-            </a:pPr>
-            <a:r>
-              <a:rPr sz="1800">
-                <a:solidFill>
-                  <a:srgbClr val="FFFFFF"/>
-                </a:solidFill>
-                <a:latin typeface="Consolas"/>
-                <a:ea typeface="Consolas"/>
-                <a:cs typeface="Consolas"/>
-              </a:rPr>
-              <a:t>A. Stack canary</a:t>
-            </a:r>
-          </a:p>
-          <a:p xmlns:a="http://schemas.openxmlformats.org/drawingml/2006/main">
-            <a:pPr marL="0" indent="0">
-              <a:lnSpc>
-                <a:spcPct val="112000"/>
-              </a:lnSpc>
-              <a:spcBef>
-                <a:spcPts val="0"/>
-              </a:spcBef>
-              <a:spcAft>
-                <a:spcPts val="0"/>
-              </a:spcAft>
-              <a:buNone/>
-            </a:pPr>
-            <a:r>
-              <a:t/>
-            </a:r>
-          </a:p>
-          <a:p xmlns:a="http://schemas.openxmlformats.org/drawingml/2006/main">
-            <a:pPr marL="0" indent="0">
-              <a:lnSpc>
-                <a:spcPct val="112000"/>
-              </a:lnSpc>
-              <a:spcBef>
-                <a:spcPts val="0"/>
-              </a:spcBef>
-              <a:spcAft>
-                <a:spcPts val="0"/>
-              </a:spcAft>
-              <a:buNone/>
-              <a:defRPr sz="1800">
-                <a:solidFill>
-                  <a:srgbClr val="FFFFFF"/>
-                </a:solidFill>
-                <a:latin typeface="Consolas"/>
-                <a:ea typeface="Consolas"/>
-                <a:cs typeface="Consolas"/>
-              </a:defRPr>
-            </a:pPr>
-            <a:r>
-              <a:rPr sz="1800">
-                <a:solidFill>
-                  <a:srgbClr val="FFFFFF"/>
-                </a:solidFill>
-                <a:latin typeface="Consolas"/>
-                <a:ea typeface="Consolas"/>
-                <a:cs typeface="Consolas"/>
-              </a:rPr>
-              <a:t>B. Address-space randomization (ASLR)</a:t>
-            </a:r>
-          </a:p>
-          <a:p xmlns:a="http://schemas.openxmlformats.org/drawingml/2006/main">
-            <a:pPr marL="0" indent="0">
-              <a:lnSpc>
-                <a:spcPct val="112000"/>
-              </a:lnSpc>
-              <a:spcBef>
-                <a:spcPts val="0"/>
-              </a:spcBef>
-              <a:spcAft>
-                <a:spcPts val="0"/>
-              </a:spcAft>
-              <a:buNone/>
-            </a:pPr>
-            <a:r>
-              <a:t/>
-            </a:r>
-          </a:p>
-          <a:p xmlns:a="http://schemas.openxmlformats.org/drawingml/2006/main">
-            <a:pPr marL="0" indent="0">
-              <a:lnSpc>
-                <a:spcPct val="112000"/>
-              </a:lnSpc>
-              <a:spcBef>
-                <a:spcPts val="0"/>
-              </a:spcBef>
-              <a:spcAft>
-                <a:spcPts val="0"/>
-              </a:spcAft>
-              <a:buNone/>
-              <a:defRPr sz="1800">
-                <a:solidFill>
-                  <a:srgbClr val="FFFFFF"/>
-                </a:solidFill>
-                <a:latin typeface="Consolas"/>
-                <a:ea typeface="Consolas"/>
-                <a:cs typeface="Consolas"/>
-              </a:defRPr>
-            </a:pPr>
-            <a:r>
-              <a:rPr sz="1800">
-                <a:solidFill>
-                  <a:srgbClr val="FFFFFF"/>
-                </a:solidFill>
-                <a:latin typeface="Consolas"/>
-                <a:ea typeface="Consolas"/>
-                <a:cs typeface="Consolas"/>
-              </a:rPr>
-              <a:t>C. Non-executable data pages (NX)</a:t>
-            </a:r>
-          </a:p>
-          <a:p xmlns:a="http://schemas.openxmlformats.org/drawingml/2006/main">
-            <a:pPr marL="0" indent="0">
-              <a:lnSpc>
-                <a:spcPct val="112000"/>
-              </a:lnSpc>
-              <a:spcBef>
-                <a:spcPts val="0"/>
-              </a:spcBef>
-              <a:spcAft>
-                <a:spcPts val="0"/>
-              </a:spcAft>
-              <a:buNone/>
-            </a:pPr>
-            <a:r>
-              <a:t/>
-            </a:r>
-          </a:p>
-          <a:p xmlns:a="http://schemas.openxmlformats.org/drawingml/2006/main">
-            <a:pPr marL="0" indent="0">
-              <a:lnSpc>
-                <a:spcPct val="112000"/>
-              </a:lnSpc>
-              <a:spcBef>
-                <a:spcPts val="0"/>
-              </a:spcBef>
-              <a:spcAft>
-                <a:spcPts val="0"/>
-              </a:spcAft>
-              <a:buNone/>
-              <a:defRPr sz="1800">
-                <a:solidFill>
-                  <a:srgbClr val="FFFFFF"/>
-                </a:solidFill>
-                <a:latin typeface="Consolas"/>
-                <a:ea typeface="Consolas"/>
-                <a:cs typeface="Consolas"/>
-              </a:defRPr>
-            </a:pPr>
-            <a:r>
-              <a:rPr sz="1800">
-                <a:solidFill>
-                  <a:srgbClr val="FFFFFF"/>
-                </a:solidFill>
-                <a:latin typeface="Consolas"/>
-                <a:ea typeface="Consolas"/>
-                <a:cs typeface="Consolas"/>
-              </a:rPr>
-              <a:t>Start by fixing the bounds error.</a:t>
-            </a:r>
-          </a:p>
-        </p:txBody>
-      </p:sp>
-      <p:sp>
-        <p:nvSpPr>
-          <p:cNvPr id="534" name="Takeaway">
-            <a:extLst xmlns:a="http://schemas.openxmlformats.org/drawingml/2006/main">
-              <a:ext uri="{FF2B5EF4-FFF2-40B4-BE49-F238E27FC236}">
-                <a16:creationId xmlns:a16="http://schemas.microsoft.com/office/drawing/2014/main" id="{B215726E-FBDF-40CA-A84F-BA69C39E1E5A}"/>
-              </a:ext>
-            </a:extLst>
-          </p:cNvPr>
-          <p:cNvSpPr>
-            <a:spLocks xmlns:a="http://schemas.openxmlformats.org/drawingml/2006/main" noGrp="1"/>
-          </p:cNvSpPr>
-          <p:nvPr/>
-        </p:nvSpPr>
-        <p:spPr>
-          <a:xfrm xmlns:a="http://schemas.openxmlformats.org/drawingml/2006/main">
-            <a:off x="393668" y="5715000"/>
-            <a:ext cx="11404283" cy="466725"/>
-          </a:xfrm>
-          <a:prstGeom xmlns:a="http://schemas.openxmlformats.org/drawingml/2006/main" prst="rect">
-            <a:avLst/>
-          </a:prstGeom>
-          <a:noFill xmlns:a="http://schemas.openxmlformats.org/drawingml/2006/main"/>
-          <a:ln xmlns:a="http://schemas.openxmlformats.org/drawingml/2006/main" w="0">
-            <a:noFill/>
-          </a:ln>
-        </p:spPr>
-        <p:txBody>
-          <a:bodyPr xmlns:a="http://schemas.openxmlformats.org/drawingml/2006/main" lIns="0" tIns="0" rIns="0" bIns="0" anchor="t">
-            <a:noAutofit/>
-          </a:bodyPr>
-          <a:lstStyle xmlns:a="http://schemas.openxmlformats.org/drawingml/2006/main">
-            <a:defPPr>
-              <a:defRPr sz="1350">
-                <a:solidFill>
-                  <a:srgbClr val="CCCCCC"/>
-                </a:solidFill>
-                <a:latin typeface="Arial"/>
-                <a:ea typeface="Arial"/>
-                <a:cs typeface="Arial"/>
-              </a:defRPr>
-            </a:defPPr>
-          </a:lstStyle>
-          <a:p xmlns:a="http://schemas.openxmlformats.org/drawingml/2006/main">
-            <a:pPr marL="0" indent="0">
-              <a:lnSpc>
-                <a:spcPct val="112000"/>
-              </a:lnSpc>
-              <a:spcBef>
-                <a:spcPts val="0"/>
-              </a:spcBef>
-              <a:spcAft>
-                <a:spcPts val="0"/>
-              </a:spcAft>
-              <a:buNone/>
-              <a:defRPr sz="1350">
-                <a:solidFill>
-                  <a:srgbClr val="CCCCCC"/>
-                </a:solidFill>
-                <a:latin typeface="Arial"/>
-                <a:ea typeface="Arial"/>
-                <a:cs typeface="Arial"/>
-              </a:defRPr>
-            </a:pPr>
-            <a:r>
-              <a:rPr sz="1350">
-                <a:solidFill>
-                  <a:srgbClr val="CCCCCC"/>
-                </a:solidFill>
-                <a:latin typeface="Arial"/>
-                <a:ea typeface="Arial"/>
-                <a:cs typeface="Arial"/>
-              </a:rPr>
-              <a:t>Canaries, ASLR, and NX reduce risk. Correct bounds and lifetime handling are still required.</a:t>
             </a:r>
           </a:p>
         </p:txBody>
